--- a/public/talks/playwright-e2e-testing-talk.pptx
+++ b/public/talks/playwright-e2e-testing-talk.pptx
@@ -18,9 +18,11 @@
     <p:sldId id="266" r:id="rId12"/>
     <p:sldId id="267" r:id="rId13"/>
     <p:sldId id="268" r:id="rId14"/>
+    <p:sldId id="269" r:id="rId15"/>
+    <p:sldId id="270" r:id="rId16"/>
   </p:sldIdLst>
   <p:notesMasterIdLst>
-    <p:notesMasterId r:id="rId15"/>
+    <p:notesMasterId r:id="rId17"/>
   </p:notesMasterIdLst>
   <p:sldSz cx="12192000" cy="6858000"/>
   <p:notesSz cx="6858000" cy="12192000"/>
@@ -890,6 +892,182 @@
             <a:fld id="{F7021451-1387-4CA6-816F-3879F97B5CBC}" type="slidenum">
               <a:rPr lang="en-US"/>
               <a:t>13</a:t>
+            </a:fld>
+            <a:endParaRPr lang="en-US"/>
+          </a:p>
+        </p:txBody>
+      </p:sp>
+    </p:spTree>
+    <p:extLst>
+      <p:ext uri="{BB962C8B-B14F-4D97-AF65-F5344CB8AC3E}">
+        <p14:creationId xmlns:p14="http://schemas.microsoft.com/office/powerpoint/2010/main" val="1024086991"/>
+      </p:ext>
+    </p:extLst>
+  </p:cSld>
+  <p:clrMapOvr>
+    <a:masterClrMapping/>
+  </p:clrMapOvr>
+</p:notes>
+</file>
+
+<file path=ppt/notesSlides/notesSlide14.xml><?xml version="1.0" encoding="utf-8"?>
+<p:notes xmlns:a="http://schemas.openxmlformats.org/drawingml/2006/main" xmlns:r="http://schemas.openxmlformats.org/officeDocument/2006/relationships" xmlns:p="http://schemas.openxmlformats.org/presentationml/2006/main">
+  <p:cSld>
+    <p:spTree>
+      <p:nvGrpSpPr>
+        <p:cNvPr id="1" name=""/>
+        <p:cNvGrpSpPr/>
+        <p:nvPr/>
+      </p:nvGrpSpPr>
+      <p:grpSpPr>
+        <a:xfrm>
+          <a:off x="0" y="0"/>
+          <a:ext cx="0" cy="0"/>
+          <a:chOff x="0" y="0"/>
+          <a:chExt cx="0" cy="0"/>
+        </a:xfrm>
+      </p:grpSpPr>
+      <p:sp>
+        <p:nvSpPr>
+          <p:cNvPr id="2" name="Slide Image Placeholder 1"/>
+          <p:cNvSpPr>
+            <a:spLocks noGrp="1" noRot="1" noChangeAspect="1"/>
+          </p:cNvSpPr>
+          <p:nvPr>
+            <p:ph type="sldImg"/>
+          </p:nvPr>
+        </p:nvSpPr>
+        <p:spPr/>
+      </p:sp>
+      <p:sp>
+        <p:nvSpPr>
+          <p:cNvPr id="3" name="Notes Placeholder 2"/>
+          <p:cNvSpPr>
+            <a:spLocks noGrp="1"/>
+          </p:cNvSpPr>
+          <p:nvPr>
+            <p:ph type="body" idx="1"/>
+          </p:nvPr>
+        </p:nvSpPr>
+        <p:spPr/>
+        <p:txBody>
+          <a:bodyPr/>
+          <a:lstStyle/>
+          <a:p>
+            <a:r>
+              <a:rPr lang="en-US" dirty="0"/>
+              <a:t/>
+            </a:r>
+            <a:endParaRPr lang="en-US" dirty="0"/>
+          </a:p>
+        </p:txBody>
+      </p:sp>
+      <p:sp>
+        <p:nvSpPr>
+          <p:cNvPr id="4" name="Slide Number Placeholder 3"/>
+          <p:cNvSpPr>
+            <a:spLocks noGrp="1"/>
+          </p:cNvSpPr>
+          <p:nvPr>
+            <p:ph type="sldNum" sz="quarter" idx="10"/>
+          </p:nvPr>
+        </p:nvSpPr>
+        <p:spPr/>
+        <p:txBody>
+          <a:bodyPr/>
+          <a:lstStyle/>
+          <a:p>
+            <a:fld id="{F7021451-1387-4CA6-816F-3879F97B5CBC}" type="slidenum">
+              <a:rPr lang="en-US"/>
+              <a:t>14</a:t>
+            </a:fld>
+            <a:endParaRPr lang="en-US"/>
+          </a:p>
+        </p:txBody>
+      </p:sp>
+    </p:spTree>
+    <p:extLst>
+      <p:ext uri="{BB962C8B-B14F-4D97-AF65-F5344CB8AC3E}">
+        <p14:creationId xmlns:p14="http://schemas.microsoft.com/office/powerpoint/2010/main" val="1024086991"/>
+      </p:ext>
+    </p:extLst>
+  </p:cSld>
+  <p:clrMapOvr>
+    <a:masterClrMapping/>
+  </p:clrMapOvr>
+</p:notes>
+</file>
+
+<file path=ppt/notesSlides/notesSlide15.xml><?xml version="1.0" encoding="utf-8"?>
+<p:notes xmlns:a="http://schemas.openxmlformats.org/drawingml/2006/main" xmlns:r="http://schemas.openxmlformats.org/officeDocument/2006/relationships" xmlns:p="http://schemas.openxmlformats.org/presentationml/2006/main">
+  <p:cSld>
+    <p:spTree>
+      <p:nvGrpSpPr>
+        <p:cNvPr id="1" name=""/>
+        <p:cNvGrpSpPr/>
+        <p:nvPr/>
+      </p:nvGrpSpPr>
+      <p:grpSpPr>
+        <a:xfrm>
+          <a:off x="0" y="0"/>
+          <a:ext cx="0" cy="0"/>
+          <a:chOff x="0" y="0"/>
+          <a:chExt cx="0" cy="0"/>
+        </a:xfrm>
+      </p:grpSpPr>
+      <p:sp>
+        <p:nvSpPr>
+          <p:cNvPr id="2" name="Slide Image Placeholder 1"/>
+          <p:cNvSpPr>
+            <a:spLocks noGrp="1" noRot="1" noChangeAspect="1"/>
+          </p:cNvSpPr>
+          <p:nvPr>
+            <p:ph type="sldImg"/>
+          </p:nvPr>
+        </p:nvSpPr>
+        <p:spPr/>
+      </p:sp>
+      <p:sp>
+        <p:nvSpPr>
+          <p:cNvPr id="3" name="Notes Placeholder 2"/>
+          <p:cNvSpPr>
+            <a:spLocks noGrp="1"/>
+          </p:cNvSpPr>
+          <p:nvPr>
+            <p:ph type="body" idx="1"/>
+          </p:nvPr>
+        </p:nvSpPr>
+        <p:spPr/>
+        <p:txBody>
+          <a:bodyPr/>
+          <a:lstStyle/>
+          <a:p>
+            <a:r>
+              <a:rPr lang="en-US" dirty="0"/>
+              <a:t/>
+            </a:r>
+            <a:endParaRPr lang="en-US" dirty="0"/>
+          </a:p>
+        </p:txBody>
+      </p:sp>
+      <p:sp>
+        <p:nvSpPr>
+          <p:cNvPr id="4" name="Slide Number Placeholder 3"/>
+          <p:cNvSpPr>
+            <a:spLocks noGrp="1"/>
+          </p:cNvSpPr>
+          <p:nvPr>
+            <p:ph type="sldNum" sz="quarter" idx="10"/>
+          </p:nvPr>
+        </p:nvSpPr>
+        <p:spPr/>
+        <p:txBody>
+          <a:bodyPr/>
+          <a:lstStyle/>
+          <a:p>
+            <a:fld id="{F7021451-1387-4CA6-816F-3879F97B5CBC}" type="slidenum">
+              <a:rPr lang="en-US"/>
+              <a:t>15</a:t>
             </a:fld>
             <a:endParaRPr lang="en-US"/>
           </a:p>
@@ -3684,7 +3862,7 @@
                 <a:ea typeface="Barlow" pitchFamily="34" charset="-122"/>
                 <a:cs typeface="Barlow" pitchFamily="34" charset="-120"/>
               </a:rPr>
-              <a:t>• Shared test data and leaked state.</a:t>
+              <a:t>• Shared test data and leaked state — tests run in parallel.</a:t>
             </a:r>
             <a:endParaRPr lang="en-US" sz="1800" dirty="0"/>
           </a:p>
@@ -4870,7 +5048,7 @@
                 <a:ea typeface="Barlow Condensed" pitchFamily="34" charset="-122"/>
                 <a:cs typeface="Barlow Condensed" pitchFamily="34" charset="-120"/>
               </a:rPr>
-              <a:t>MAKE CHANGE CHEAPER</a:t>
+              <a:t>WAIT FOR THE RIGHT SIGNAL</a:t>
             </a:r>
             <a:endParaRPr lang="en-US" sz="3200" dirty="0"/>
           </a:p>
@@ -4909,7 +5087,7 @@
                 <a:ea typeface="Barlow" pitchFamily="34" charset="-122"/>
                 <a:cs typeface="Barlow" pitchFamily="34" charset="-120"/>
               </a:rPr>
-              <a:t>Stable selectors and small page objects keep suites alive.</a:t>
+              <a:t>Coordinate clicks and network responses so the test waits for real confirmation.</a:t>
             </a:r>
             <a:endParaRPr lang="en-US" sz="1700" dirty="0"/>
           </a:p>
@@ -4917,110 +5095,18 @@
       </p:sp>
       <p:sp>
         <p:nvSpPr>
-          <p:cNvPr id="11" name="Text 9"/>
-          <p:cNvSpPr/>
-          <p:nvPr/>
-        </p:nvSpPr>
-        <p:spPr>
-          <a:xfrm>
-            <a:off x="685800" y="2240280"/>
-            <a:ext cx="5257800" cy="3383280"/>
-          </a:xfrm>
-          <a:prstGeom prst="rect">
-            <a:avLst/>
-          </a:prstGeom>
-          <a:noFill/>
-          <a:ln/>
-        </p:spPr>
-        <p:txBody>
-          <a:bodyPr wrap="square" lIns="0" tIns="0" rIns="0" bIns="0" rtlCol="0" anchor="t">
-            <a:normAutofit/>
-          </a:bodyPr>
-          <a:lstStyle/>
-          <a:p>
-            <a:pPr indent="0" marL="0">
-              <a:buNone/>
-            </a:pPr>
-            <a:r>
-              <a:rPr lang="en-US" sz="1800" dirty="0">
-                <a:solidFill>
-                  <a:srgbClr val="0F0F0F"/>
-                </a:solidFill>
-                <a:latin typeface="Barlow" pitchFamily="34" charset="0"/>
-                <a:ea typeface="Barlow" pitchFamily="34" charset="-122"/>
-                <a:cs typeface="Barlow" pitchFamily="34" charset="-120"/>
-              </a:rPr>
-              <a:t>• Use accessible locators first: role, label, text.</a:t>
-            </a:r>
-            <a:endParaRPr lang="en-US" sz="1800" dirty="0"/>
-          </a:p>
-          <a:p>
-            <a:pPr indent="0" marL="0">
-              <a:buNone/>
-            </a:pPr>
-            <a:r>
-              <a:rPr lang="en-US" sz="1800" dirty="0">
-                <a:solidFill>
-                  <a:srgbClr val="0F0F0F"/>
-                </a:solidFill>
-                <a:latin typeface="Barlow" pitchFamily="34" charset="0"/>
-                <a:ea typeface="Barlow" pitchFamily="34" charset="-122"/>
-                <a:cs typeface="Barlow" pitchFamily="34" charset="-120"/>
-              </a:rPr>
-              <a:t>• Add `data-testid` only when the UI has no good semantic handle.</a:t>
-            </a:r>
-            <a:endParaRPr lang="en-US" sz="1800" dirty="0"/>
-          </a:p>
-          <a:p>
-            <a:pPr indent="0" marL="0">
-              <a:buNone/>
-            </a:pPr>
-            <a:r>
-              <a:rPr lang="en-US" sz="1800" dirty="0">
-                <a:solidFill>
-                  <a:srgbClr val="0F0F0F"/>
-                </a:solidFill>
-                <a:latin typeface="Barlow" pitchFamily="34" charset="0"/>
-                <a:ea typeface="Barlow" pitchFamily="34" charset="-122"/>
-                <a:cs typeface="Barlow" pitchFamily="34" charset="-120"/>
-              </a:rPr>
-              <a:t>• Extract repeated actions into page objects once two or three tests share them.</a:t>
-            </a:r>
-            <a:endParaRPr lang="en-US" sz="1800" dirty="0"/>
-          </a:p>
-          <a:p>
-            <a:pPr indent="0" marL="0">
-              <a:buNone/>
-            </a:pPr>
-            <a:r>
-              <a:rPr lang="en-US" sz="1800" dirty="0">
-                <a:solidFill>
-                  <a:srgbClr val="0F0F0F"/>
-                </a:solidFill>
-                <a:latin typeface="Barlow" pitchFamily="34" charset="0"/>
-                <a:ea typeface="Barlow" pitchFamily="34" charset="-122"/>
-                <a:cs typeface="Barlow" pitchFamily="34" charset="-120"/>
-              </a:rPr>
-              <a:t>• The goal is readable tests and one place to change selectors.</a:t>
-            </a:r>
-            <a:endParaRPr lang="en-US" sz="1800" dirty="0"/>
-          </a:p>
-        </p:txBody>
-      </p:sp>
-      <p:sp>
-        <p:nvSpPr>
-          <p:cNvPr id="12" name="Shape 10"/>
-          <p:cNvSpPr/>
-          <p:nvPr/>
-        </p:nvSpPr>
-        <p:spPr>
-          <a:xfrm>
-            <a:off x="6309360" y="2057400"/>
-            <a:ext cx="5074920" cy="4160520"/>
+          <p:cNvPr id="11" name="Shape 9"/>
+          <p:cNvSpPr/>
+          <p:nvPr/>
+        </p:nvSpPr>
+        <p:spPr>
+          <a:xfrm>
+            <a:off x="502920" y="2057400"/>
+            <a:ext cx="7132320" cy="3840480"/>
           </a:xfrm>
           <a:prstGeom prst="roundRect">
             <a:avLst>
-              <a:gd name="adj" fmla="val 1758"/>
+              <a:gd name="adj" fmla="val 1905"/>
             </a:avLst>
           </a:prstGeom>
           <a:solidFill>
@@ -5036,14 +5122,14 @@
       </p:sp>
       <p:sp>
         <p:nvSpPr>
-          <p:cNvPr id="13" name="Shape 11"/>
-          <p:cNvSpPr/>
-          <p:nvPr/>
-        </p:nvSpPr>
-        <p:spPr>
-          <a:xfrm>
-            <a:off x="6309360" y="2057400"/>
-            <a:ext cx="5074920" cy="420624"/>
+          <p:cNvPr id="12" name="Shape 10"/>
+          <p:cNvSpPr/>
+          <p:nvPr/>
+        </p:nvSpPr>
+        <p:spPr>
+          <a:xfrm>
+            <a:off x="502920" y="2057400"/>
+            <a:ext cx="7132320" cy="420624"/>
           </a:xfrm>
           <a:prstGeom prst="rect">
             <a:avLst/>
@@ -5061,14 +5147,14 @@
       </p:sp>
       <p:sp>
         <p:nvSpPr>
-          <p:cNvPr id="14" name="Text 12"/>
-          <p:cNvSpPr/>
-          <p:nvPr/>
-        </p:nvSpPr>
-        <p:spPr>
-          <a:xfrm>
-            <a:off x="6510528" y="2167128"/>
-            <a:ext cx="4672584" cy="146304"/>
+          <p:cNvPr id="13" name="Text 11"/>
+          <p:cNvSpPr/>
+          <p:nvPr/>
+        </p:nvSpPr>
+        <p:spPr>
+          <a:xfrm>
+            <a:off x="704088" y="2167128"/>
+            <a:ext cx="6729984" cy="146304"/>
           </a:xfrm>
           <a:prstGeom prst="rect">
             <a:avLst/>
@@ -5092,7 +5178,7 @@
                 <a:ea typeface="Barlow" pitchFamily="34" charset="-122"/>
                 <a:cs typeface="Barlow" pitchFamily="34" charset="-120"/>
               </a:rPr>
-              <a:t>pages/LoginPage.ts</a:t>
+              <a:t>e2e/checkout.spec.ts</a:t>
             </a:r>
             <a:endParaRPr lang="en-US" sz="1000" dirty="0"/>
           </a:p>
@@ -5100,14 +5186,14 @@
       </p:sp>
       <p:sp>
         <p:nvSpPr>
-          <p:cNvPr id="15" name="Text 13"/>
-          <p:cNvSpPr/>
-          <p:nvPr/>
-        </p:nvSpPr>
-        <p:spPr>
-          <a:xfrm>
-            <a:off x="6547104" y="2642616"/>
-            <a:ext cx="4599432" cy="201168"/>
+          <p:cNvPr id="14" name="Text 12"/>
+          <p:cNvSpPr/>
+          <p:nvPr/>
+        </p:nvSpPr>
+        <p:spPr>
+          <a:xfrm>
+            <a:off x="740664" y="2642616"/>
+            <a:ext cx="6656832" cy="201168"/>
           </a:xfrm>
           <a:prstGeom prst="rect">
             <a:avLst/>
@@ -5125,7 +5211,7 @@
               <a:buNone/>
             </a:pPr>
             <a:r>
-              <a:rPr lang="en-US" sz="1200" dirty="0">
+              <a:rPr lang="en-US" sz="1300" dirty="0">
                 <a:solidFill>
                   <a:srgbClr val="F58AC1"/>
                 </a:solidFill>
@@ -5133,13 +5219,13 @@
                 <a:ea typeface="Menlo" pitchFamily="34" charset="-122"/>
                 <a:cs typeface="Menlo" pitchFamily="34" charset="-120"/>
               </a:rPr>
-              <a:t>export</a:t>
-            </a:r>
-            <a:pPr indent="0" marL="0">
-              <a:buNone/>
-            </a:pPr>
-            <a:r>
-              <a:rPr lang="en-US" sz="1200" dirty="0">
+              <a:t>await</a:t>
+            </a:r>
+            <a:pPr indent="0" marL="0">
+              <a:buNone/>
+            </a:pPr>
+            <a:r>
+              <a:rPr lang="en-US" sz="1300" dirty="0">
                 <a:solidFill>
                   <a:srgbClr val="EFEFEF"/>
                 </a:solidFill>
@@ -5147,27 +5233,27 @@
                 <a:ea typeface="Menlo" pitchFamily="34" charset="-122"/>
                 <a:cs typeface="Menlo" pitchFamily="34" charset="-120"/>
               </a:rPr>
-              <a:t> </a:t>
-            </a:r>
-            <a:pPr indent="0" marL="0">
-              <a:buNone/>
-            </a:pPr>
-            <a:r>
-              <a:rPr lang="en-US" sz="1200" dirty="0">
-                <a:solidFill>
-                  <a:srgbClr val="F58AC1"/>
-                </a:solidFill>
-                <a:latin typeface="Menlo" pitchFamily="34" charset="0"/>
-                <a:ea typeface="Menlo" pitchFamily="34" charset="-122"/>
-                <a:cs typeface="Menlo" pitchFamily="34" charset="-120"/>
-              </a:rPr>
-              <a:t>class</a:t>
-            </a:r>
-            <a:pPr indent="0" marL="0">
-              <a:buNone/>
-            </a:pPr>
-            <a:r>
-              <a:rPr lang="en-US" sz="1200" dirty="0">
+              <a:t> Promise</a:t>
+            </a:r>
+            <a:pPr indent="0" marL="0">
+              <a:buNone/>
+            </a:pPr>
+            <a:r>
+              <a:rPr lang="en-US" sz="1300" dirty="0">
+                <a:solidFill>
+                  <a:srgbClr val="8BD6C0"/>
+                </a:solidFill>
+                <a:latin typeface="Menlo" pitchFamily="34" charset="0"/>
+                <a:ea typeface="Menlo" pitchFamily="34" charset="-122"/>
+                <a:cs typeface="Menlo" pitchFamily="34" charset="-120"/>
+              </a:rPr>
+              <a:t>.all</a:t>
+            </a:r>
+            <a:pPr indent="0" marL="0">
+              <a:buNone/>
+            </a:pPr>
+            <a:r>
+              <a:rPr lang="en-US" sz="1300" dirty="0">
                 <a:solidFill>
                   <a:srgbClr val="EFEFEF"/>
                 </a:solidFill>
@@ -5175,22 +5261,22 @@
                 <a:ea typeface="Menlo" pitchFamily="34" charset="-122"/>
                 <a:cs typeface="Menlo" pitchFamily="34" charset="-120"/>
               </a:rPr>
-              <a:t> LoginPage {</a:t>
-            </a:r>
-            <a:endParaRPr lang="en-US" sz="1200" dirty="0"/>
-          </a:p>
-        </p:txBody>
-      </p:sp>
-      <p:sp>
-        <p:nvSpPr>
-          <p:cNvPr id="16" name="Text 14"/>
-          <p:cNvSpPr/>
-          <p:nvPr/>
-        </p:nvSpPr>
-        <p:spPr>
-          <a:xfrm>
-            <a:off x="6547104" y="2916936"/>
-            <a:ext cx="4599432" cy="201168"/>
+              <a:t>([</a:t>
+            </a:r>
+            <a:endParaRPr lang="en-US" sz="1300" dirty="0"/>
+          </a:p>
+        </p:txBody>
+      </p:sp>
+      <p:sp>
+        <p:nvSpPr>
+          <p:cNvPr id="15" name="Text 13"/>
+          <p:cNvSpPr/>
+          <p:nvPr/>
+        </p:nvSpPr>
+        <p:spPr>
+          <a:xfrm>
+            <a:off x="740664" y="2916936"/>
+            <a:ext cx="6656832" cy="201168"/>
           </a:xfrm>
           <a:prstGeom prst="rect">
             <a:avLst/>
@@ -5208,7 +5294,7 @@
               <a:buNone/>
             </a:pPr>
             <a:r>
-              <a:rPr lang="en-US" sz="1200" dirty="0">
+              <a:rPr lang="en-US" sz="1300" dirty="0">
                 <a:solidFill>
                   <a:srgbClr val="EFEFEF"/>
                 </a:solidFill>
@@ -5216,27 +5302,27 @@
                 <a:ea typeface="Menlo" pitchFamily="34" charset="-122"/>
                 <a:cs typeface="Menlo" pitchFamily="34" charset="-120"/>
               </a:rPr>
-              <a:t>  </a:t>
-            </a:r>
-            <a:pPr indent="0" marL="0">
-              <a:buNone/>
-            </a:pPr>
-            <a:r>
-              <a:rPr lang="en-US" sz="1200" dirty="0">
-                <a:solidFill>
-                  <a:srgbClr val="F58AC1"/>
-                </a:solidFill>
-                <a:latin typeface="Menlo" pitchFamily="34" charset="0"/>
-                <a:ea typeface="Menlo" pitchFamily="34" charset="-122"/>
-                <a:cs typeface="Menlo" pitchFamily="34" charset="-120"/>
-              </a:rPr>
-              <a:t>constructor</a:t>
-            </a:r>
-            <a:pPr indent="0" marL="0">
-              <a:buNone/>
-            </a:pPr>
-            <a:r>
-              <a:rPr lang="en-US" sz="1200" dirty="0">
+              <a:t>  page</a:t>
+            </a:r>
+            <a:pPr indent="0" marL="0">
+              <a:buNone/>
+            </a:pPr>
+            <a:r>
+              <a:rPr lang="en-US" sz="1300" dirty="0">
+                <a:solidFill>
+                  <a:srgbClr val="8BD6C0"/>
+                </a:solidFill>
+                <a:latin typeface="Menlo" pitchFamily="34" charset="0"/>
+                <a:ea typeface="Menlo" pitchFamily="34" charset="-122"/>
+                <a:cs typeface="Menlo" pitchFamily="34" charset="-120"/>
+              </a:rPr>
+              <a:t>.waitForResponse</a:t>
+            </a:r>
+            <a:pPr indent="0" marL="0">
+              <a:buNone/>
+            </a:pPr>
+            <a:r>
+              <a:rPr lang="en-US" sz="1300" dirty="0">
                 <a:solidFill>
                   <a:srgbClr val="EFEFEF"/>
                 </a:solidFill>
@@ -5244,64 +5330,22 @@
                 <a:ea typeface="Menlo" pitchFamily="34" charset="-122"/>
                 <a:cs typeface="Menlo" pitchFamily="34" charset="-120"/>
               </a:rPr>
-              <a:t>(page) { </a:t>
-            </a:r>
-            <a:pPr indent="0" marL="0">
-              <a:buNone/>
-            </a:pPr>
-            <a:r>
-              <a:rPr lang="en-US" sz="1200" dirty="0">
-                <a:solidFill>
-                  <a:srgbClr val="F58AC1"/>
-                </a:solidFill>
-                <a:latin typeface="Menlo" pitchFamily="34" charset="0"/>
-                <a:ea typeface="Menlo" pitchFamily="34" charset="-122"/>
-                <a:cs typeface="Menlo" pitchFamily="34" charset="-120"/>
-              </a:rPr>
-              <a:t>this</a:t>
-            </a:r>
-            <a:pPr indent="0" marL="0">
-              <a:buNone/>
-            </a:pPr>
-            <a:r>
-              <a:rPr lang="en-US" sz="1200" dirty="0">
-                <a:solidFill>
-                  <a:srgbClr val="8BD6C0"/>
-                </a:solidFill>
-                <a:latin typeface="Menlo" pitchFamily="34" charset="0"/>
-                <a:ea typeface="Menlo" pitchFamily="34" charset="-122"/>
-                <a:cs typeface="Menlo" pitchFamily="34" charset="-120"/>
-              </a:rPr>
-              <a:t>.page</a:t>
-            </a:r>
-            <a:pPr indent="0" marL="0">
-              <a:buNone/>
-            </a:pPr>
-            <a:r>
-              <a:rPr lang="en-US" sz="1200" dirty="0">
-                <a:solidFill>
-                  <a:srgbClr val="EFEFEF"/>
-                </a:solidFill>
-                <a:latin typeface="Menlo" pitchFamily="34" charset="0"/>
-                <a:ea typeface="Menlo" pitchFamily="34" charset="-122"/>
-                <a:cs typeface="Menlo" pitchFamily="34" charset="-120"/>
-              </a:rPr>
-              <a:t> = page; }</a:t>
-            </a:r>
-            <a:endParaRPr lang="en-US" sz="1200" dirty="0"/>
-          </a:p>
-        </p:txBody>
-      </p:sp>
-      <p:sp>
-        <p:nvSpPr>
-          <p:cNvPr id="17" name="Text 15"/>
-          <p:cNvSpPr/>
-          <p:nvPr/>
-        </p:nvSpPr>
-        <p:spPr>
-          <a:xfrm>
-            <a:off x="6547104" y="3191256"/>
-            <a:ext cx="4599432" cy="201168"/>
+              <a:t>(</a:t>
+            </a:r>
+            <a:endParaRPr lang="en-US" sz="1300" dirty="0"/>
+          </a:p>
+        </p:txBody>
+      </p:sp>
+      <p:sp>
+        <p:nvSpPr>
+          <p:cNvPr id="16" name="Text 14"/>
+          <p:cNvSpPr/>
+          <p:nvPr/>
+        </p:nvSpPr>
+        <p:spPr>
+          <a:xfrm>
+            <a:off x="740664" y="3191256"/>
+            <a:ext cx="6656832" cy="201168"/>
           </a:xfrm>
           <a:prstGeom prst="rect">
             <a:avLst/>
@@ -5319,7 +5363,7 @@
               <a:buNone/>
             </a:pPr>
             <a:r>
-              <a:rPr lang="en-US" sz="1200" dirty="0">
+              <a:rPr lang="en-US" sz="1300" dirty="0">
                 <a:solidFill>
                   <a:srgbClr val="EFEFEF"/>
                 </a:solidFill>
@@ -5327,106 +5371,22 @@
                 <a:ea typeface="Menlo" pitchFamily="34" charset="-122"/>
                 <a:cs typeface="Menlo" pitchFamily="34" charset="-120"/>
               </a:rPr>
-              <a:t>  email = </a:t>
-            </a:r>
-            <a:pPr indent="0" marL="0">
-              <a:buNone/>
-            </a:pPr>
-            <a:r>
-              <a:rPr lang="en-US" sz="1200" dirty="0">
-                <a:solidFill>
-                  <a:srgbClr val="F58AC1"/>
-                </a:solidFill>
-                <a:latin typeface="Menlo" pitchFamily="34" charset="0"/>
-                <a:ea typeface="Menlo" pitchFamily="34" charset="-122"/>
-                <a:cs typeface="Menlo" pitchFamily="34" charset="-120"/>
-              </a:rPr>
-              <a:t>this</a:t>
-            </a:r>
-            <a:pPr indent="0" marL="0">
-              <a:buNone/>
-            </a:pPr>
-            <a:r>
-              <a:rPr lang="en-US" sz="1200" dirty="0">
-                <a:solidFill>
-                  <a:srgbClr val="8BD6C0"/>
-                </a:solidFill>
-                <a:latin typeface="Menlo" pitchFamily="34" charset="0"/>
-                <a:ea typeface="Menlo" pitchFamily="34" charset="-122"/>
-                <a:cs typeface="Menlo" pitchFamily="34" charset="-120"/>
-              </a:rPr>
-              <a:t>.page</a:t>
-            </a:r>
-            <a:pPr indent="0" marL="0">
-              <a:buNone/>
-            </a:pPr>
-            <a:r>
-              <a:rPr lang="en-US" sz="1200" dirty="0">
-                <a:solidFill>
-                  <a:srgbClr val="8BD6C0"/>
-                </a:solidFill>
-                <a:latin typeface="Menlo" pitchFamily="34" charset="0"/>
-                <a:ea typeface="Menlo" pitchFamily="34" charset="-122"/>
-                <a:cs typeface="Menlo" pitchFamily="34" charset="-120"/>
-              </a:rPr>
-              <a:t>.getByLabel</a:t>
-            </a:r>
-            <a:pPr indent="0" marL="0">
-              <a:buNone/>
-            </a:pPr>
-            <a:r>
-              <a:rPr lang="en-US" sz="1200" dirty="0">
-                <a:solidFill>
-                  <a:srgbClr val="EFEFEF"/>
-                </a:solidFill>
-                <a:latin typeface="Menlo" pitchFamily="34" charset="0"/>
-                <a:ea typeface="Menlo" pitchFamily="34" charset="-122"/>
-                <a:cs typeface="Menlo" pitchFamily="34" charset="-120"/>
-              </a:rPr>
-              <a:t>(</a:t>
-            </a:r>
-            <a:pPr indent="0" marL="0">
-              <a:buNone/>
-            </a:pPr>
-            <a:r>
-              <a:rPr lang="en-US" sz="1200" dirty="0">
-                <a:solidFill>
-                  <a:srgbClr val="F0C15A"/>
-                </a:solidFill>
-                <a:latin typeface="Menlo" pitchFamily="34" charset="0"/>
-                <a:ea typeface="Menlo" pitchFamily="34" charset="-122"/>
-                <a:cs typeface="Menlo" pitchFamily="34" charset="-120"/>
-              </a:rPr>
-              <a:t>"Email"</a:t>
-            </a:r>
-            <a:pPr indent="0" marL="0">
-              <a:buNone/>
-            </a:pPr>
-            <a:r>
-              <a:rPr lang="en-US" sz="1200" dirty="0">
-                <a:solidFill>
-                  <a:srgbClr val="EFEFEF"/>
-                </a:solidFill>
-                <a:latin typeface="Menlo" pitchFamily="34" charset="0"/>
-                <a:ea typeface="Menlo" pitchFamily="34" charset="-122"/>
-                <a:cs typeface="Menlo" pitchFamily="34" charset="-120"/>
-              </a:rPr>
-              <a:t>);</a:t>
-            </a:r>
-            <a:endParaRPr lang="en-US" sz="1200" dirty="0"/>
-          </a:p>
-        </p:txBody>
-      </p:sp>
-      <p:sp>
-        <p:nvSpPr>
-          <p:cNvPr id="18" name="Text 16"/>
-          <p:cNvSpPr/>
-          <p:nvPr/>
-        </p:nvSpPr>
-        <p:spPr>
-          <a:xfrm>
-            <a:off x="6547104" y="3465576"/>
-            <a:ext cx="4599432" cy="201168"/>
+              <a:t>    (response) =&gt;</a:t>
+            </a:r>
+            <a:endParaRPr lang="en-US" sz="1300" dirty="0"/>
+          </a:p>
+        </p:txBody>
+      </p:sp>
+      <p:sp>
+        <p:nvSpPr>
+          <p:cNvPr id="17" name="Text 15"/>
+          <p:cNvSpPr/>
+          <p:nvPr/>
+        </p:nvSpPr>
+        <p:spPr>
+          <a:xfrm>
+            <a:off x="740664" y="3465576"/>
+            <a:ext cx="6656832" cy="201168"/>
           </a:xfrm>
           <a:prstGeom prst="rect">
             <a:avLst/>
@@ -5444,7 +5404,7 @@
               <a:buNone/>
             </a:pPr>
             <a:r>
-              <a:rPr lang="en-US" sz="1200" dirty="0">
+              <a:rPr lang="en-US" sz="1300" dirty="0">
                 <a:solidFill>
                   <a:srgbClr val="EFEFEF"/>
                 </a:solidFill>
@@ -5452,27 +5412,13 @@
                 <a:ea typeface="Menlo" pitchFamily="34" charset="-122"/>
                 <a:cs typeface="Menlo" pitchFamily="34" charset="-120"/>
               </a:rPr>
-              <a:t>  password = </a:t>
-            </a:r>
-            <a:pPr indent="0" marL="0">
-              <a:buNone/>
-            </a:pPr>
-            <a:r>
-              <a:rPr lang="en-US" sz="1200" dirty="0">
-                <a:solidFill>
-                  <a:srgbClr val="F58AC1"/>
-                </a:solidFill>
-                <a:latin typeface="Menlo" pitchFamily="34" charset="0"/>
-                <a:ea typeface="Menlo" pitchFamily="34" charset="-122"/>
-                <a:cs typeface="Menlo" pitchFamily="34" charset="-120"/>
-              </a:rPr>
-              <a:t>this</a:t>
-            </a:r>
-            <a:pPr indent="0" marL="0">
-              <a:buNone/>
-            </a:pPr>
-            <a:r>
-              <a:rPr lang="en-US" sz="1200" dirty="0">
+              <a:t>      response</a:t>
+            </a:r>
+            <a:pPr indent="0" marL="0">
+              <a:buNone/>
+            </a:pPr>
+            <a:r>
+              <a:rPr lang="en-US" sz="1300" dirty="0">
                 <a:solidFill>
                   <a:srgbClr val="8BD6C0"/>
                 </a:solidFill>
@@ -5480,13 +5426,27 @@
                 <a:ea typeface="Menlo" pitchFamily="34" charset="-122"/>
                 <a:cs typeface="Menlo" pitchFamily="34" charset="-120"/>
               </a:rPr>
-              <a:t>.page</a:t>
-            </a:r>
-            <a:pPr indent="0" marL="0">
-              <a:buNone/>
-            </a:pPr>
-            <a:r>
-              <a:rPr lang="en-US" sz="1200" dirty="0">
+              <a:t>.url</a:t>
+            </a:r>
+            <a:pPr indent="0" marL="0">
+              <a:buNone/>
+            </a:pPr>
+            <a:r>
+              <a:rPr lang="en-US" sz="1300" dirty="0">
+                <a:solidFill>
+                  <a:srgbClr val="EFEFEF"/>
+                </a:solidFill>
+                <a:latin typeface="Menlo" pitchFamily="34" charset="0"/>
+                <a:ea typeface="Menlo" pitchFamily="34" charset="-122"/>
+                <a:cs typeface="Menlo" pitchFamily="34" charset="-120"/>
+              </a:rPr>
+              <a:t>()</a:t>
+            </a:r>
+            <a:pPr indent="0" marL="0">
+              <a:buNone/>
+            </a:pPr>
+            <a:r>
+              <a:rPr lang="en-US" sz="1300" dirty="0">
                 <a:solidFill>
                   <a:srgbClr val="8BD6C0"/>
                 </a:solidFill>
@@ -5494,13 +5454,13 @@
                 <a:ea typeface="Menlo" pitchFamily="34" charset="-122"/>
                 <a:cs typeface="Menlo" pitchFamily="34" charset="-120"/>
               </a:rPr>
-              <a:t>.getByLabel</a:t>
-            </a:r>
-            <a:pPr indent="0" marL="0">
-              <a:buNone/>
-            </a:pPr>
-            <a:r>
-              <a:rPr lang="en-US" sz="1200" dirty="0">
+              <a:t>.includes</a:t>
+            </a:r>
+            <a:pPr indent="0" marL="0">
+              <a:buNone/>
+            </a:pPr>
+            <a:r>
+              <a:rPr lang="en-US" sz="1300" dirty="0">
                 <a:solidFill>
                   <a:srgbClr val="EFEFEF"/>
                 </a:solidFill>
@@ -5514,7 +5474,7 @@
               <a:buNone/>
             </a:pPr>
             <a:r>
-              <a:rPr lang="en-US" sz="1200" dirty="0">
+              <a:rPr lang="en-US" sz="1300" dirty="0">
                 <a:solidFill>
                   <a:srgbClr val="F0C15A"/>
                 </a:solidFill>
@@ -5522,13 +5482,13 @@
                 <a:ea typeface="Menlo" pitchFamily="34" charset="-122"/>
                 <a:cs typeface="Menlo" pitchFamily="34" charset="-120"/>
               </a:rPr>
-              <a:t>"Password"</a:t>
-            </a:r>
-            <a:pPr indent="0" marL="0">
-              <a:buNone/>
-            </a:pPr>
-            <a:r>
-              <a:rPr lang="en-US" sz="1200" dirty="0">
+              <a:t>"/api/orders"</a:t>
+            </a:r>
+            <a:pPr indent="0" marL="0">
+              <a:buNone/>
+            </a:pPr>
+            <a:r>
+              <a:rPr lang="en-US" sz="1300" dirty="0">
                 <a:solidFill>
                   <a:srgbClr val="EFEFEF"/>
                 </a:solidFill>
@@ -5536,22 +5496,50 @@
                 <a:ea typeface="Menlo" pitchFamily="34" charset="-122"/>
                 <a:cs typeface="Menlo" pitchFamily="34" charset="-120"/>
               </a:rPr>
-              <a:t>);</a:t>
-            </a:r>
-            <a:endParaRPr lang="en-US" sz="1200" dirty="0"/>
-          </a:p>
-        </p:txBody>
-      </p:sp>
-      <p:sp>
-        <p:nvSpPr>
-          <p:cNvPr id="19" name="Text 17"/>
-          <p:cNvSpPr/>
-          <p:nvPr/>
-        </p:nvSpPr>
-        <p:spPr>
-          <a:xfrm>
-            <a:off x="6547104" y="3739896"/>
-            <a:ext cx="4599432" cy="201168"/>
+              <a:t>) &amp;&amp; response</a:t>
+            </a:r>
+            <a:pPr indent="0" marL="0">
+              <a:buNone/>
+            </a:pPr>
+            <a:r>
+              <a:rPr lang="en-US" sz="1300" dirty="0">
+                <a:solidFill>
+                  <a:srgbClr val="8BD6C0"/>
+                </a:solidFill>
+                <a:latin typeface="Menlo" pitchFamily="34" charset="0"/>
+                <a:ea typeface="Menlo" pitchFamily="34" charset="-122"/>
+                <a:cs typeface="Menlo" pitchFamily="34" charset="-120"/>
+              </a:rPr>
+              <a:t>.ok</a:t>
+            </a:r>
+            <a:pPr indent="0" marL="0">
+              <a:buNone/>
+            </a:pPr>
+            <a:r>
+              <a:rPr lang="en-US" sz="1300" dirty="0">
+                <a:solidFill>
+                  <a:srgbClr val="EFEFEF"/>
+                </a:solidFill>
+                <a:latin typeface="Menlo" pitchFamily="34" charset="0"/>
+                <a:ea typeface="Menlo" pitchFamily="34" charset="-122"/>
+                <a:cs typeface="Menlo" pitchFamily="34" charset="-120"/>
+              </a:rPr>
+              <a:t>(),</a:t>
+            </a:r>
+            <a:endParaRPr lang="en-US" sz="1300" dirty="0"/>
+          </a:p>
+        </p:txBody>
+      </p:sp>
+      <p:sp>
+        <p:nvSpPr>
+          <p:cNvPr id="18" name="Text 16"/>
+          <p:cNvSpPr/>
+          <p:nvPr/>
+        </p:nvSpPr>
+        <p:spPr>
+          <a:xfrm>
+            <a:off x="740664" y="3739896"/>
+            <a:ext cx="6656832" cy="201168"/>
           </a:xfrm>
           <a:prstGeom prst="rect">
             <a:avLst/>
@@ -5569,7 +5557,7 @@
               <a:buNone/>
             </a:pPr>
             <a:r>
-              <a:rPr lang="en-US" sz="1200" dirty="0">
+              <a:rPr lang="en-US" sz="1300" dirty="0">
                 <a:solidFill>
                   <a:srgbClr val="EFEFEF"/>
                 </a:solidFill>
@@ -5577,106 +5565,22 @@
                 <a:ea typeface="Menlo" pitchFamily="34" charset="-122"/>
                 <a:cs typeface="Menlo" pitchFamily="34" charset="-120"/>
               </a:rPr>
-              <a:t>  submit = </a:t>
-            </a:r>
-            <a:pPr indent="0" marL="0">
-              <a:buNone/>
-            </a:pPr>
-            <a:r>
-              <a:rPr lang="en-US" sz="1200" dirty="0">
-                <a:solidFill>
-                  <a:srgbClr val="F58AC1"/>
-                </a:solidFill>
-                <a:latin typeface="Menlo" pitchFamily="34" charset="0"/>
-                <a:ea typeface="Menlo" pitchFamily="34" charset="-122"/>
-                <a:cs typeface="Menlo" pitchFamily="34" charset="-120"/>
-              </a:rPr>
-              <a:t>this</a:t>
-            </a:r>
-            <a:pPr indent="0" marL="0">
-              <a:buNone/>
-            </a:pPr>
-            <a:r>
-              <a:rPr lang="en-US" sz="1200" dirty="0">
-                <a:solidFill>
-                  <a:srgbClr val="8BD6C0"/>
-                </a:solidFill>
-                <a:latin typeface="Menlo" pitchFamily="34" charset="0"/>
-                <a:ea typeface="Menlo" pitchFamily="34" charset="-122"/>
-                <a:cs typeface="Menlo" pitchFamily="34" charset="-120"/>
-              </a:rPr>
-              <a:t>.page</a:t>
-            </a:r>
-            <a:pPr indent="0" marL="0">
-              <a:buNone/>
-            </a:pPr>
-            <a:r>
-              <a:rPr lang="en-US" sz="1200" dirty="0">
-                <a:solidFill>
-                  <a:srgbClr val="8BD6C0"/>
-                </a:solidFill>
-                <a:latin typeface="Menlo" pitchFamily="34" charset="0"/>
-                <a:ea typeface="Menlo" pitchFamily="34" charset="-122"/>
-                <a:cs typeface="Menlo" pitchFamily="34" charset="-120"/>
-              </a:rPr>
-              <a:t>.getByTestId</a:t>
-            </a:r>
-            <a:pPr indent="0" marL="0">
-              <a:buNone/>
-            </a:pPr>
-            <a:r>
-              <a:rPr lang="en-US" sz="1200" dirty="0">
-                <a:solidFill>
-                  <a:srgbClr val="EFEFEF"/>
-                </a:solidFill>
-                <a:latin typeface="Menlo" pitchFamily="34" charset="0"/>
-                <a:ea typeface="Menlo" pitchFamily="34" charset="-122"/>
-                <a:cs typeface="Menlo" pitchFamily="34" charset="-120"/>
-              </a:rPr>
-              <a:t>(</a:t>
-            </a:r>
-            <a:pPr indent="0" marL="0">
-              <a:buNone/>
-            </a:pPr>
-            <a:r>
-              <a:rPr lang="en-US" sz="1200" dirty="0">
-                <a:solidFill>
-                  <a:srgbClr val="F0C15A"/>
-                </a:solidFill>
-                <a:latin typeface="Menlo" pitchFamily="34" charset="0"/>
-                <a:ea typeface="Menlo" pitchFamily="34" charset="-122"/>
-                <a:cs typeface="Menlo" pitchFamily="34" charset="-120"/>
-              </a:rPr>
-              <a:t>"login-submit"</a:t>
-            </a:r>
-            <a:pPr indent="0" marL="0">
-              <a:buNone/>
-            </a:pPr>
-            <a:r>
-              <a:rPr lang="en-US" sz="1200" dirty="0">
-                <a:solidFill>
-                  <a:srgbClr val="EFEFEF"/>
-                </a:solidFill>
-                <a:latin typeface="Menlo" pitchFamily="34" charset="0"/>
-                <a:ea typeface="Menlo" pitchFamily="34" charset="-122"/>
-                <a:cs typeface="Menlo" pitchFamily="34" charset="-120"/>
-              </a:rPr>
-              <a:t>);</a:t>
-            </a:r>
-            <a:endParaRPr lang="en-US" sz="1200" dirty="0"/>
-          </a:p>
-        </p:txBody>
-      </p:sp>
-      <p:sp>
-        <p:nvSpPr>
-          <p:cNvPr id="20" name="Text 18"/>
-          <p:cNvSpPr/>
-          <p:nvPr/>
-        </p:nvSpPr>
-        <p:spPr>
-          <a:xfrm>
-            <a:off x="6547104" y="4014216"/>
-            <a:ext cx="4599432" cy="201168"/>
+              <a:t>  ),</a:t>
+            </a:r>
+            <a:endParaRPr lang="en-US" sz="1300" dirty="0"/>
+          </a:p>
+        </p:txBody>
+      </p:sp>
+      <p:sp>
+        <p:nvSpPr>
+          <p:cNvPr id="19" name="Text 17"/>
+          <p:cNvSpPr/>
+          <p:nvPr/>
+        </p:nvSpPr>
+        <p:spPr>
+          <a:xfrm>
+            <a:off x="740664" y="4014216"/>
+            <a:ext cx="6656832" cy="201168"/>
           </a:xfrm>
           <a:prstGeom prst="rect">
             <a:avLst/>
@@ -5694,7 +5598,7 @@
               <a:buNone/>
             </a:pPr>
             <a:r>
-              <a:rPr lang="en-US" sz="1200" dirty="0">
+              <a:rPr lang="en-US" sz="1300" dirty="0">
                 <a:solidFill>
                   <a:srgbClr val="EFEFEF"/>
                 </a:solidFill>
@@ -5702,27 +5606,27 @@
                 <a:ea typeface="Menlo" pitchFamily="34" charset="-122"/>
                 <a:cs typeface="Menlo" pitchFamily="34" charset="-120"/>
               </a:rPr>
-              <a:t>  </a:t>
-            </a:r>
-            <a:pPr indent="0" marL="0">
-              <a:buNone/>
-            </a:pPr>
-            <a:r>
-              <a:rPr lang="en-US" sz="1200" dirty="0">
-                <a:solidFill>
-                  <a:srgbClr val="F58AC1"/>
-                </a:solidFill>
-                <a:latin typeface="Menlo" pitchFamily="34" charset="0"/>
-                <a:ea typeface="Menlo" pitchFamily="34" charset="-122"/>
-                <a:cs typeface="Menlo" pitchFamily="34" charset="-120"/>
-              </a:rPr>
-              <a:t>async</a:t>
-            </a:r>
-            <a:pPr indent="0" marL="0">
-              <a:buNone/>
-            </a:pPr>
-            <a:r>
-              <a:rPr lang="en-US" sz="1200" dirty="0">
+              <a:t>  page</a:t>
+            </a:r>
+            <a:pPr indent="0" marL="0">
+              <a:buNone/>
+            </a:pPr>
+            <a:r>
+              <a:rPr lang="en-US" sz="1300" dirty="0">
+                <a:solidFill>
+                  <a:srgbClr val="8BD6C0"/>
+                </a:solidFill>
+                <a:latin typeface="Menlo" pitchFamily="34" charset="0"/>
+                <a:ea typeface="Menlo" pitchFamily="34" charset="-122"/>
+                <a:cs typeface="Menlo" pitchFamily="34" charset="-120"/>
+              </a:rPr>
+              <a:t>.getByRole</a:t>
+            </a:r>
+            <a:pPr indent="0" marL="0">
+              <a:buNone/>
+            </a:pPr>
+            <a:r>
+              <a:rPr lang="en-US" sz="1300" dirty="0">
                 <a:solidFill>
                   <a:srgbClr val="EFEFEF"/>
                 </a:solidFill>
@@ -5730,22 +5634,106 @@
                 <a:ea typeface="Menlo" pitchFamily="34" charset="-122"/>
                 <a:cs typeface="Menlo" pitchFamily="34" charset="-120"/>
               </a:rPr>
-              <a:t> login(email, password) {</a:t>
-            </a:r>
-            <a:endParaRPr lang="en-US" sz="1200" dirty="0"/>
-          </a:p>
-        </p:txBody>
-      </p:sp>
-      <p:sp>
-        <p:nvSpPr>
-          <p:cNvPr id="21" name="Text 19"/>
-          <p:cNvSpPr/>
-          <p:nvPr/>
-        </p:nvSpPr>
-        <p:spPr>
-          <a:xfrm>
-            <a:off x="6547104" y="4288536"/>
-            <a:ext cx="4599432" cy="201168"/>
+              <a:t>(</a:t>
+            </a:r>
+            <a:pPr indent="0" marL="0">
+              <a:buNone/>
+            </a:pPr>
+            <a:r>
+              <a:rPr lang="en-US" sz="1300" dirty="0">
+                <a:solidFill>
+                  <a:srgbClr val="F0C15A"/>
+                </a:solidFill>
+                <a:latin typeface="Menlo" pitchFamily="34" charset="0"/>
+                <a:ea typeface="Menlo" pitchFamily="34" charset="-122"/>
+                <a:cs typeface="Menlo" pitchFamily="34" charset="-120"/>
+              </a:rPr>
+              <a:t>"button"</a:t>
+            </a:r>
+            <a:pPr indent="0" marL="0">
+              <a:buNone/>
+            </a:pPr>
+            <a:r>
+              <a:rPr lang="en-US" sz="1300" dirty="0">
+                <a:solidFill>
+                  <a:srgbClr val="EFEFEF"/>
+                </a:solidFill>
+                <a:latin typeface="Menlo" pitchFamily="34" charset="0"/>
+                <a:ea typeface="Menlo" pitchFamily="34" charset="-122"/>
+                <a:cs typeface="Menlo" pitchFamily="34" charset="-120"/>
+              </a:rPr>
+              <a:t>, { name: </a:t>
+            </a:r>
+            <a:pPr indent="0" marL="0">
+              <a:buNone/>
+            </a:pPr>
+            <a:r>
+              <a:rPr lang="en-US" sz="1300" dirty="0">
+                <a:solidFill>
+                  <a:srgbClr val="F0C15A"/>
+                </a:solidFill>
+                <a:latin typeface="Menlo" pitchFamily="34" charset="0"/>
+                <a:ea typeface="Menlo" pitchFamily="34" charset="-122"/>
+                <a:cs typeface="Menlo" pitchFamily="34" charset="-120"/>
+              </a:rPr>
+              <a:t>"Place order"</a:t>
+            </a:r>
+            <a:pPr indent="0" marL="0">
+              <a:buNone/>
+            </a:pPr>
+            <a:r>
+              <a:rPr lang="en-US" sz="1300" dirty="0">
+                <a:solidFill>
+                  <a:srgbClr val="EFEFEF"/>
+                </a:solidFill>
+                <a:latin typeface="Menlo" pitchFamily="34" charset="0"/>
+                <a:ea typeface="Menlo" pitchFamily="34" charset="-122"/>
+                <a:cs typeface="Menlo" pitchFamily="34" charset="-120"/>
+              </a:rPr>
+              <a:t> })</a:t>
+            </a:r>
+            <a:pPr indent="0" marL="0">
+              <a:buNone/>
+            </a:pPr>
+            <a:r>
+              <a:rPr lang="en-US" sz="1300" dirty="0">
+                <a:solidFill>
+                  <a:srgbClr val="8BD6C0"/>
+                </a:solidFill>
+                <a:latin typeface="Menlo" pitchFamily="34" charset="0"/>
+                <a:ea typeface="Menlo" pitchFamily="34" charset="-122"/>
+                <a:cs typeface="Menlo" pitchFamily="34" charset="-120"/>
+              </a:rPr>
+              <a:t>.click</a:t>
+            </a:r>
+            <a:pPr indent="0" marL="0">
+              <a:buNone/>
+            </a:pPr>
+            <a:r>
+              <a:rPr lang="en-US" sz="1300" dirty="0">
+                <a:solidFill>
+                  <a:srgbClr val="EFEFEF"/>
+                </a:solidFill>
+                <a:latin typeface="Menlo" pitchFamily="34" charset="0"/>
+                <a:ea typeface="Menlo" pitchFamily="34" charset="-122"/>
+                <a:cs typeface="Menlo" pitchFamily="34" charset="-120"/>
+              </a:rPr>
+              <a:t>(),</a:t>
+            </a:r>
+            <a:endParaRPr lang="en-US" sz="1300" dirty="0"/>
+          </a:p>
+        </p:txBody>
+      </p:sp>
+      <p:sp>
+        <p:nvSpPr>
+          <p:cNvPr id="20" name="Text 18"/>
+          <p:cNvSpPr/>
+          <p:nvPr/>
+        </p:nvSpPr>
+        <p:spPr>
+          <a:xfrm>
+            <a:off x="740664" y="4288536"/>
+            <a:ext cx="6656832" cy="201168"/>
           </a:xfrm>
           <a:prstGeom prst="rect">
             <a:avLst/>
@@ -5763,7 +5751,7 @@
               <a:buNone/>
             </a:pPr>
             <a:r>
-              <a:rPr lang="en-US" sz="1200" dirty="0">
+              <a:rPr lang="en-US" sz="1300" dirty="0">
                 <a:solidFill>
                   <a:srgbClr val="EFEFEF"/>
                 </a:solidFill>
@@ -5771,106 +5759,22 @@
                 <a:ea typeface="Menlo" pitchFamily="34" charset="-122"/>
                 <a:cs typeface="Menlo" pitchFamily="34" charset="-120"/>
               </a:rPr>
-              <a:t>    </a:t>
-            </a:r>
-            <a:pPr indent="0" marL="0">
-              <a:buNone/>
-            </a:pPr>
-            <a:r>
-              <a:rPr lang="en-US" sz="1200" dirty="0">
-                <a:solidFill>
-                  <a:srgbClr val="F58AC1"/>
-                </a:solidFill>
-                <a:latin typeface="Menlo" pitchFamily="34" charset="0"/>
-                <a:ea typeface="Menlo" pitchFamily="34" charset="-122"/>
-                <a:cs typeface="Menlo" pitchFamily="34" charset="-120"/>
-              </a:rPr>
-              <a:t>await</a:t>
-            </a:r>
-            <a:pPr indent="0" marL="0">
-              <a:buNone/>
-            </a:pPr>
-            <a:r>
-              <a:rPr lang="en-US" sz="1200" dirty="0">
-                <a:solidFill>
-                  <a:srgbClr val="EFEFEF"/>
-                </a:solidFill>
-                <a:latin typeface="Menlo" pitchFamily="34" charset="0"/>
-                <a:ea typeface="Menlo" pitchFamily="34" charset="-122"/>
-                <a:cs typeface="Menlo" pitchFamily="34" charset="-120"/>
-              </a:rPr>
-              <a:t> </a:t>
-            </a:r>
-            <a:pPr indent="0" marL="0">
-              <a:buNone/>
-            </a:pPr>
-            <a:r>
-              <a:rPr lang="en-US" sz="1200" dirty="0">
-                <a:solidFill>
-                  <a:srgbClr val="F58AC1"/>
-                </a:solidFill>
-                <a:latin typeface="Menlo" pitchFamily="34" charset="0"/>
-                <a:ea typeface="Menlo" pitchFamily="34" charset="-122"/>
-                <a:cs typeface="Menlo" pitchFamily="34" charset="-120"/>
-              </a:rPr>
-              <a:t>this</a:t>
-            </a:r>
-            <a:pPr indent="0" marL="0">
-              <a:buNone/>
-            </a:pPr>
-            <a:r>
-              <a:rPr lang="en-US" sz="1200" dirty="0">
-                <a:solidFill>
-                  <a:srgbClr val="8BD6C0"/>
-                </a:solidFill>
-                <a:latin typeface="Menlo" pitchFamily="34" charset="0"/>
-                <a:ea typeface="Menlo" pitchFamily="34" charset="-122"/>
-                <a:cs typeface="Menlo" pitchFamily="34" charset="-120"/>
-              </a:rPr>
-              <a:t>.email</a:t>
-            </a:r>
-            <a:pPr indent="0" marL="0">
-              <a:buNone/>
-            </a:pPr>
-            <a:r>
-              <a:rPr lang="en-US" sz="1200" dirty="0">
-                <a:solidFill>
-                  <a:srgbClr val="8BD6C0"/>
-                </a:solidFill>
-                <a:latin typeface="Menlo" pitchFamily="34" charset="0"/>
-                <a:ea typeface="Menlo" pitchFamily="34" charset="-122"/>
-                <a:cs typeface="Menlo" pitchFamily="34" charset="-120"/>
-              </a:rPr>
-              <a:t>.fill</a:t>
-            </a:r>
-            <a:pPr indent="0" marL="0">
-              <a:buNone/>
-            </a:pPr>
-            <a:r>
-              <a:rPr lang="en-US" sz="1200" dirty="0">
-                <a:solidFill>
-                  <a:srgbClr val="EFEFEF"/>
-                </a:solidFill>
-                <a:latin typeface="Menlo" pitchFamily="34" charset="0"/>
-                <a:ea typeface="Menlo" pitchFamily="34" charset="-122"/>
-                <a:cs typeface="Menlo" pitchFamily="34" charset="-120"/>
-              </a:rPr>
-              <a:t>(email);</a:t>
-            </a:r>
-            <a:endParaRPr lang="en-US" sz="1200" dirty="0"/>
-          </a:p>
-        </p:txBody>
-      </p:sp>
-      <p:sp>
-        <p:nvSpPr>
-          <p:cNvPr id="22" name="Text 20"/>
-          <p:cNvSpPr/>
-          <p:nvPr/>
-        </p:nvSpPr>
-        <p:spPr>
-          <a:xfrm>
-            <a:off x="6547104" y="4562856"/>
-            <a:ext cx="4599432" cy="201168"/>
+              <a:t>]);</a:t>
+            </a:r>
+            <a:endParaRPr lang="en-US" sz="1300" dirty="0"/>
+          </a:p>
+        </p:txBody>
+      </p:sp>
+      <p:sp>
+        <p:nvSpPr>
+          <p:cNvPr id="21" name="Text 19"/>
+          <p:cNvSpPr/>
+          <p:nvPr/>
+        </p:nvSpPr>
+        <p:spPr>
+          <a:xfrm>
+            <a:off x="740664" y="4562856"/>
+            <a:ext cx="6656832" cy="201168"/>
           </a:xfrm>
           <a:prstGeom prst="rect">
             <a:avLst/>
@@ -5887,115 +5791,20 @@
             <a:pPr indent="0" marL="0">
               <a:buNone/>
             </a:pPr>
-            <a:r>
-              <a:rPr lang="en-US" sz="1200" dirty="0">
-                <a:solidFill>
-                  <a:srgbClr val="EFEFEF"/>
-                </a:solidFill>
-                <a:latin typeface="Menlo" pitchFamily="34" charset="0"/>
-                <a:ea typeface="Menlo" pitchFamily="34" charset="-122"/>
-                <a:cs typeface="Menlo" pitchFamily="34" charset="-120"/>
-              </a:rPr>
-              <a:t>    </a:t>
-            </a:r>
-            <a:pPr indent="0" marL="0">
-              <a:buNone/>
-            </a:pPr>
-            <a:r>
-              <a:rPr lang="en-US" sz="1200" dirty="0">
-                <a:solidFill>
-                  <a:srgbClr val="F58AC1"/>
-                </a:solidFill>
-                <a:latin typeface="Menlo" pitchFamily="34" charset="0"/>
-                <a:ea typeface="Menlo" pitchFamily="34" charset="-122"/>
-                <a:cs typeface="Menlo" pitchFamily="34" charset="-120"/>
-              </a:rPr>
-              <a:t>await</a:t>
-            </a:r>
-            <a:pPr indent="0" marL="0">
-              <a:buNone/>
-            </a:pPr>
-            <a:r>
-              <a:rPr lang="en-US" sz="1200" dirty="0">
-                <a:solidFill>
-                  <a:srgbClr val="EFEFEF"/>
-                </a:solidFill>
-                <a:latin typeface="Menlo" pitchFamily="34" charset="0"/>
-                <a:ea typeface="Menlo" pitchFamily="34" charset="-122"/>
-                <a:cs typeface="Menlo" pitchFamily="34" charset="-120"/>
-              </a:rPr>
-              <a:t> </a:t>
-            </a:r>
-            <a:pPr indent="0" marL="0">
-              <a:buNone/>
-            </a:pPr>
-            <a:r>
-              <a:rPr lang="en-US" sz="1200" dirty="0">
-                <a:solidFill>
-                  <a:srgbClr val="F58AC1"/>
-                </a:solidFill>
-                <a:latin typeface="Menlo" pitchFamily="34" charset="0"/>
-                <a:ea typeface="Menlo" pitchFamily="34" charset="-122"/>
-                <a:cs typeface="Menlo" pitchFamily="34" charset="-120"/>
-              </a:rPr>
-              <a:t>this</a:t>
-            </a:r>
-            <a:pPr indent="0" marL="0">
-              <a:buNone/>
-            </a:pPr>
-            <a:r>
-              <a:rPr lang="en-US" sz="1200" dirty="0">
-                <a:solidFill>
-                  <a:srgbClr val="8BD6C0"/>
-                </a:solidFill>
-                <a:latin typeface="Menlo" pitchFamily="34" charset="0"/>
-                <a:ea typeface="Menlo" pitchFamily="34" charset="-122"/>
-                <a:cs typeface="Menlo" pitchFamily="34" charset="-120"/>
-              </a:rPr>
-              <a:t>.password</a:t>
-            </a:r>
-            <a:pPr indent="0" marL="0">
-              <a:buNone/>
-            </a:pPr>
-            <a:r>
-              <a:rPr lang="en-US" sz="1200" dirty="0">
-                <a:solidFill>
-                  <a:srgbClr val="8BD6C0"/>
-                </a:solidFill>
-                <a:latin typeface="Menlo" pitchFamily="34" charset="0"/>
-                <a:ea typeface="Menlo" pitchFamily="34" charset="-122"/>
-                <a:cs typeface="Menlo" pitchFamily="34" charset="-120"/>
-              </a:rPr>
-              <a:t>.fill</a:t>
-            </a:r>
-            <a:pPr indent="0" marL="0">
-              <a:buNone/>
-            </a:pPr>
-            <a:r>
-              <a:rPr lang="en-US" sz="1200" dirty="0">
-                <a:solidFill>
-                  <a:srgbClr val="EFEFEF"/>
-                </a:solidFill>
-                <a:latin typeface="Menlo" pitchFamily="34" charset="0"/>
-                <a:ea typeface="Menlo" pitchFamily="34" charset="-122"/>
-                <a:cs typeface="Menlo" pitchFamily="34" charset="-120"/>
-              </a:rPr>
-              <a:t>(password);</a:t>
-            </a:r>
-            <a:endParaRPr lang="en-US" sz="1200" dirty="0"/>
-          </a:p>
-        </p:txBody>
-      </p:sp>
-      <p:sp>
-        <p:nvSpPr>
-          <p:cNvPr id="23" name="Text 21"/>
-          <p:cNvSpPr/>
-          <p:nvPr/>
-        </p:nvSpPr>
-        <p:spPr>
-          <a:xfrm>
-            <a:off x="6547104" y="4837176"/>
-            <a:ext cx="4599432" cy="201168"/>
+            <a:endParaRPr lang="en-US" sz="1300" dirty="0"/>
+          </a:p>
+        </p:txBody>
+      </p:sp>
+      <p:sp>
+        <p:nvSpPr>
+          <p:cNvPr id="22" name="Text 20"/>
+          <p:cNvSpPr/>
+          <p:nvPr/>
+        </p:nvSpPr>
+        <p:spPr>
+          <a:xfrm>
+            <a:off x="740664" y="4837176"/>
+            <a:ext cx="6656832" cy="201168"/>
           </a:xfrm>
           <a:prstGeom prst="rect">
             <a:avLst/>
@@ -6013,7 +5822,21 @@
               <a:buNone/>
             </a:pPr>
             <a:r>
-              <a:rPr lang="en-US" sz="1200" dirty="0">
+              <a:rPr lang="en-US" sz="1300" dirty="0">
+                <a:solidFill>
+                  <a:srgbClr val="F58AC1"/>
+                </a:solidFill>
+                <a:latin typeface="Menlo" pitchFamily="34" charset="0"/>
+                <a:ea typeface="Menlo" pitchFamily="34" charset="-122"/>
+                <a:cs typeface="Menlo" pitchFamily="34" charset="-120"/>
+              </a:rPr>
+              <a:t>await</a:t>
+            </a:r>
+            <a:pPr indent="0" marL="0">
+              <a:buNone/>
+            </a:pPr>
+            <a:r>
+              <a:rPr lang="en-US" sz="1300" dirty="0">
                 <a:solidFill>
                   <a:srgbClr val="EFEFEF"/>
                 </a:solidFill>
@@ -6021,13 +5844,13 @@
                 <a:ea typeface="Menlo" pitchFamily="34" charset="-122"/>
                 <a:cs typeface="Menlo" pitchFamily="34" charset="-120"/>
               </a:rPr>
-              <a:t>    </a:t>
-            </a:r>
-            <a:pPr indent="0" marL="0">
-              <a:buNone/>
-            </a:pPr>
-            <a:r>
-              <a:rPr lang="en-US" sz="1200" dirty="0">
+              <a:t> </a:t>
+            </a:r>
+            <a:pPr indent="0" marL="0">
+              <a:buNone/>
+            </a:pPr>
+            <a:r>
+              <a:rPr lang="en-US" sz="1300" dirty="0">
                 <a:solidFill>
                   <a:srgbClr val="F58AC1"/>
                 </a:solidFill>
@@ -6035,13 +5858,13 @@
                 <a:ea typeface="Menlo" pitchFamily="34" charset="-122"/>
                 <a:cs typeface="Menlo" pitchFamily="34" charset="-120"/>
               </a:rPr>
-              <a:t>await</a:t>
-            </a:r>
-            <a:pPr indent="0" marL="0">
-              <a:buNone/>
-            </a:pPr>
-            <a:r>
-              <a:rPr lang="en-US" sz="1200" dirty="0">
+              <a:t>expect</a:t>
+            </a:r>
+            <a:pPr indent="0" marL="0">
+              <a:buNone/>
+            </a:pPr>
+            <a:r>
+              <a:rPr lang="en-US" sz="1300" dirty="0">
                 <a:solidFill>
                   <a:srgbClr val="EFEFEF"/>
                 </a:solidFill>
@@ -6049,27 +5872,13 @@
                 <a:ea typeface="Menlo" pitchFamily="34" charset="-122"/>
                 <a:cs typeface="Menlo" pitchFamily="34" charset="-120"/>
               </a:rPr>
-              <a:t> </a:t>
-            </a:r>
-            <a:pPr indent="0" marL="0">
-              <a:buNone/>
-            </a:pPr>
-            <a:r>
-              <a:rPr lang="en-US" sz="1200" dirty="0">
-                <a:solidFill>
-                  <a:srgbClr val="F58AC1"/>
-                </a:solidFill>
-                <a:latin typeface="Menlo" pitchFamily="34" charset="0"/>
-                <a:ea typeface="Menlo" pitchFamily="34" charset="-122"/>
-                <a:cs typeface="Menlo" pitchFamily="34" charset="-120"/>
-              </a:rPr>
-              <a:t>this</a:t>
-            </a:r>
-            <a:pPr indent="0" marL="0">
-              <a:buNone/>
-            </a:pPr>
-            <a:r>
-              <a:rPr lang="en-US" sz="1200" dirty="0">
+              <a:t>(page</a:t>
+            </a:r>
+            <a:pPr indent="0" marL="0">
+              <a:buNone/>
+            </a:pPr>
+            <a:r>
+              <a:rPr lang="en-US" sz="1300" dirty="0">
                 <a:solidFill>
                   <a:srgbClr val="8BD6C0"/>
                 </a:solidFill>
@@ -6077,13 +5886,55 @@
                 <a:ea typeface="Menlo" pitchFamily="34" charset="-122"/>
                 <a:cs typeface="Menlo" pitchFamily="34" charset="-120"/>
               </a:rPr>
-              <a:t>.submit</a:t>
-            </a:r>
-            <a:pPr indent="0" marL="0">
-              <a:buNone/>
-            </a:pPr>
-            <a:r>
-              <a:rPr lang="en-US" sz="1200" dirty="0">
+              <a:t>.getByText</a:t>
+            </a:r>
+            <a:pPr indent="0" marL="0">
+              <a:buNone/>
+            </a:pPr>
+            <a:r>
+              <a:rPr lang="en-US" sz="1300" dirty="0">
+                <a:solidFill>
+                  <a:srgbClr val="EFEFEF"/>
+                </a:solidFill>
+                <a:latin typeface="Menlo" pitchFamily="34" charset="0"/>
+                <a:ea typeface="Menlo" pitchFamily="34" charset="-122"/>
+                <a:cs typeface="Menlo" pitchFamily="34" charset="-120"/>
+              </a:rPr>
+              <a:t>(</a:t>
+            </a:r>
+            <a:pPr indent="0" marL="0">
+              <a:buNone/>
+            </a:pPr>
+            <a:r>
+              <a:rPr lang="en-US" sz="1300" dirty="0">
+                <a:solidFill>
+                  <a:srgbClr val="F0C15A"/>
+                </a:solidFill>
+                <a:latin typeface="Menlo" pitchFamily="34" charset="0"/>
+                <a:ea typeface="Menlo" pitchFamily="34" charset="-122"/>
+                <a:cs typeface="Menlo" pitchFamily="34" charset="-120"/>
+              </a:rPr>
+              <a:t>"Order confirmed"</a:t>
+            </a:r>
+            <a:pPr indent="0" marL="0">
+              <a:buNone/>
+            </a:pPr>
+            <a:r>
+              <a:rPr lang="en-US" sz="1300" dirty="0">
+                <a:solidFill>
+                  <a:srgbClr val="EFEFEF"/>
+                </a:solidFill>
+                <a:latin typeface="Menlo" pitchFamily="34" charset="0"/>
+                <a:ea typeface="Menlo" pitchFamily="34" charset="-122"/>
+                <a:cs typeface="Menlo" pitchFamily="34" charset="-120"/>
+              </a:rPr>
+              <a:t>))</a:t>
+            </a:r>
+            <a:pPr indent="0" marL="0">
+              <a:buNone/>
+            </a:pPr>
+            <a:r>
+              <a:rPr lang="en-US" sz="1300" dirty="0">
                 <a:solidFill>
                   <a:srgbClr val="8BD6C0"/>
                 </a:solidFill>
@@ -6091,13 +5942,13 @@
                 <a:ea typeface="Menlo" pitchFamily="34" charset="-122"/>
                 <a:cs typeface="Menlo" pitchFamily="34" charset="-120"/>
               </a:rPr>
-              <a:t>.click</a:t>
-            </a:r>
-            <a:pPr indent="0" marL="0">
-              <a:buNone/>
-            </a:pPr>
-            <a:r>
-              <a:rPr lang="en-US" sz="1200" dirty="0">
+              <a:t>.toBeVisible</a:t>
+            </a:r>
+            <a:pPr indent="0" marL="0">
+              <a:buNone/>
+            </a:pPr>
+            <a:r>
+              <a:rPr lang="en-US" sz="1300" dirty="0">
                 <a:solidFill>
                   <a:srgbClr val="EFEFEF"/>
                 </a:solidFill>
@@ -6107,9 +5958,36 @@
               </a:rPr>
               <a:t>();</a:t>
             </a:r>
-            <a:endParaRPr lang="en-US" sz="1200" dirty="0"/>
-          </a:p>
-        </p:txBody>
+            <a:endParaRPr lang="en-US" sz="1300" dirty="0"/>
+          </a:p>
+        </p:txBody>
+      </p:sp>
+      <p:sp>
+        <p:nvSpPr>
+          <p:cNvPr id="23" name="Shape 21"/>
+          <p:cNvSpPr/>
+          <p:nvPr/>
+        </p:nvSpPr>
+        <p:spPr>
+          <a:xfrm>
+            <a:off x="7909560" y="2057400"/>
+            <a:ext cx="4041648" cy="3840480"/>
+          </a:xfrm>
+          <a:prstGeom prst="roundRect">
+            <a:avLst>
+              <a:gd name="adj" fmla="val 1905"/>
+            </a:avLst>
+          </a:prstGeom>
+          <a:solidFill>
+            <a:srgbClr val="FFFAF4"/>
+          </a:solidFill>
+          <a:ln w="12700">
+            <a:solidFill>
+              <a:srgbClr val="D8C5AE"/>
+            </a:solidFill>
+            <a:prstDash val="solid"/>
+          </a:ln>
+        </p:spPr>
       </p:sp>
       <p:sp>
         <p:nvSpPr>
@@ -6119,17 +5997,56 @@
         </p:nvSpPr>
         <p:spPr>
           <a:xfrm>
-            <a:off x="6547104" y="5111496"/>
-            <a:ext cx="4599432" cy="201168"/>
-          </a:xfrm>
-          <a:prstGeom prst="rect">
-            <a:avLst/>
-          </a:prstGeom>
-          <a:noFill/>
-          <a:ln/>
-        </p:spPr>
-        <p:txBody>
-          <a:bodyPr wrap="square" lIns="0" tIns="0" rIns="0" bIns="0" rtlCol="0" anchor="ctr">
+            <a:off x="8183880" y="2377440"/>
+            <a:ext cx="3474720" cy="228600"/>
+          </a:xfrm>
+          <a:prstGeom prst="rect">
+            <a:avLst/>
+          </a:prstGeom>
+          <a:noFill/>
+          <a:ln/>
+        </p:spPr>
+        <p:txBody>
+          <a:bodyPr wrap="square" rtlCol="0" anchor="ctr"/>
+          <a:lstStyle/>
+          <a:p>
+            <a:pPr indent="0" marL="0">
+              <a:buNone/>
+            </a:pPr>
+            <a:r>
+              <a:rPr lang="en-US" sz="2200" b="1" dirty="0">
+                <a:solidFill>
+                  <a:srgbClr val="0F0F0F"/>
+                </a:solidFill>
+                <a:latin typeface="Barlow Condensed" pitchFamily="34" charset="0"/>
+                <a:ea typeface="Barlow Condensed" pitchFamily="34" charset="-122"/>
+                <a:cs typeface="Barlow Condensed" pitchFamily="34" charset="-120"/>
+              </a:rPr>
+              <a:t>Why this works</a:t>
+            </a:r>
+            <a:endParaRPr lang="en-US" sz="2200" dirty="0"/>
+          </a:p>
+        </p:txBody>
+      </p:sp>
+      <p:sp>
+        <p:nvSpPr>
+          <p:cNvPr id="25" name="Text 23"/>
+          <p:cNvSpPr/>
+          <p:nvPr/>
+        </p:nvSpPr>
+        <p:spPr>
+          <a:xfrm>
+            <a:off x="8183880" y="2788920"/>
+            <a:ext cx="3474720" cy="2926080"/>
+          </a:xfrm>
+          <a:prstGeom prst="rect">
+            <a:avLst/>
+          </a:prstGeom>
+          <a:noFill/>
+          <a:ln/>
+        </p:spPr>
+        <p:txBody>
+          <a:bodyPr wrap="square" lIns="0" tIns="0" rIns="0" bIns="0" rtlCol="0" anchor="t">
             <a:normAutofit/>
           </a:bodyPr>
           <a:lstStyle/>
@@ -6138,58 +6055,51 @@
               <a:buNone/>
             </a:pPr>
             <a:r>
-              <a:rPr lang="en-US" sz="1200" dirty="0">
-                <a:solidFill>
-                  <a:srgbClr val="EFEFEF"/>
-                </a:solidFill>
-                <a:latin typeface="Menlo" pitchFamily="34" charset="0"/>
-                <a:ea typeface="Menlo" pitchFamily="34" charset="-122"/>
-                <a:cs typeface="Menlo" pitchFamily="34" charset="-120"/>
-              </a:rPr>
-              <a:t>  }</a:t>
-            </a:r>
-            <a:endParaRPr lang="en-US" sz="1200" dirty="0"/>
-          </a:p>
-        </p:txBody>
-      </p:sp>
-      <p:sp>
-        <p:nvSpPr>
-          <p:cNvPr id="25" name="Text 23"/>
-          <p:cNvSpPr/>
-          <p:nvPr/>
-        </p:nvSpPr>
-        <p:spPr>
-          <a:xfrm>
-            <a:off x="6547104" y="5385816"/>
-            <a:ext cx="4599432" cy="201168"/>
-          </a:xfrm>
-          <a:prstGeom prst="rect">
-            <a:avLst/>
-          </a:prstGeom>
-          <a:noFill/>
-          <a:ln/>
-        </p:spPr>
-        <p:txBody>
-          <a:bodyPr wrap="square" lIns="0" tIns="0" rIns="0" bIns="0" rtlCol="0" anchor="ctr">
-            <a:normAutofit/>
-          </a:bodyPr>
-          <a:lstStyle/>
-          <a:p>
-            <a:pPr indent="0" marL="0">
-              <a:buNone/>
-            </a:pPr>
-            <a:r>
-              <a:rPr lang="en-US" sz="1200" dirty="0">
-                <a:solidFill>
-                  <a:srgbClr val="EFEFEF"/>
-                </a:solidFill>
-                <a:latin typeface="Menlo" pitchFamily="34" charset="0"/>
-                <a:ea typeface="Menlo" pitchFamily="34" charset="-122"/>
-                <a:cs typeface="Menlo" pitchFamily="34" charset="-120"/>
-              </a:rPr>
-              <a:t>}</a:t>
-            </a:r>
-            <a:endParaRPr lang="en-US" sz="1200" dirty="0"/>
+              <a:rPr lang="en-US" sz="1800" dirty="0">
+                <a:solidFill>
+                  <a:srgbClr val="0F0F0F"/>
+                </a:solidFill>
+                <a:latin typeface="Barlow" pitchFamily="34" charset="0"/>
+                <a:ea typeface="Barlow" pitchFamily="34" charset="-122"/>
+                <a:cs typeface="Barlow" pitchFamily="34" charset="-120"/>
+              </a:rPr>
+              <a:t>• Promise.all fires the click and waits for the response simultaneously — no race condition.</a:t>
+            </a:r>
+            <a:endParaRPr lang="en-US" sz="1800" dirty="0"/>
+          </a:p>
+          <a:p>
+            <a:pPr indent="0" marL="0">
+              <a:buNone/>
+            </a:pPr>
+            <a:r>
+              <a:rPr lang="en-US" sz="1800" dirty="0">
+                <a:solidFill>
+                  <a:srgbClr val="0F0F0F"/>
+                </a:solidFill>
+                <a:latin typeface="Barlow" pitchFamily="34" charset="0"/>
+                <a:ea typeface="Barlow" pitchFamily="34" charset="-122"/>
+                <a:cs typeface="Barlow" pitchFamily="34" charset="-120"/>
+              </a:rPr>
+              <a:t>• Filtering by URL and ok() means you wait for the right request, not just any network activity.</a:t>
+            </a:r>
+            <a:endParaRPr lang="en-US" sz="1800" dirty="0"/>
+          </a:p>
+          <a:p>
+            <a:pPr indent="0" marL="0">
+              <a:buNone/>
+            </a:pPr>
+            <a:r>
+              <a:rPr lang="en-US" sz="1800" dirty="0">
+                <a:solidFill>
+                  <a:srgbClr val="0F0F0F"/>
+                </a:solidFill>
+                <a:latin typeface="Barlow" pitchFamily="34" charset="0"/>
+                <a:ea typeface="Barlow" pitchFamily="34" charset="-122"/>
+                <a:cs typeface="Barlow" pitchFamily="34" charset="-120"/>
+              </a:rPr>
+              <a:t>• The expect after confirms the UI reflects the response — two assertions for the price of one wait.</a:t>
+            </a:r>
+            <a:endParaRPr lang="en-US" sz="1800" dirty="0"/>
           </a:p>
         </p:txBody>
       </p:sp>
@@ -6249,7 +6159,7 @@
                 <a:ea typeface="Barlow" pitchFamily="34" charset="-122"/>
                 <a:cs typeface="Barlow" pitchFamily="34" charset="-120"/>
               </a:rPr>
-              <a:t>sourcier.uk / Maintainability is part of test quality</a:t>
+              <a:t>sourcier.uk / Wait for what the user actually sees</a:t>
             </a:r>
             <a:endParaRPr lang="en-US" sz="1000" dirty="0"/>
           </a:p>
@@ -6575,7 +6485,7 @@
                 <a:ea typeface="Barlow Condensed" pitchFamily="34" charset="-122"/>
                 <a:cs typeface="Barlow Condensed" pitchFamily="34" charset="-120"/>
               </a:rPr>
-              <a:t>RUN IN CI. DEBUG WITH TRACES.</a:t>
+              <a:t>MAKE CHANGE CHEAPER</a:t>
             </a:r>
             <a:endParaRPr lang="en-US" sz="3200" dirty="0"/>
           </a:p>
@@ -6614,7 +6524,7 @@
                 <a:ea typeface="Barlow" pitchFamily="34" charset="-122"/>
                 <a:cs typeface="Barlow" pitchFamily="34" charset="-120"/>
               </a:rPr>
-              <a:t>When a remote test fails, you need evidence, not guesses.</a:t>
+              <a:t>Stable selectors and small page objects keep suites alive.</a:t>
             </a:r>
             <a:endParaRPr lang="en-US" sz="1700" dirty="0"/>
           </a:p>
@@ -6629,7 +6539,7 @@
         <p:spPr>
           <a:xfrm>
             <a:off x="685800" y="2240280"/>
-            <a:ext cx="5212080" cy="3291840"/>
+            <a:ext cx="5257800" cy="3383280"/>
           </a:xfrm>
           <a:prstGeom prst="rect">
             <a:avLst/>
@@ -6655,7 +6565,7 @@
                 <a:ea typeface="Barlow" pitchFamily="34" charset="-122"/>
                 <a:cs typeface="Barlow" pitchFamily="34" charset="-120"/>
               </a:rPr>
-              <a:t>• Run headless in CI and save traces on failure or retry.</a:t>
+              <a:t>• Use accessible locators first: role, label, text.</a:t>
             </a:r>
             <a:endParaRPr lang="en-US" sz="1800" dirty="0"/>
           </a:p>
@@ -6672,7 +6582,7 @@
                 <a:ea typeface="Barlow" pitchFamily="34" charset="-122"/>
                 <a:cs typeface="Barlow" pitchFamily="34" charset="-120"/>
               </a:rPr>
-              <a:t>• The trace captures clicks, screenshots, console, network, and timing.</a:t>
+              <a:t>• Add `data-testid` only when the UI has no good semantic handle.</a:t>
             </a:r>
             <a:endParaRPr lang="en-US" sz="1800" dirty="0"/>
           </a:p>
@@ -6689,7 +6599,7 @@
                 <a:ea typeface="Barlow" pitchFamily="34" charset="-122"/>
                 <a:cs typeface="Barlow" pitchFamily="34" charset="-120"/>
               </a:rPr>
-              <a:t>• Open it locally and replay the failure like a black box recorder.</a:t>
+              <a:t>• Extract repeated actions into page objects once two or three tests share them.</a:t>
             </a:r>
             <a:endParaRPr lang="en-US" sz="1800" dirty="0"/>
           </a:p>
@@ -6706,10 +6616,27 @@
                 <a:ea typeface="Barlow" pitchFamily="34" charset="-122"/>
                 <a:cs typeface="Barlow" pitchFamily="34" charset="-120"/>
               </a:rPr>
-              <a:t>• This is where Playwright feels better than many older tools.</a:t>
+              <a:t>• Move shared setup into fixtures — they compose cleanly and tear down automatically.</a:t>
             </a:r>
             <a:endParaRPr lang="en-US" sz="1800" dirty="0"/>
           </a:p>
+          <a:p>
+            <a:pPr indent="0" marL="0">
+              <a:buNone/>
+            </a:pPr>
+            <a:r>
+              <a:rPr lang="en-US" sz="1800" dirty="0">
+                <a:solidFill>
+                  <a:srgbClr val="0F0F0F"/>
+                </a:solidFill>
+                <a:latin typeface="Barlow" pitchFamily="34" charset="0"/>
+                <a:ea typeface="Barlow" pitchFamily="34" charset="-122"/>
+                <a:cs typeface="Barlow" pitchFamily="34" charset="-120"/>
+              </a:rPr>
+              <a:t>• Use storageState to save authenticated browser state and avoid re-logging in across tests.</a:t>
+            </a:r>
+            <a:endParaRPr lang="en-US" sz="1800" dirty="0"/>
+          </a:p>
         </p:txBody>
       </p:sp>
       <p:sp>
@@ -6720,287 +6647,12 @@
         </p:nvSpPr>
         <p:spPr>
           <a:xfrm>
-            <a:off x="6309360" y="2148840"/>
-            <a:ext cx="5166360" cy="3566160"/>
+            <a:off x="6309360" y="2057400"/>
+            <a:ext cx="5074920" cy="4160520"/>
           </a:xfrm>
           <a:prstGeom prst="roundRect">
             <a:avLst>
-              <a:gd name="adj" fmla="val 2051"/>
-            </a:avLst>
-          </a:prstGeom>
-          <a:solidFill>
-            <a:srgbClr val="F6ECE1"/>
-          </a:solidFill>
-          <a:ln w="12700">
-            <a:solidFill>
-              <a:srgbClr val="D7D7D7"/>
-            </a:solidFill>
-            <a:prstDash val="solid"/>
-          </a:ln>
-        </p:spPr>
-      </p:sp>
-      <p:sp>
-        <p:nvSpPr>
-          <p:cNvPr id="13" name="Shape 11"/>
-          <p:cNvSpPr/>
-          <p:nvPr/>
-        </p:nvSpPr>
-        <p:spPr>
-          <a:xfrm>
-            <a:off x="6656832" y="2606040"/>
-            <a:ext cx="1417320" cy="658368"/>
-          </a:xfrm>
-          <a:prstGeom prst="roundRect">
-            <a:avLst>
-              <a:gd name="adj" fmla="val 6944"/>
-            </a:avLst>
-          </a:prstGeom>
-          <a:solidFill>
-            <a:srgbClr val="FFFFFF"/>
-          </a:solidFill>
-          <a:ln w="12700">
-            <a:solidFill>
-              <a:srgbClr val="D7D7D7"/>
-            </a:solidFill>
-            <a:prstDash val="solid"/>
-          </a:ln>
-        </p:spPr>
-      </p:sp>
-      <p:sp>
-        <p:nvSpPr>
-          <p:cNvPr id="14" name="Text 12"/>
-          <p:cNvSpPr/>
-          <p:nvPr/>
-        </p:nvSpPr>
-        <p:spPr>
-          <a:xfrm>
-            <a:off x="6748272" y="2788920"/>
-            <a:ext cx="1234440" cy="164592"/>
-          </a:xfrm>
-          <a:prstGeom prst="rect">
-            <a:avLst/>
-          </a:prstGeom>
-          <a:noFill/>
-          <a:ln/>
-        </p:spPr>
-        <p:txBody>
-          <a:bodyPr wrap="square" rtlCol="0" anchor="ctr"/>
-          <a:lstStyle/>
-          <a:p>
-            <a:pPr algn="ctr" indent="0" marL="0">
-              <a:buNone/>
-            </a:pPr>
-            <a:r>
-              <a:rPr lang="en-US" sz="1600" b="1" dirty="0">
-                <a:solidFill>
-                  <a:srgbClr val="0F0F0F"/>
-                </a:solidFill>
-                <a:latin typeface="Barlow Condensed" pitchFamily="34" charset="0"/>
-                <a:ea typeface="Barlow Condensed" pitchFamily="34" charset="-122"/>
-                <a:cs typeface="Barlow Condensed" pitchFamily="34" charset="-120"/>
-              </a:rPr>
-              <a:t>Failing test</a:t>
-            </a:r>
-            <a:endParaRPr lang="en-US" sz="1600" dirty="0"/>
-          </a:p>
-        </p:txBody>
-      </p:sp>
-      <p:sp>
-        <p:nvSpPr>
-          <p:cNvPr id="15" name="Shape 13"/>
-          <p:cNvSpPr/>
-          <p:nvPr/>
-        </p:nvSpPr>
-        <p:spPr>
-          <a:xfrm>
-            <a:off x="8229600" y="2606040"/>
-            <a:ext cx="1417320" cy="658368"/>
-          </a:xfrm>
-          <a:prstGeom prst="roundRect">
-            <a:avLst>
-              <a:gd name="adj" fmla="val 6944"/>
-            </a:avLst>
-          </a:prstGeom>
-          <a:solidFill>
-            <a:srgbClr val="FDEAF2"/>
-          </a:solidFill>
-          <a:ln w="12700">
-            <a:solidFill>
-              <a:srgbClr val="E8006A"/>
-            </a:solidFill>
-            <a:prstDash val="solid"/>
-          </a:ln>
-        </p:spPr>
-      </p:sp>
-      <p:sp>
-        <p:nvSpPr>
-          <p:cNvPr id="16" name="Text 14"/>
-          <p:cNvSpPr/>
-          <p:nvPr/>
-        </p:nvSpPr>
-        <p:spPr>
-          <a:xfrm>
-            <a:off x="8321040" y="2788920"/>
-            <a:ext cx="1234440" cy="164592"/>
-          </a:xfrm>
-          <a:prstGeom prst="rect">
-            <a:avLst/>
-          </a:prstGeom>
-          <a:noFill/>
-          <a:ln/>
-        </p:spPr>
-        <p:txBody>
-          <a:bodyPr wrap="square" rtlCol="0" anchor="ctr"/>
-          <a:lstStyle/>
-          <a:p>
-            <a:pPr algn="ctr" indent="0" marL="0">
-              <a:buNone/>
-            </a:pPr>
-            <a:r>
-              <a:rPr lang="en-US" sz="1600" b="1" dirty="0">
-                <a:solidFill>
-                  <a:srgbClr val="0F0F0F"/>
-                </a:solidFill>
-                <a:latin typeface="Barlow Condensed" pitchFamily="34" charset="0"/>
-                <a:ea typeface="Barlow Condensed" pitchFamily="34" charset="-122"/>
-                <a:cs typeface="Barlow Condensed" pitchFamily="34" charset="-120"/>
-              </a:rPr>
-              <a:t>Trace artifact</a:t>
-            </a:r>
-            <a:endParaRPr lang="en-US" sz="1600" dirty="0"/>
-          </a:p>
-        </p:txBody>
-      </p:sp>
-      <p:sp>
-        <p:nvSpPr>
-          <p:cNvPr id="17" name="Shape 15"/>
-          <p:cNvSpPr/>
-          <p:nvPr/>
-        </p:nvSpPr>
-        <p:spPr>
-          <a:xfrm>
-            <a:off x="9802368" y="2606040"/>
-            <a:ext cx="1417320" cy="658368"/>
-          </a:xfrm>
-          <a:prstGeom prst="roundRect">
-            <a:avLst>
-              <a:gd name="adj" fmla="val 6944"/>
-            </a:avLst>
-          </a:prstGeom>
-          <a:solidFill>
-            <a:srgbClr val="FFFFFF"/>
-          </a:solidFill>
-          <a:ln w="12700">
-            <a:solidFill>
-              <a:srgbClr val="D7D7D7"/>
-            </a:solidFill>
-            <a:prstDash val="solid"/>
-          </a:ln>
-        </p:spPr>
-      </p:sp>
-      <p:sp>
-        <p:nvSpPr>
-          <p:cNvPr id="18" name="Text 16"/>
-          <p:cNvSpPr/>
-          <p:nvPr/>
-        </p:nvSpPr>
-        <p:spPr>
-          <a:xfrm>
-            <a:off x="9893808" y="2788920"/>
-            <a:ext cx="1234440" cy="164592"/>
-          </a:xfrm>
-          <a:prstGeom prst="rect">
-            <a:avLst/>
-          </a:prstGeom>
-          <a:noFill/>
-          <a:ln/>
-        </p:spPr>
-        <p:txBody>
-          <a:bodyPr wrap="square" rtlCol="0" anchor="ctr"/>
-          <a:lstStyle/>
-          <a:p>
-            <a:pPr algn="ctr" indent="0" marL="0">
-              <a:buNone/>
-            </a:pPr>
-            <a:r>
-              <a:rPr lang="en-US" sz="1600" b="1" dirty="0">
-                <a:solidFill>
-                  <a:srgbClr val="0F0F0F"/>
-                </a:solidFill>
-                <a:latin typeface="Barlow Condensed" pitchFamily="34" charset="0"/>
-                <a:ea typeface="Barlow Condensed" pitchFamily="34" charset="-122"/>
-                <a:cs typeface="Barlow Condensed" pitchFamily="34" charset="-120"/>
-              </a:rPr>
-              <a:t>Open locally</a:t>
-            </a:r>
-            <a:endParaRPr lang="en-US" sz="1600" dirty="0"/>
-          </a:p>
-        </p:txBody>
-      </p:sp>
-      <p:sp>
-        <p:nvSpPr>
-          <p:cNvPr id="19" name="Shape 17"/>
-          <p:cNvSpPr/>
-          <p:nvPr/>
-        </p:nvSpPr>
-        <p:spPr>
-          <a:xfrm>
-            <a:off x="8074152" y="2761488"/>
-            <a:ext cx="201168" cy="292608"/>
-          </a:xfrm>
-          <a:prstGeom prst="chevron">
-            <a:avLst/>
-          </a:prstGeom>
-          <a:solidFill>
-            <a:srgbClr val="E8006A"/>
-          </a:solidFill>
-          <a:ln w="12700">
-            <a:solidFill>
-              <a:srgbClr val="E8006A"/>
-            </a:solidFill>
-            <a:prstDash val="solid"/>
-          </a:ln>
-        </p:spPr>
-      </p:sp>
-      <p:sp>
-        <p:nvSpPr>
-          <p:cNvPr id="20" name="Shape 18"/>
-          <p:cNvSpPr/>
-          <p:nvPr/>
-        </p:nvSpPr>
-        <p:spPr>
-          <a:xfrm>
-            <a:off x="9646920" y="2761488"/>
-            <a:ext cx="201168" cy="292608"/>
-          </a:xfrm>
-          <a:prstGeom prst="chevron">
-            <a:avLst/>
-          </a:prstGeom>
-          <a:solidFill>
-            <a:srgbClr val="E8006A"/>
-          </a:solidFill>
-          <a:ln w="12700">
-            <a:solidFill>
-              <a:srgbClr val="E8006A"/>
-            </a:solidFill>
-            <a:prstDash val="solid"/>
-          </a:ln>
-        </p:spPr>
-      </p:sp>
-      <p:sp>
-        <p:nvSpPr>
-          <p:cNvPr id="21" name="Shape 19"/>
-          <p:cNvSpPr/>
-          <p:nvPr/>
-        </p:nvSpPr>
-        <p:spPr>
-          <a:xfrm>
-            <a:off x="6629400" y="3794760"/>
-            <a:ext cx="4526280" cy="1417320"/>
-          </a:xfrm>
-          <a:prstGeom prst="roundRect">
-            <a:avLst>
-              <a:gd name="adj" fmla="val 5161"/>
+              <a:gd name="adj" fmla="val 1758"/>
             </a:avLst>
           </a:prstGeom>
           <a:solidFill>
@@ -7016,14 +6668,14 @@
       </p:sp>
       <p:sp>
         <p:nvSpPr>
-          <p:cNvPr id="22" name="Shape 20"/>
-          <p:cNvSpPr/>
-          <p:nvPr/>
-        </p:nvSpPr>
-        <p:spPr>
-          <a:xfrm>
-            <a:off x="6629400" y="3794760"/>
-            <a:ext cx="4526280" cy="420624"/>
+          <p:cNvPr id="13" name="Shape 11"/>
+          <p:cNvSpPr/>
+          <p:nvPr/>
+        </p:nvSpPr>
+        <p:spPr>
+          <a:xfrm>
+            <a:off x="6309360" y="2057400"/>
+            <a:ext cx="5074920" cy="420624"/>
           </a:xfrm>
           <a:prstGeom prst="rect">
             <a:avLst/>
@@ -7041,14 +6693,14 @@
       </p:sp>
       <p:sp>
         <p:nvSpPr>
-          <p:cNvPr id="23" name="Text 21"/>
-          <p:cNvSpPr/>
-          <p:nvPr/>
-        </p:nvSpPr>
-        <p:spPr>
-          <a:xfrm>
-            <a:off x="6830568" y="3904488"/>
-            <a:ext cx="4123944" cy="146304"/>
+          <p:cNvPr id="14" name="Text 12"/>
+          <p:cNvSpPr/>
+          <p:nvPr/>
+        </p:nvSpPr>
+        <p:spPr>
+          <a:xfrm>
+            <a:off x="6510528" y="2167128"/>
+            <a:ext cx="4672584" cy="146304"/>
           </a:xfrm>
           <a:prstGeom prst="rect">
             <a:avLst/>
@@ -7072,7 +6724,7 @@
                 <a:ea typeface="Barlow" pitchFamily="34" charset="-122"/>
                 <a:cs typeface="Barlow" pitchFamily="34" charset="-120"/>
               </a:rPr>
-              <a:t>debugging commands</a:t>
+              <a:t>pages/LoginPage.ts</a:t>
             </a:r>
             <a:endParaRPr lang="en-US" sz="1000" dirty="0"/>
           </a:p>
@@ -7080,14 +6732,14 @@
       </p:sp>
       <p:sp>
         <p:nvSpPr>
-          <p:cNvPr id="24" name="Text 22"/>
-          <p:cNvSpPr/>
-          <p:nvPr/>
-        </p:nvSpPr>
-        <p:spPr>
-          <a:xfrm>
-            <a:off x="6867144" y="4379976"/>
-            <a:ext cx="4050792" cy="201168"/>
+          <p:cNvPr id="15" name="Text 13"/>
+          <p:cNvSpPr/>
+          <p:nvPr/>
+        </p:nvSpPr>
+        <p:spPr>
+          <a:xfrm>
+            <a:off x="6547104" y="2642616"/>
+            <a:ext cx="4599432" cy="201168"/>
           </a:xfrm>
           <a:prstGeom prst="rect">
             <a:avLst/>
@@ -7107,13 +6759,13 @@
             <a:r>
               <a:rPr lang="en-US" sz="1200" dirty="0">
                 <a:solidFill>
-                  <a:srgbClr val="8BD6C0"/>
-                </a:solidFill>
-                <a:latin typeface="Menlo" pitchFamily="34" charset="0"/>
-                <a:ea typeface="Menlo" pitchFamily="34" charset="-122"/>
-                <a:cs typeface="Menlo" pitchFamily="34" charset="-120"/>
-              </a:rPr>
-              <a:t>pnpm</a:t>
+                  <a:srgbClr val="F58AC1"/>
+                </a:solidFill>
+                <a:latin typeface="Menlo" pitchFamily="34" charset="0"/>
+                <a:ea typeface="Menlo" pitchFamily="34" charset="-122"/>
+                <a:cs typeface="Menlo" pitchFamily="34" charset="-120"/>
+              </a:rPr>
+              <a:t>export</a:t>
             </a:r>
             <a:pPr indent="0" marL="0">
               <a:buNone/>
@@ -7135,69 +6787,27 @@
             <a:r>
               <a:rPr lang="en-US" sz="1200" dirty="0">
                 <a:solidFill>
+                  <a:srgbClr val="F58AC1"/>
+                </a:solidFill>
+                <a:latin typeface="Menlo" pitchFamily="34" charset="0"/>
+                <a:ea typeface="Menlo" pitchFamily="34" charset="-122"/>
+                <a:cs typeface="Menlo" pitchFamily="34" charset="-120"/>
+              </a:rPr>
+              <a:t>class</a:t>
+            </a:r>
+            <a:pPr indent="0" marL="0">
+              <a:buNone/>
+            </a:pPr>
+            <a:r>
+              <a:rPr lang="en-US" sz="1200" dirty="0">
+                <a:solidFill>
                   <a:srgbClr val="EFEFEF"/>
                 </a:solidFill>
                 <a:latin typeface="Menlo" pitchFamily="34" charset="0"/>
                 <a:ea typeface="Menlo" pitchFamily="34" charset="-122"/>
                 <a:cs typeface="Menlo" pitchFamily="34" charset="-120"/>
               </a:rPr>
-              <a:t>playwright</a:t>
-            </a:r>
-            <a:pPr indent="0" marL="0">
-              <a:buNone/>
-            </a:pPr>
-            <a:r>
-              <a:rPr lang="en-US" sz="1200" dirty="0">
-                <a:solidFill>
-                  <a:srgbClr val="EFEFEF"/>
-                </a:solidFill>
-                <a:latin typeface="Menlo" pitchFamily="34" charset="0"/>
-                <a:ea typeface="Menlo" pitchFamily="34" charset="-122"/>
-                <a:cs typeface="Menlo" pitchFamily="34" charset="-120"/>
-              </a:rPr>
-              <a:t> </a:t>
-            </a:r>
-            <a:pPr indent="0" marL="0">
-              <a:buNone/>
-            </a:pPr>
-            <a:r>
-              <a:rPr lang="en-US" sz="1200" dirty="0">
-                <a:solidFill>
-                  <a:srgbClr val="EFEFEF"/>
-                </a:solidFill>
-                <a:latin typeface="Menlo" pitchFamily="34" charset="0"/>
-                <a:ea typeface="Menlo" pitchFamily="34" charset="-122"/>
-                <a:cs typeface="Menlo" pitchFamily="34" charset="-120"/>
-              </a:rPr>
-              <a:t>test</a:t>
-            </a:r>
-            <a:pPr indent="0" marL="0">
-              <a:buNone/>
-            </a:pPr>
-            <a:r>
-              <a:rPr lang="en-US" sz="1200" dirty="0">
-                <a:solidFill>
-                  <a:srgbClr val="EFEFEF"/>
-                </a:solidFill>
-                <a:latin typeface="Menlo" pitchFamily="34" charset="0"/>
-                <a:ea typeface="Menlo" pitchFamily="34" charset="-122"/>
-                <a:cs typeface="Menlo" pitchFamily="34" charset="-120"/>
-              </a:rPr>
-              <a:t> </a:t>
-            </a:r>
-            <a:pPr indent="0" marL="0">
-              <a:buNone/>
-            </a:pPr>
-            <a:r>
-              <a:rPr lang="en-US" sz="1200" dirty="0">
-                <a:solidFill>
-                  <a:srgbClr val="F58AC1"/>
-                </a:solidFill>
-                <a:latin typeface="Menlo" pitchFamily="34" charset="0"/>
-                <a:ea typeface="Menlo" pitchFamily="34" charset="-122"/>
-                <a:cs typeface="Menlo" pitchFamily="34" charset="-120"/>
-              </a:rPr>
-              <a:t>--trace=on-first-retry</a:t>
+              <a:t> LoginPage {</a:t>
             </a:r>
             <a:endParaRPr lang="en-US" sz="1200" dirty="0"/>
           </a:p>
@@ -7205,14 +6815,14 @@
       </p:sp>
       <p:sp>
         <p:nvSpPr>
-          <p:cNvPr id="25" name="Text 23"/>
-          <p:cNvSpPr/>
-          <p:nvPr/>
-        </p:nvSpPr>
-        <p:spPr>
-          <a:xfrm>
-            <a:off x="6867144" y="4654296"/>
-            <a:ext cx="4050792" cy="201168"/>
+          <p:cNvPr id="16" name="Text 14"/>
+          <p:cNvSpPr/>
+          <p:nvPr/>
+        </p:nvSpPr>
+        <p:spPr>
+          <a:xfrm>
+            <a:off x="6547104" y="2916936"/>
+            <a:ext cx="4599432" cy="201168"/>
           </a:xfrm>
           <a:prstGeom prst="rect">
             <a:avLst/>
@@ -7232,13 +6842,69 @@
             <a:r>
               <a:rPr lang="en-US" sz="1200" dirty="0">
                 <a:solidFill>
+                  <a:srgbClr val="EFEFEF"/>
+                </a:solidFill>
+                <a:latin typeface="Menlo" pitchFamily="34" charset="0"/>
+                <a:ea typeface="Menlo" pitchFamily="34" charset="-122"/>
+                <a:cs typeface="Menlo" pitchFamily="34" charset="-120"/>
+              </a:rPr>
+              <a:t>  </a:t>
+            </a:r>
+            <a:pPr indent="0" marL="0">
+              <a:buNone/>
+            </a:pPr>
+            <a:r>
+              <a:rPr lang="en-US" sz="1200" dirty="0">
+                <a:solidFill>
+                  <a:srgbClr val="F58AC1"/>
+                </a:solidFill>
+                <a:latin typeface="Menlo" pitchFamily="34" charset="0"/>
+                <a:ea typeface="Menlo" pitchFamily="34" charset="-122"/>
+                <a:cs typeface="Menlo" pitchFamily="34" charset="-120"/>
+              </a:rPr>
+              <a:t>constructor</a:t>
+            </a:r>
+            <a:pPr indent="0" marL="0">
+              <a:buNone/>
+            </a:pPr>
+            <a:r>
+              <a:rPr lang="en-US" sz="1200" dirty="0">
+                <a:solidFill>
+                  <a:srgbClr val="EFEFEF"/>
+                </a:solidFill>
+                <a:latin typeface="Menlo" pitchFamily="34" charset="0"/>
+                <a:ea typeface="Menlo" pitchFamily="34" charset="-122"/>
+                <a:cs typeface="Menlo" pitchFamily="34" charset="-120"/>
+              </a:rPr>
+              <a:t>(page) { </a:t>
+            </a:r>
+            <a:pPr indent="0" marL="0">
+              <a:buNone/>
+            </a:pPr>
+            <a:r>
+              <a:rPr lang="en-US" sz="1200" dirty="0">
+                <a:solidFill>
+                  <a:srgbClr val="F58AC1"/>
+                </a:solidFill>
+                <a:latin typeface="Menlo" pitchFamily="34" charset="0"/>
+                <a:ea typeface="Menlo" pitchFamily="34" charset="-122"/>
+                <a:cs typeface="Menlo" pitchFamily="34" charset="-120"/>
+              </a:rPr>
+              <a:t>this</a:t>
+            </a:r>
+            <a:pPr indent="0" marL="0">
+              <a:buNone/>
+            </a:pPr>
+            <a:r>
+              <a:rPr lang="en-US" sz="1200" dirty="0">
+                <a:solidFill>
                   <a:srgbClr val="8BD6C0"/>
                 </a:solidFill>
                 <a:latin typeface="Menlo" pitchFamily="34" charset="0"/>
                 <a:ea typeface="Menlo" pitchFamily="34" charset="-122"/>
                 <a:cs typeface="Menlo" pitchFamily="34" charset="-120"/>
               </a:rPr>
-              <a:t>pnpm</a:t>
+              <a:t>.page</a:t>
             </a:r>
             <a:pPr indent="0" marL="0">
               <a:buNone/>
@@ -7252,6 +6918,519 @@
                 <a:ea typeface="Menlo" pitchFamily="34" charset="-122"/>
                 <a:cs typeface="Menlo" pitchFamily="34" charset="-120"/>
               </a:rPr>
+              <a:t> = page; }</a:t>
+            </a:r>
+            <a:endParaRPr lang="en-US" sz="1200" dirty="0"/>
+          </a:p>
+        </p:txBody>
+      </p:sp>
+      <p:sp>
+        <p:nvSpPr>
+          <p:cNvPr id="17" name="Text 15"/>
+          <p:cNvSpPr/>
+          <p:nvPr/>
+        </p:nvSpPr>
+        <p:spPr>
+          <a:xfrm>
+            <a:off x="6547104" y="3191256"/>
+            <a:ext cx="4599432" cy="201168"/>
+          </a:xfrm>
+          <a:prstGeom prst="rect">
+            <a:avLst/>
+          </a:prstGeom>
+          <a:noFill/>
+          <a:ln/>
+        </p:spPr>
+        <p:txBody>
+          <a:bodyPr wrap="square" lIns="0" tIns="0" rIns="0" bIns="0" rtlCol="0" anchor="ctr">
+            <a:normAutofit/>
+          </a:bodyPr>
+          <a:lstStyle/>
+          <a:p>
+            <a:pPr indent="0" marL="0">
+              <a:buNone/>
+            </a:pPr>
+            <a:r>
+              <a:rPr lang="en-US" sz="1200" dirty="0">
+                <a:solidFill>
+                  <a:srgbClr val="EFEFEF"/>
+                </a:solidFill>
+                <a:latin typeface="Menlo" pitchFamily="34" charset="0"/>
+                <a:ea typeface="Menlo" pitchFamily="34" charset="-122"/>
+                <a:cs typeface="Menlo" pitchFamily="34" charset="-120"/>
+              </a:rPr>
+              <a:t>  email = </a:t>
+            </a:r>
+            <a:pPr indent="0" marL="0">
+              <a:buNone/>
+            </a:pPr>
+            <a:r>
+              <a:rPr lang="en-US" sz="1200" dirty="0">
+                <a:solidFill>
+                  <a:srgbClr val="F58AC1"/>
+                </a:solidFill>
+                <a:latin typeface="Menlo" pitchFamily="34" charset="0"/>
+                <a:ea typeface="Menlo" pitchFamily="34" charset="-122"/>
+                <a:cs typeface="Menlo" pitchFamily="34" charset="-120"/>
+              </a:rPr>
+              <a:t>this</a:t>
+            </a:r>
+            <a:pPr indent="0" marL="0">
+              <a:buNone/>
+            </a:pPr>
+            <a:r>
+              <a:rPr lang="en-US" sz="1200" dirty="0">
+                <a:solidFill>
+                  <a:srgbClr val="8BD6C0"/>
+                </a:solidFill>
+                <a:latin typeface="Menlo" pitchFamily="34" charset="0"/>
+                <a:ea typeface="Menlo" pitchFamily="34" charset="-122"/>
+                <a:cs typeface="Menlo" pitchFamily="34" charset="-120"/>
+              </a:rPr>
+              <a:t>.page</a:t>
+            </a:r>
+            <a:pPr indent="0" marL="0">
+              <a:buNone/>
+            </a:pPr>
+            <a:r>
+              <a:rPr lang="en-US" sz="1200" dirty="0">
+                <a:solidFill>
+                  <a:srgbClr val="8BD6C0"/>
+                </a:solidFill>
+                <a:latin typeface="Menlo" pitchFamily="34" charset="0"/>
+                <a:ea typeface="Menlo" pitchFamily="34" charset="-122"/>
+                <a:cs typeface="Menlo" pitchFamily="34" charset="-120"/>
+              </a:rPr>
+              <a:t>.getByLabel</a:t>
+            </a:r>
+            <a:pPr indent="0" marL="0">
+              <a:buNone/>
+            </a:pPr>
+            <a:r>
+              <a:rPr lang="en-US" sz="1200" dirty="0">
+                <a:solidFill>
+                  <a:srgbClr val="EFEFEF"/>
+                </a:solidFill>
+                <a:latin typeface="Menlo" pitchFamily="34" charset="0"/>
+                <a:ea typeface="Menlo" pitchFamily="34" charset="-122"/>
+                <a:cs typeface="Menlo" pitchFamily="34" charset="-120"/>
+              </a:rPr>
+              <a:t>(</a:t>
+            </a:r>
+            <a:pPr indent="0" marL="0">
+              <a:buNone/>
+            </a:pPr>
+            <a:r>
+              <a:rPr lang="en-US" sz="1200" dirty="0">
+                <a:solidFill>
+                  <a:srgbClr val="F0C15A"/>
+                </a:solidFill>
+                <a:latin typeface="Menlo" pitchFamily="34" charset="0"/>
+                <a:ea typeface="Menlo" pitchFamily="34" charset="-122"/>
+                <a:cs typeface="Menlo" pitchFamily="34" charset="-120"/>
+              </a:rPr>
+              <a:t>"Email"</a:t>
+            </a:r>
+            <a:pPr indent="0" marL="0">
+              <a:buNone/>
+            </a:pPr>
+            <a:r>
+              <a:rPr lang="en-US" sz="1200" dirty="0">
+                <a:solidFill>
+                  <a:srgbClr val="EFEFEF"/>
+                </a:solidFill>
+                <a:latin typeface="Menlo" pitchFamily="34" charset="0"/>
+                <a:ea typeface="Menlo" pitchFamily="34" charset="-122"/>
+                <a:cs typeface="Menlo" pitchFamily="34" charset="-120"/>
+              </a:rPr>
+              <a:t>);</a:t>
+            </a:r>
+            <a:endParaRPr lang="en-US" sz="1200" dirty="0"/>
+          </a:p>
+        </p:txBody>
+      </p:sp>
+      <p:sp>
+        <p:nvSpPr>
+          <p:cNvPr id="18" name="Text 16"/>
+          <p:cNvSpPr/>
+          <p:nvPr/>
+        </p:nvSpPr>
+        <p:spPr>
+          <a:xfrm>
+            <a:off x="6547104" y="3465576"/>
+            <a:ext cx="4599432" cy="201168"/>
+          </a:xfrm>
+          <a:prstGeom prst="rect">
+            <a:avLst/>
+          </a:prstGeom>
+          <a:noFill/>
+          <a:ln/>
+        </p:spPr>
+        <p:txBody>
+          <a:bodyPr wrap="square" lIns="0" tIns="0" rIns="0" bIns="0" rtlCol="0" anchor="ctr">
+            <a:normAutofit/>
+          </a:bodyPr>
+          <a:lstStyle/>
+          <a:p>
+            <a:pPr indent="0" marL="0">
+              <a:buNone/>
+            </a:pPr>
+            <a:r>
+              <a:rPr lang="en-US" sz="1200" dirty="0">
+                <a:solidFill>
+                  <a:srgbClr val="EFEFEF"/>
+                </a:solidFill>
+                <a:latin typeface="Menlo" pitchFamily="34" charset="0"/>
+                <a:ea typeface="Menlo" pitchFamily="34" charset="-122"/>
+                <a:cs typeface="Menlo" pitchFamily="34" charset="-120"/>
+              </a:rPr>
+              <a:t>  password = </a:t>
+            </a:r>
+            <a:pPr indent="0" marL="0">
+              <a:buNone/>
+            </a:pPr>
+            <a:r>
+              <a:rPr lang="en-US" sz="1200" dirty="0">
+                <a:solidFill>
+                  <a:srgbClr val="F58AC1"/>
+                </a:solidFill>
+                <a:latin typeface="Menlo" pitchFamily="34" charset="0"/>
+                <a:ea typeface="Menlo" pitchFamily="34" charset="-122"/>
+                <a:cs typeface="Menlo" pitchFamily="34" charset="-120"/>
+              </a:rPr>
+              <a:t>this</a:t>
+            </a:r>
+            <a:pPr indent="0" marL="0">
+              <a:buNone/>
+            </a:pPr>
+            <a:r>
+              <a:rPr lang="en-US" sz="1200" dirty="0">
+                <a:solidFill>
+                  <a:srgbClr val="8BD6C0"/>
+                </a:solidFill>
+                <a:latin typeface="Menlo" pitchFamily="34" charset="0"/>
+                <a:ea typeface="Menlo" pitchFamily="34" charset="-122"/>
+                <a:cs typeface="Menlo" pitchFamily="34" charset="-120"/>
+              </a:rPr>
+              <a:t>.page</a:t>
+            </a:r>
+            <a:pPr indent="0" marL="0">
+              <a:buNone/>
+            </a:pPr>
+            <a:r>
+              <a:rPr lang="en-US" sz="1200" dirty="0">
+                <a:solidFill>
+                  <a:srgbClr val="8BD6C0"/>
+                </a:solidFill>
+                <a:latin typeface="Menlo" pitchFamily="34" charset="0"/>
+                <a:ea typeface="Menlo" pitchFamily="34" charset="-122"/>
+                <a:cs typeface="Menlo" pitchFamily="34" charset="-120"/>
+              </a:rPr>
+              <a:t>.getByLabel</a:t>
+            </a:r>
+            <a:pPr indent="0" marL="0">
+              <a:buNone/>
+            </a:pPr>
+            <a:r>
+              <a:rPr lang="en-US" sz="1200" dirty="0">
+                <a:solidFill>
+                  <a:srgbClr val="EFEFEF"/>
+                </a:solidFill>
+                <a:latin typeface="Menlo" pitchFamily="34" charset="0"/>
+                <a:ea typeface="Menlo" pitchFamily="34" charset="-122"/>
+                <a:cs typeface="Menlo" pitchFamily="34" charset="-120"/>
+              </a:rPr>
+              <a:t>(</a:t>
+            </a:r>
+            <a:pPr indent="0" marL="0">
+              <a:buNone/>
+            </a:pPr>
+            <a:r>
+              <a:rPr lang="en-US" sz="1200" dirty="0">
+                <a:solidFill>
+                  <a:srgbClr val="F0C15A"/>
+                </a:solidFill>
+                <a:latin typeface="Menlo" pitchFamily="34" charset="0"/>
+                <a:ea typeface="Menlo" pitchFamily="34" charset="-122"/>
+                <a:cs typeface="Menlo" pitchFamily="34" charset="-120"/>
+              </a:rPr>
+              <a:t>"Password"</a:t>
+            </a:r>
+            <a:pPr indent="0" marL="0">
+              <a:buNone/>
+            </a:pPr>
+            <a:r>
+              <a:rPr lang="en-US" sz="1200" dirty="0">
+                <a:solidFill>
+                  <a:srgbClr val="EFEFEF"/>
+                </a:solidFill>
+                <a:latin typeface="Menlo" pitchFamily="34" charset="0"/>
+                <a:ea typeface="Menlo" pitchFamily="34" charset="-122"/>
+                <a:cs typeface="Menlo" pitchFamily="34" charset="-120"/>
+              </a:rPr>
+              <a:t>);</a:t>
+            </a:r>
+            <a:endParaRPr lang="en-US" sz="1200" dirty="0"/>
+          </a:p>
+        </p:txBody>
+      </p:sp>
+      <p:sp>
+        <p:nvSpPr>
+          <p:cNvPr id="19" name="Text 17"/>
+          <p:cNvSpPr/>
+          <p:nvPr/>
+        </p:nvSpPr>
+        <p:spPr>
+          <a:xfrm>
+            <a:off x="6547104" y="3739896"/>
+            <a:ext cx="4599432" cy="201168"/>
+          </a:xfrm>
+          <a:prstGeom prst="rect">
+            <a:avLst/>
+          </a:prstGeom>
+          <a:noFill/>
+          <a:ln/>
+        </p:spPr>
+        <p:txBody>
+          <a:bodyPr wrap="square" lIns="0" tIns="0" rIns="0" bIns="0" rtlCol="0" anchor="ctr">
+            <a:normAutofit/>
+          </a:bodyPr>
+          <a:lstStyle/>
+          <a:p>
+            <a:pPr indent="0" marL="0">
+              <a:buNone/>
+            </a:pPr>
+            <a:r>
+              <a:rPr lang="en-US" sz="1200" dirty="0">
+                <a:solidFill>
+                  <a:srgbClr val="EFEFEF"/>
+                </a:solidFill>
+                <a:latin typeface="Menlo" pitchFamily="34" charset="0"/>
+                <a:ea typeface="Menlo" pitchFamily="34" charset="-122"/>
+                <a:cs typeface="Menlo" pitchFamily="34" charset="-120"/>
+              </a:rPr>
+              <a:t>  submit = </a:t>
+            </a:r>
+            <a:pPr indent="0" marL="0">
+              <a:buNone/>
+            </a:pPr>
+            <a:r>
+              <a:rPr lang="en-US" sz="1200" dirty="0">
+                <a:solidFill>
+                  <a:srgbClr val="F58AC1"/>
+                </a:solidFill>
+                <a:latin typeface="Menlo" pitchFamily="34" charset="0"/>
+                <a:ea typeface="Menlo" pitchFamily="34" charset="-122"/>
+                <a:cs typeface="Menlo" pitchFamily="34" charset="-120"/>
+              </a:rPr>
+              <a:t>this</a:t>
+            </a:r>
+            <a:pPr indent="0" marL="0">
+              <a:buNone/>
+            </a:pPr>
+            <a:r>
+              <a:rPr lang="en-US" sz="1200" dirty="0">
+                <a:solidFill>
+                  <a:srgbClr val="8BD6C0"/>
+                </a:solidFill>
+                <a:latin typeface="Menlo" pitchFamily="34" charset="0"/>
+                <a:ea typeface="Menlo" pitchFamily="34" charset="-122"/>
+                <a:cs typeface="Menlo" pitchFamily="34" charset="-120"/>
+              </a:rPr>
+              <a:t>.page</a:t>
+            </a:r>
+            <a:pPr indent="0" marL="0">
+              <a:buNone/>
+            </a:pPr>
+            <a:r>
+              <a:rPr lang="en-US" sz="1200" dirty="0">
+                <a:solidFill>
+                  <a:srgbClr val="8BD6C0"/>
+                </a:solidFill>
+                <a:latin typeface="Menlo" pitchFamily="34" charset="0"/>
+                <a:ea typeface="Menlo" pitchFamily="34" charset="-122"/>
+                <a:cs typeface="Menlo" pitchFamily="34" charset="-120"/>
+              </a:rPr>
+              <a:t>.getByTestId</a:t>
+            </a:r>
+            <a:pPr indent="0" marL="0">
+              <a:buNone/>
+            </a:pPr>
+            <a:r>
+              <a:rPr lang="en-US" sz="1200" dirty="0">
+                <a:solidFill>
+                  <a:srgbClr val="EFEFEF"/>
+                </a:solidFill>
+                <a:latin typeface="Menlo" pitchFamily="34" charset="0"/>
+                <a:ea typeface="Menlo" pitchFamily="34" charset="-122"/>
+                <a:cs typeface="Menlo" pitchFamily="34" charset="-120"/>
+              </a:rPr>
+              <a:t>(</a:t>
+            </a:r>
+            <a:pPr indent="0" marL="0">
+              <a:buNone/>
+            </a:pPr>
+            <a:r>
+              <a:rPr lang="en-US" sz="1200" dirty="0">
+                <a:solidFill>
+                  <a:srgbClr val="F0C15A"/>
+                </a:solidFill>
+                <a:latin typeface="Menlo" pitchFamily="34" charset="0"/>
+                <a:ea typeface="Menlo" pitchFamily="34" charset="-122"/>
+                <a:cs typeface="Menlo" pitchFamily="34" charset="-120"/>
+              </a:rPr>
+              <a:t>"login-submit"</a:t>
+            </a:r>
+            <a:pPr indent="0" marL="0">
+              <a:buNone/>
+            </a:pPr>
+            <a:r>
+              <a:rPr lang="en-US" sz="1200" dirty="0">
+                <a:solidFill>
+                  <a:srgbClr val="EFEFEF"/>
+                </a:solidFill>
+                <a:latin typeface="Menlo" pitchFamily="34" charset="0"/>
+                <a:ea typeface="Menlo" pitchFamily="34" charset="-122"/>
+                <a:cs typeface="Menlo" pitchFamily="34" charset="-120"/>
+              </a:rPr>
+              <a:t>);</a:t>
+            </a:r>
+            <a:endParaRPr lang="en-US" sz="1200" dirty="0"/>
+          </a:p>
+        </p:txBody>
+      </p:sp>
+      <p:sp>
+        <p:nvSpPr>
+          <p:cNvPr id="20" name="Text 18"/>
+          <p:cNvSpPr/>
+          <p:nvPr/>
+        </p:nvSpPr>
+        <p:spPr>
+          <a:xfrm>
+            <a:off x="6547104" y="4014216"/>
+            <a:ext cx="4599432" cy="201168"/>
+          </a:xfrm>
+          <a:prstGeom prst="rect">
+            <a:avLst/>
+          </a:prstGeom>
+          <a:noFill/>
+          <a:ln/>
+        </p:spPr>
+        <p:txBody>
+          <a:bodyPr wrap="square" lIns="0" tIns="0" rIns="0" bIns="0" rtlCol="0" anchor="ctr">
+            <a:normAutofit/>
+          </a:bodyPr>
+          <a:lstStyle/>
+          <a:p>
+            <a:pPr indent="0" marL="0">
+              <a:buNone/>
+            </a:pPr>
+            <a:r>
+              <a:rPr lang="en-US" sz="1200" dirty="0">
+                <a:solidFill>
+                  <a:srgbClr val="EFEFEF"/>
+                </a:solidFill>
+                <a:latin typeface="Menlo" pitchFamily="34" charset="0"/>
+                <a:ea typeface="Menlo" pitchFamily="34" charset="-122"/>
+                <a:cs typeface="Menlo" pitchFamily="34" charset="-120"/>
+              </a:rPr>
+              <a:t>  </a:t>
+            </a:r>
+            <a:pPr indent="0" marL="0">
+              <a:buNone/>
+            </a:pPr>
+            <a:r>
+              <a:rPr lang="en-US" sz="1200" dirty="0">
+                <a:solidFill>
+                  <a:srgbClr val="F58AC1"/>
+                </a:solidFill>
+                <a:latin typeface="Menlo" pitchFamily="34" charset="0"/>
+                <a:ea typeface="Menlo" pitchFamily="34" charset="-122"/>
+                <a:cs typeface="Menlo" pitchFamily="34" charset="-120"/>
+              </a:rPr>
+              <a:t>async</a:t>
+            </a:r>
+            <a:pPr indent="0" marL="0">
+              <a:buNone/>
+            </a:pPr>
+            <a:r>
+              <a:rPr lang="en-US" sz="1200" dirty="0">
+                <a:solidFill>
+                  <a:srgbClr val="EFEFEF"/>
+                </a:solidFill>
+                <a:latin typeface="Menlo" pitchFamily="34" charset="0"/>
+                <a:ea typeface="Menlo" pitchFamily="34" charset="-122"/>
+                <a:cs typeface="Menlo" pitchFamily="34" charset="-120"/>
+              </a:rPr>
+              <a:t> login(email, password) {</a:t>
+            </a:r>
+            <a:endParaRPr lang="en-US" sz="1200" dirty="0"/>
+          </a:p>
+        </p:txBody>
+      </p:sp>
+      <p:sp>
+        <p:nvSpPr>
+          <p:cNvPr id="21" name="Text 19"/>
+          <p:cNvSpPr/>
+          <p:nvPr/>
+        </p:nvSpPr>
+        <p:spPr>
+          <a:xfrm>
+            <a:off x="6547104" y="4288536"/>
+            <a:ext cx="4599432" cy="201168"/>
+          </a:xfrm>
+          <a:prstGeom prst="rect">
+            <a:avLst/>
+          </a:prstGeom>
+          <a:noFill/>
+          <a:ln/>
+        </p:spPr>
+        <p:txBody>
+          <a:bodyPr wrap="square" lIns="0" tIns="0" rIns="0" bIns="0" rtlCol="0" anchor="ctr">
+            <a:normAutofit/>
+          </a:bodyPr>
+          <a:lstStyle/>
+          <a:p>
+            <a:pPr indent="0" marL="0">
+              <a:buNone/>
+            </a:pPr>
+            <a:r>
+              <a:rPr lang="en-US" sz="1200" dirty="0">
+                <a:solidFill>
+                  <a:srgbClr val="EFEFEF"/>
+                </a:solidFill>
+                <a:latin typeface="Menlo" pitchFamily="34" charset="0"/>
+                <a:ea typeface="Menlo" pitchFamily="34" charset="-122"/>
+                <a:cs typeface="Menlo" pitchFamily="34" charset="-120"/>
+              </a:rPr>
+              <a:t>    </a:t>
+            </a:r>
+            <a:pPr indent="0" marL="0">
+              <a:buNone/>
+            </a:pPr>
+            <a:r>
+              <a:rPr lang="en-US" sz="1200" dirty="0">
+                <a:solidFill>
+                  <a:srgbClr val="F58AC1"/>
+                </a:solidFill>
+                <a:latin typeface="Menlo" pitchFamily="34" charset="0"/>
+                <a:ea typeface="Menlo" pitchFamily="34" charset="-122"/>
+                <a:cs typeface="Menlo" pitchFamily="34" charset="-120"/>
+              </a:rPr>
+              <a:t>await</a:t>
+            </a:r>
+            <a:pPr indent="0" marL="0">
+              <a:buNone/>
+            </a:pPr>
+            <a:r>
+              <a:rPr lang="en-US" sz="1200" dirty="0">
+                <a:solidFill>
+                  <a:srgbClr val="EFEFEF"/>
+                </a:solidFill>
+                <a:latin typeface="Menlo" pitchFamily="34" charset="0"/>
+                <a:ea typeface="Menlo" pitchFamily="34" charset="-122"/>
+                <a:cs typeface="Menlo" pitchFamily="34" charset="-120"/>
+              </a:rPr>
               <a:t> </a:t>
             </a:r>
             <a:pPr indent="0" marL="0">
@@ -7260,14 +7439,83 @@
             <a:r>
               <a:rPr lang="en-US" sz="1200" dirty="0">
                 <a:solidFill>
+                  <a:srgbClr val="F58AC1"/>
+                </a:solidFill>
+                <a:latin typeface="Menlo" pitchFamily="34" charset="0"/>
+                <a:ea typeface="Menlo" pitchFamily="34" charset="-122"/>
+                <a:cs typeface="Menlo" pitchFamily="34" charset="-120"/>
+              </a:rPr>
+              <a:t>this</a:t>
+            </a:r>
+            <a:pPr indent="0" marL="0">
+              <a:buNone/>
+            </a:pPr>
+            <a:r>
+              <a:rPr lang="en-US" sz="1200" dirty="0">
+                <a:solidFill>
+                  <a:srgbClr val="8BD6C0"/>
+                </a:solidFill>
+                <a:latin typeface="Menlo" pitchFamily="34" charset="0"/>
+                <a:ea typeface="Menlo" pitchFamily="34" charset="-122"/>
+                <a:cs typeface="Menlo" pitchFamily="34" charset="-120"/>
+              </a:rPr>
+              <a:t>.email</a:t>
+            </a:r>
+            <a:pPr indent="0" marL="0">
+              <a:buNone/>
+            </a:pPr>
+            <a:r>
+              <a:rPr lang="en-US" sz="1200" dirty="0">
+                <a:solidFill>
+                  <a:srgbClr val="8BD6C0"/>
+                </a:solidFill>
+                <a:latin typeface="Menlo" pitchFamily="34" charset="0"/>
+                <a:ea typeface="Menlo" pitchFamily="34" charset="-122"/>
+                <a:cs typeface="Menlo" pitchFamily="34" charset="-120"/>
+              </a:rPr>
+              <a:t>.fill</a:t>
+            </a:r>
+            <a:pPr indent="0" marL="0">
+              <a:buNone/>
+            </a:pPr>
+            <a:r>
+              <a:rPr lang="en-US" sz="1200" dirty="0">
+                <a:solidFill>
                   <a:srgbClr val="EFEFEF"/>
                 </a:solidFill>
                 <a:latin typeface="Menlo" pitchFamily="34" charset="0"/>
                 <a:ea typeface="Menlo" pitchFamily="34" charset="-122"/>
                 <a:cs typeface="Menlo" pitchFamily="34" charset="-120"/>
               </a:rPr>
-              <a:t>playwright</a:t>
-            </a:r>
+              <a:t>(email);</a:t>
+            </a:r>
+            <a:endParaRPr lang="en-US" sz="1200" dirty="0"/>
+          </a:p>
+        </p:txBody>
+      </p:sp>
+      <p:sp>
+        <p:nvSpPr>
+          <p:cNvPr id="22" name="Text 20"/>
+          <p:cNvSpPr/>
+          <p:nvPr/>
+        </p:nvSpPr>
+        <p:spPr>
+          <a:xfrm>
+            <a:off x="6547104" y="4562856"/>
+            <a:ext cx="4599432" cy="201168"/>
+          </a:xfrm>
+          <a:prstGeom prst="rect">
+            <a:avLst/>
+          </a:prstGeom>
+          <a:noFill/>
+          <a:ln/>
+        </p:spPr>
+        <p:txBody>
+          <a:bodyPr wrap="square" lIns="0" tIns="0" rIns="0" bIns="0" rtlCol="0" anchor="ctr">
+            <a:normAutofit/>
+          </a:bodyPr>
+          <a:lstStyle/>
+          <a:p>
             <a:pPr indent="0" marL="0">
               <a:buNone/>
             </a:pPr>
@@ -7280,6 +7528,34 @@
                 <a:ea typeface="Menlo" pitchFamily="34" charset="-122"/>
                 <a:cs typeface="Menlo" pitchFamily="34" charset="-120"/>
               </a:rPr>
+              <a:t>    </a:t>
+            </a:r>
+            <a:pPr indent="0" marL="0">
+              <a:buNone/>
+            </a:pPr>
+            <a:r>
+              <a:rPr lang="en-US" sz="1200" dirty="0">
+                <a:solidFill>
+                  <a:srgbClr val="F58AC1"/>
+                </a:solidFill>
+                <a:latin typeface="Menlo" pitchFamily="34" charset="0"/>
+                <a:ea typeface="Menlo" pitchFamily="34" charset="-122"/>
+                <a:cs typeface="Menlo" pitchFamily="34" charset="-120"/>
+              </a:rPr>
+              <a:t>await</a:t>
+            </a:r>
+            <a:pPr indent="0" marL="0">
+              <a:buNone/>
+            </a:pPr>
+            <a:r>
+              <a:rPr lang="en-US" sz="1200" dirty="0">
+                <a:solidFill>
+                  <a:srgbClr val="EFEFEF"/>
+                </a:solidFill>
+                <a:latin typeface="Menlo" pitchFamily="34" charset="0"/>
+                <a:ea typeface="Menlo" pitchFamily="34" charset="-122"/>
+                <a:cs typeface="Menlo" pitchFamily="34" charset="-120"/>
+              </a:rPr>
               <a:t> </a:t>
             </a:r>
             <a:pPr indent="0" marL="0">
@@ -7288,14 +7564,83 @@
             <a:r>
               <a:rPr lang="en-US" sz="1200" dirty="0">
                 <a:solidFill>
+                  <a:srgbClr val="F58AC1"/>
+                </a:solidFill>
+                <a:latin typeface="Menlo" pitchFamily="34" charset="0"/>
+                <a:ea typeface="Menlo" pitchFamily="34" charset="-122"/>
+                <a:cs typeface="Menlo" pitchFamily="34" charset="-120"/>
+              </a:rPr>
+              <a:t>this</a:t>
+            </a:r>
+            <a:pPr indent="0" marL="0">
+              <a:buNone/>
+            </a:pPr>
+            <a:r>
+              <a:rPr lang="en-US" sz="1200" dirty="0">
+                <a:solidFill>
+                  <a:srgbClr val="8BD6C0"/>
+                </a:solidFill>
+                <a:latin typeface="Menlo" pitchFamily="34" charset="0"/>
+                <a:ea typeface="Menlo" pitchFamily="34" charset="-122"/>
+                <a:cs typeface="Menlo" pitchFamily="34" charset="-120"/>
+              </a:rPr>
+              <a:t>.password</a:t>
+            </a:r>
+            <a:pPr indent="0" marL="0">
+              <a:buNone/>
+            </a:pPr>
+            <a:r>
+              <a:rPr lang="en-US" sz="1200" dirty="0">
+                <a:solidFill>
+                  <a:srgbClr val="8BD6C0"/>
+                </a:solidFill>
+                <a:latin typeface="Menlo" pitchFamily="34" charset="0"/>
+                <a:ea typeface="Menlo" pitchFamily="34" charset="-122"/>
+                <a:cs typeface="Menlo" pitchFamily="34" charset="-120"/>
+              </a:rPr>
+              <a:t>.fill</a:t>
+            </a:r>
+            <a:pPr indent="0" marL="0">
+              <a:buNone/>
+            </a:pPr>
+            <a:r>
+              <a:rPr lang="en-US" sz="1200" dirty="0">
+                <a:solidFill>
                   <a:srgbClr val="EFEFEF"/>
                 </a:solidFill>
                 <a:latin typeface="Menlo" pitchFamily="34" charset="0"/>
                 <a:ea typeface="Menlo" pitchFamily="34" charset="-122"/>
                 <a:cs typeface="Menlo" pitchFamily="34" charset="-120"/>
               </a:rPr>
-              <a:t>show-trace</a:t>
-            </a:r>
+              <a:t>(password);</a:t>
+            </a:r>
+            <a:endParaRPr lang="en-US" sz="1200" dirty="0"/>
+          </a:p>
+        </p:txBody>
+      </p:sp>
+      <p:sp>
+        <p:nvSpPr>
+          <p:cNvPr id="23" name="Text 21"/>
+          <p:cNvSpPr/>
+          <p:nvPr/>
+        </p:nvSpPr>
+        <p:spPr>
+          <a:xfrm>
+            <a:off x="6547104" y="4837176"/>
+            <a:ext cx="4599432" cy="201168"/>
+          </a:xfrm>
+          <a:prstGeom prst="rect">
+            <a:avLst/>
+          </a:prstGeom>
+          <a:noFill/>
+          <a:ln/>
+        </p:spPr>
+        <p:txBody>
+          <a:bodyPr wrap="square" lIns="0" tIns="0" rIns="0" bIns="0" rtlCol="0" anchor="ctr">
+            <a:normAutofit/>
+          </a:bodyPr>
+          <a:lstStyle/>
+          <a:p>
             <a:pPr indent="0" marL="0">
               <a:buNone/>
             </a:pPr>
@@ -7308,6 +7653,34 @@
                 <a:ea typeface="Menlo" pitchFamily="34" charset="-122"/>
                 <a:cs typeface="Menlo" pitchFamily="34" charset="-120"/>
               </a:rPr>
+              <a:t>    </a:t>
+            </a:r>
+            <a:pPr indent="0" marL="0">
+              <a:buNone/>
+            </a:pPr>
+            <a:r>
+              <a:rPr lang="en-US" sz="1200" dirty="0">
+                <a:solidFill>
+                  <a:srgbClr val="F58AC1"/>
+                </a:solidFill>
+                <a:latin typeface="Menlo" pitchFamily="34" charset="0"/>
+                <a:ea typeface="Menlo" pitchFamily="34" charset="-122"/>
+                <a:cs typeface="Menlo" pitchFamily="34" charset="-120"/>
+              </a:rPr>
+              <a:t>await</a:t>
+            </a:r>
+            <a:pPr indent="0" marL="0">
+              <a:buNone/>
+            </a:pPr>
+            <a:r>
+              <a:rPr lang="en-US" sz="1200" dirty="0">
+                <a:solidFill>
+                  <a:srgbClr val="EFEFEF"/>
+                </a:solidFill>
+                <a:latin typeface="Menlo" pitchFamily="34" charset="0"/>
+                <a:ea typeface="Menlo" pitchFamily="34" charset="-122"/>
+                <a:cs typeface="Menlo" pitchFamily="34" charset="-120"/>
+              </a:rPr>
               <a:t> </a:t>
             </a:r>
             <a:pPr indent="0" marL="0">
@@ -7316,13 +7689,137 @@
             <a:r>
               <a:rPr lang="en-US" sz="1200" dirty="0">
                 <a:solidFill>
-                  <a:srgbClr val="F0C15A"/>
-                </a:solidFill>
-                <a:latin typeface="Menlo" pitchFamily="34" charset="0"/>
-                <a:ea typeface="Menlo" pitchFamily="34" charset="-122"/>
-                <a:cs typeface="Menlo" pitchFamily="34" charset="-120"/>
-              </a:rPr>
-              <a:t>trace.zip</a:t>
+                  <a:srgbClr val="F58AC1"/>
+                </a:solidFill>
+                <a:latin typeface="Menlo" pitchFamily="34" charset="0"/>
+                <a:ea typeface="Menlo" pitchFamily="34" charset="-122"/>
+                <a:cs typeface="Menlo" pitchFamily="34" charset="-120"/>
+              </a:rPr>
+              <a:t>this</a:t>
+            </a:r>
+            <a:pPr indent="0" marL="0">
+              <a:buNone/>
+            </a:pPr>
+            <a:r>
+              <a:rPr lang="en-US" sz="1200" dirty="0">
+                <a:solidFill>
+                  <a:srgbClr val="8BD6C0"/>
+                </a:solidFill>
+                <a:latin typeface="Menlo" pitchFamily="34" charset="0"/>
+                <a:ea typeface="Menlo" pitchFamily="34" charset="-122"/>
+                <a:cs typeface="Menlo" pitchFamily="34" charset="-120"/>
+              </a:rPr>
+              <a:t>.submit</a:t>
+            </a:r>
+            <a:pPr indent="0" marL="0">
+              <a:buNone/>
+            </a:pPr>
+            <a:r>
+              <a:rPr lang="en-US" sz="1200" dirty="0">
+                <a:solidFill>
+                  <a:srgbClr val="8BD6C0"/>
+                </a:solidFill>
+                <a:latin typeface="Menlo" pitchFamily="34" charset="0"/>
+                <a:ea typeface="Menlo" pitchFamily="34" charset="-122"/>
+                <a:cs typeface="Menlo" pitchFamily="34" charset="-120"/>
+              </a:rPr>
+              <a:t>.click</a:t>
+            </a:r>
+            <a:pPr indent="0" marL="0">
+              <a:buNone/>
+            </a:pPr>
+            <a:r>
+              <a:rPr lang="en-US" sz="1200" dirty="0">
+                <a:solidFill>
+                  <a:srgbClr val="EFEFEF"/>
+                </a:solidFill>
+                <a:latin typeface="Menlo" pitchFamily="34" charset="0"/>
+                <a:ea typeface="Menlo" pitchFamily="34" charset="-122"/>
+                <a:cs typeface="Menlo" pitchFamily="34" charset="-120"/>
+              </a:rPr>
+              <a:t>();</a:t>
+            </a:r>
+            <a:endParaRPr lang="en-US" sz="1200" dirty="0"/>
+          </a:p>
+        </p:txBody>
+      </p:sp>
+      <p:sp>
+        <p:nvSpPr>
+          <p:cNvPr id="24" name="Text 22"/>
+          <p:cNvSpPr/>
+          <p:nvPr/>
+        </p:nvSpPr>
+        <p:spPr>
+          <a:xfrm>
+            <a:off x="6547104" y="5111496"/>
+            <a:ext cx="4599432" cy="201168"/>
+          </a:xfrm>
+          <a:prstGeom prst="rect">
+            <a:avLst/>
+          </a:prstGeom>
+          <a:noFill/>
+          <a:ln/>
+        </p:spPr>
+        <p:txBody>
+          <a:bodyPr wrap="square" lIns="0" tIns="0" rIns="0" bIns="0" rtlCol="0" anchor="ctr">
+            <a:normAutofit/>
+          </a:bodyPr>
+          <a:lstStyle/>
+          <a:p>
+            <a:pPr indent="0" marL="0">
+              <a:buNone/>
+            </a:pPr>
+            <a:r>
+              <a:rPr lang="en-US" sz="1200" dirty="0">
+                <a:solidFill>
+                  <a:srgbClr val="EFEFEF"/>
+                </a:solidFill>
+                <a:latin typeface="Menlo" pitchFamily="34" charset="0"/>
+                <a:ea typeface="Menlo" pitchFamily="34" charset="-122"/>
+                <a:cs typeface="Menlo" pitchFamily="34" charset="-120"/>
+              </a:rPr>
+              <a:t>  }</a:t>
+            </a:r>
+            <a:endParaRPr lang="en-US" sz="1200" dirty="0"/>
+          </a:p>
+        </p:txBody>
+      </p:sp>
+      <p:sp>
+        <p:nvSpPr>
+          <p:cNvPr id="25" name="Text 23"/>
+          <p:cNvSpPr/>
+          <p:nvPr/>
+        </p:nvSpPr>
+        <p:spPr>
+          <a:xfrm>
+            <a:off x="6547104" y="5385816"/>
+            <a:ext cx="4599432" cy="201168"/>
+          </a:xfrm>
+          <a:prstGeom prst="rect">
+            <a:avLst/>
+          </a:prstGeom>
+          <a:noFill/>
+          <a:ln/>
+        </p:spPr>
+        <p:txBody>
+          <a:bodyPr wrap="square" lIns="0" tIns="0" rIns="0" bIns="0" rtlCol="0" anchor="ctr">
+            <a:normAutofit/>
+          </a:bodyPr>
+          <a:lstStyle/>
+          <a:p>
+            <a:pPr indent="0" marL="0">
+              <a:buNone/>
+            </a:pPr>
+            <a:r>
+              <a:rPr lang="en-US" sz="1200" dirty="0">
+                <a:solidFill>
+                  <a:srgbClr val="EFEFEF"/>
+                </a:solidFill>
+                <a:latin typeface="Menlo" pitchFamily="34" charset="0"/>
+                <a:ea typeface="Menlo" pitchFamily="34" charset="-122"/>
+                <a:cs typeface="Menlo" pitchFamily="34" charset="-120"/>
+              </a:rPr>
+              <a:t>}</a:t>
             </a:r>
             <a:endParaRPr lang="en-US" sz="1200" dirty="0"/>
           </a:p>
@@ -7384,7 +7881,7 @@
                 <a:ea typeface="Barlow" pitchFamily="34" charset="-122"/>
                 <a:cs typeface="Barlow" pitchFamily="34" charset="-120"/>
               </a:rPr>
-              <a:t>sourcier.uk / CI failures should be inspectable</a:t>
+              <a:t>sourcier.uk / Page objects, fixtures, and storageState</a:t>
             </a:r>
             <a:endParaRPr lang="en-US" sz="1000" dirty="0"/>
           </a:p>
@@ -7449,6 +7946,3075 @@
 <file path=ppt/slides/slide13.xml><?xml version="1.0" encoding="utf-8"?>
 <p:sld xmlns:a="http://schemas.openxmlformats.org/drawingml/2006/main" xmlns:r="http://schemas.openxmlformats.org/officeDocument/2006/relationships" xmlns:p="http://schemas.openxmlformats.org/presentationml/2006/main">
   <p:cSld name="Slide 13">
+    <p:bg>
+      <p:bgPr>
+        <a:solidFill>
+          <a:srgbClr val="F6ECE1"/>
+        </a:solidFill>
+      </p:bgPr>
+    </p:bg>
+    <p:spTree>
+      <p:nvGrpSpPr>
+        <p:cNvPr id="1" name=""/>
+        <p:cNvGrpSpPr/>
+        <p:nvPr/>
+      </p:nvGrpSpPr>
+      <p:grpSpPr>
+        <a:xfrm>
+          <a:off x="0" y="0"/>
+          <a:ext cx="0" cy="0"/>
+          <a:chOff x="0" y="0"/>
+          <a:chExt cx="0" cy="0"/>
+        </a:xfrm>
+      </p:grpSpPr>
+      <p:sp>
+        <p:nvSpPr>
+          <p:cNvPr id="2" name="Shape 0"/>
+          <p:cNvSpPr/>
+          <p:nvPr/>
+        </p:nvSpPr>
+        <p:spPr>
+          <a:xfrm>
+            <a:off x="-1920240" y="-1097280"/>
+            <a:ext cx="5394960" cy="4480560"/>
+          </a:xfrm>
+          <a:prstGeom prst="roundRect">
+            <a:avLst>
+              <a:gd name="adj" fmla="val 6122"/>
+            </a:avLst>
+          </a:prstGeom>
+          <a:solidFill>
+            <a:srgbClr val="E8006A">
+              <a:alpha val="8000"/>
+            </a:srgbClr>
+          </a:solidFill>
+          <a:ln w="12700">
+            <a:solidFill>
+              <a:srgbClr val="E8006A">
+                <a:alpha val="0"/>
+              </a:srgbClr>
+            </a:solidFill>
+            <a:prstDash val="solid"/>
+          </a:ln>
+        </p:spPr>
+      </p:sp>
+      <p:sp>
+        <p:nvSpPr>
+          <p:cNvPr id="3" name="Shape 1"/>
+          <p:cNvSpPr/>
+          <p:nvPr/>
+        </p:nvSpPr>
+        <p:spPr>
+          <a:xfrm>
+            <a:off x="8412480" y="-1371600"/>
+            <a:ext cx="5669280" cy="5120640"/>
+          </a:xfrm>
+          <a:prstGeom prst="roundRect">
+            <a:avLst>
+              <a:gd name="adj" fmla="val 5357"/>
+            </a:avLst>
+          </a:prstGeom>
+          <a:solidFill>
+            <a:srgbClr val="2A7D5B">
+              <a:alpha val="10000"/>
+            </a:srgbClr>
+          </a:solidFill>
+          <a:ln w="12700">
+            <a:solidFill>
+              <a:srgbClr val="2A7D5B">
+                <a:alpha val="0"/>
+              </a:srgbClr>
+            </a:solidFill>
+            <a:prstDash val="solid"/>
+          </a:ln>
+        </p:spPr>
+      </p:sp>
+      <p:sp>
+        <p:nvSpPr>
+          <p:cNvPr id="4" name="Shape 2"/>
+          <p:cNvSpPr/>
+          <p:nvPr/>
+        </p:nvSpPr>
+        <p:spPr>
+          <a:xfrm>
+            <a:off x="6492240" y="5029200"/>
+            <a:ext cx="7406640" cy="3108960"/>
+          </a:xfrm>
+          <a:prstGeom prst="roundRect">
+            <a:avLst>
+              <a:gd name="adj" fmla="val 8824"/>
+            </a:avLst>
+          </a:prstGeom>
+          <a:solidFill>
+            <a:srgbClr val="E5D8C9">
+              <a:alpha val="76000"/>
+            </a:srgbClr>
+          </a:solidFill>
+          <a:ln w="12700">
+            <a:solidFill>
+              <a:srgbClr val="E5D8C9">
+                <a:alpha val="0"/>
+              </a:srgbClr>
+            </a:solidFill>
+            <a:prstDash val="solid"/>
+          </a:ln>
+        </p:spPr>
+      </p:sp>
+      <p:sp>
+        <p:nvSpPr>
+          <p:cNvPr id="5" name="Shape 3"/>
+          <p:cNvSpPr/>
+          <p:nvPr/>
+        </p:nvSpPr>
+        <p:spPr>
+          <a:xfrm>
+            <a:off x="0" y="0"/>
+            <a:ext cx="12191695" cy="658368"/>
+          </a:xfrm>
+          <a:prstGeom prst="rect">
+            <a:avLst/>
+          </a:prstGeom>
+          <a:solidFill>
+            <a:srgbClr val="101410"/>
+          </a:solidFill>
+          <a:ln w="12700">
+            <a:solidFill>
+              <a:srgbClr val="101410"/>
+            </a:solidFill>
+            <a:prstDash val="solid"/>
+          </a:ln>
+        </p:spPr>
+      </p:sp>
+      <p:sp>
+        <p:nvSpPr>
+          <p:cNvPr id="6" name="Shape 4"/>
+          <p:cNvSpPr/>
+          <p:nvPr/>
+        </p:nvSpPr>
+        <p:spPr>
+          <a:xfrm>
+            <a:off x="0" y="658368"/>
+            <a:ext cx="12191695" cy="0"/>
+          </a:xfrm>
+          <a:prstGeom prst="line">
+            <a:avLst/>
+          </a:prstGeom>
+          <a:noFill/>
+          <a:ln w="12700">
+            <a:solidFill>
+              <a:srgbClr val="E8006A"/>
+            </a:solidFill>
+            <a:prstDash val="solid"/>
+          </a:ln>
+        </p:spPr>
+      </p:sp>
+      <p:sp>
+        <p:nvSpPr>
+          <p:cNvPr id="7" name="Shape 5"/>
+          <p:cNvSpPr/>
+          <p:nvPr/>
+        </p:nvSpPr>
+        <p:spPr>
+          <a:xfrm>
+            <a:off x="0" y="621792"/>
+            <a:ext cx="12191695" cy="0"/>
+          </a:xfrm>
+          <a:prstGeom prst="line">
+            <a:avLst/>
+          </a:prstGeom>
+          <a:noFill/>
+          <a:ln w="12700">
+            <a:solidFill>
+              <a:srgbClr val="2A7D5B">
+                <a:alpha val="76000"/>
+              </a:srgbClr>
+            </a:solidFill>
+            <a:prstDash val="solid"/>
+          </a:ln>
+        </p:spPr>
+      </p:sp>
+      <p:sp>
+        <p:nvSpPr>
+          <p:cNvPr id="8" name="Text 6"/>
+          <p:cNvSpPr/>
+          <p:nvPr/>
+        </p:nvSpPr>
+        <p:spPr>
+          <a:xfrm>
+            <a:off x="457200" y="155448"/>
+            <a:ext cx="2560320" cy="274320"/>
+          </a:xfrm>
+          <a:prstGeom prst="rect">
+            <a:avLst/>
+          </a:prstGeom>
+          <a:noFill/>
+          <a:ln/>
+        </p:spPr>
+        <p:txBody>
+          <a:bodyPr wrap="square" rtlCol="0" anchor="ctr"/>
+          <a:lstStyle/>
+          <a:p>
+            <a:pPr indent="0" marL="0">
+              <a:buNone/>
+            </a:pPr>
+            <a:r>
+              <a:rPr lang="en-US" sz="1800" b="1" dirty="0">
+                <a:solidFill>
+                  <a:srgbClr val="FFFFFF"/>
+                </a:solidFill>
+                <a:latin typeface="Barlow Condensed" pitchFamily="34" charset="0"/>
+                <a:ea typeface="Barlow Condensed" pitchFamily="34" charset="-122"/>
+                <a:cs typeface="Barlow Condensed" pitchFamily="34" charset="-120"/>
+              </a:rPr>
+              <a:t>SOURCIER</a:t>
+            </a:r>
+            <a:endParaRPr lang="en-US" sz="1800" dirty="0"/>
+          </a:p>
+        </p:txBody>
+      </p:sp>
+      <p:sp>
+        <p:nvSpPr>
+          <p:cNvPr id="9" name="Text 7"/>
+          <p:cNvSpPr/>
+          <p:nvPr/>
+        </p:nvSpPr>
+        <p:spPr>
+          <a:xfrm>
+            <a:off x="457200" y="914400"/>
+            <a:ext cx="8138160" cy="640080"/>
+          </a:xfrm>
+          <a:prstGeom prst="rect">
+            <a:avLst/>
+          </a:prstGeom>
+          <a:noFill/>
+          <a:ln/>
+        </p:spPr>
+        <p:txBody>
+          <a:bodyPr wrap="square" rtlCol="0" anchor="ctr">
+            <a:normAutofit/>
+          </a:bodyPr>
+          <a:lstStyle/>
+          <a:p>
+            <a:pPr indent="0" marL="0">
+              <a:buNone/>
+            </a:pPr>
+            <a:r>
+              <a:rPr lang="en-US" sz="3200" b="1" dirty="0">
+                <a:solidFill>
+                  <a:srgbClr val="0F0F0F"/>
+                </a:solidFill>
+                <a:latin typeface="Barlow Condensed" pitchFamily="34" charset="0"/>
+                <a:ea typeface="Barlow Condensed" pitchFamily="34" charset="-122"/>
+                <a:cs typeface="Barlow Condensed" pitchFamily="34" charset="-120"/>
+              </a:rPr>
+              <a:t>RUN IN CI. DEBUG WITH TRACES.</a:t>
+            </a:r>
+            <a:endParaRPr lang="en-US" sz="3200" dirty="0"/>
+          </a:p>
+        </p:txBody>
+      </p:sp>
+      <p:sp>
+        <p:nvSpPr>
+          <p:cNvPr id="10" name="Text 8"/>
+          <p:cNvSpPr/>
+          <p:nvPr/>
+        </p:nvSpPr>
+        <p:spPr>
+          <a:xfrm>
+            <a:off x="457200" y="1572768"/>
+            <a:ext cx="9509760" cy="347472"/>
+          </a:xfrm>
+          <a:prstGeom prst="rect">
+            <a:avLst/>
+          </a:prstGeom>
+          <a:noFill/>
+          <a:ln/>
+        </p:spPr>
+        <p:txBody>
+          <a:bodyPr wrap="square" rtlCol="0" anchor="t"/>
+          <a:lstStyle/>
+          <a:p>
+            <a:pPr indent="0" marL="0">
+              <a:buNone/>
+            </a:pPr>
+            <a:r>
+              <a:rPr lang="en-US" sz="1700" dirty="0">
+                <a:solidFill>
+                  <a:srgbClr val="6B6B6B"/>
+                </a:solidFill>
+                <a:latin typeface="Barlow" pitchFamily="34" charset="0"/>
+                <a:ea typeface="Barlow" pitchFamily="34" charset="-122"/>
+                <a:cs typeface="Barlow" pitchFamily="34" charset="-120"/>
+              </a:rPr>
+              <a:t>When a remote test fails, you need evidence, not guesses.</a:t>
+            </a:r>
+            <a:endParaRPr lang="en-US" sz="1700" dirty="0"/>
+          </a:p>
+        </p:txBody>
+      </p:sp>
+      <p:sp>
+        <p:nvSpPr>
+          <p:cNvPr id="11" name="Text 9"/>
+          <p:cNvSpPr/>
+          <p:nvPr/>
+        </p:nvSpPr>
+        <p:spPr>
+          <a:xfrm>
+            <a:off x="685800" y="2240280"/>
+            <a:ext cx="5212080" cy="3291840"/>
+          </a:xfrm>
+          <a:prstGeom prst="rect">
+            <a:avLst/>
+          </a:prstGeom>
+          <a:noFill/>
+          <a:ln/>
+        </p:spPr>
+        <p:txBody>
+          <a:bodyPr wrap="square" lIns="0" tIns="0" rIns="0" bIns="0" rtlCol="0" anchor="t">
+            <a:normAutofit/>
+          </a:bodyPr>
+          <a:lstStyle/>
+          <a:p>
+            <a:pPr indent="0" marL="0">
+              <a:buNone/>
+            </a:pPr>
+            <a:r>
+              <a:rPr lang="en-US" sz="1800" dirty="0">
+                <a:solidFill>
+                  <a:srgbClr val="0F0F0F"/>
+                </a:solidFill>
+                <a:latin typeface="Barlow" pitchFamily="34" charset="0"/>
+                <a:ea typeface="Barlow" pitchFamily="34" charset="-122"/>
+                <a:cs typeface="Barlow" pitchFamily="34" charset="-120"/>
+              </a:rPr>
+              <a:t>• Run headless in CI and save traces on failure or retry.</a:t>
+            </a:r>
+            <a:endParaRPr lang="en-US" sz="1800" dirty="0"/>
+          </a:p>
+          <a:p>
+            <a:pPr indent="0" marL="0">
+              <a:buNone/>
+            </a:pPr>
+            <a:r>
+              <a:rPr lang="en-US" sz="1800" dirty="0">
+                <a:solidFill>
+                  <a:srgbClr val="0F0F0F"/>
+                </a:solidFill>
+                <a:latin typeface="Barlow" pitchFamily="34" charset="0"/>
+                <a:ea typeface="Barlow" pitchFamily="34" charset="-122"/>
+                <a:cs typeface="Barlow" pitchFamily="34" charset="-120"/>
+              </a:rPr>
+              <a:t>• The trace captures clicks, screenshots, console, network, and timing.</a:t>
+            </a:r>
+            <a:endParaRPr lang="en-US" sz="1800" dirty="0"/>
+          </a:p>
+          <a:p>
+            <a:pPr indent="0" marL="0">
+              <a:buNone/>
+            </a:pPr>
+            <a:r>
+              <a:rPr lang="en-US" sz="1800" dirty="0">
+                <a:solidFill>
+                  <a:srgbClr val="0F0F0F"/>
+                </a:solidFill>
+                <a:latin typeface="Barlow" pitchFamily="34" charset="0"/>
+                <a:ea typeface="Barlow" pitchFamily="34" charset="-122"/>
+                <a:cs typeface="Barlow" pitchFamily="34" charset="-120"/>
+              </a:rPr>
+              <a:t>• Open it locally and replay the failure like a black box recorder.</a:t>
+            </a:r>
+            <a:endParaRPr lang="en-US" sz="1800" dirty="0"/>
+          </a:p>
+          <a:p>
+            <a:pPr indent="0" marL="0">
+              <a:buNone/>
+            </a:pPr>
+            <a:r>
+              <a:rPr lang="en-US" sz="1800" dirty="0">
+                <a:solidFill>
+                  <a:srgbClr val="0F0F0F"/>
+                </a:solidFill>
+                <a:latin typeface="Barlow" pitchFamily="34" charset="0"/>
+                <a:ea typeface="Barlow" pitchFamily="34" charset="-122"/>
+                <a:cs typeface="Barlow" pitchFamily="34" charset="-120"/>
+              </a:rPr>
+              <a:t>• This is where Playwright feels better than many older tools.</a:t>
+            </a:r>
+            <a:endParaRPr lang="en-US" sz="1800" dirty="0"/>
+          </a:p>
+        </p:txBody>
+      </p:sp>
+      <p:sp>
+        <p:nvSpPr>
+          <p:cNvPr id="12" name="Shape 10"/>
+          <p:cNvSpPr/>
+          <p:nvPr/>
+        </p:nvSpPr>
+        <p:spPr>
+          <a:xfrm>
+            <a:off x="6309360" y="2148840"/>
+            <a:ext cx="5166360" cy="3566160"/>
+          </a:xfrm>
+          <a:prstGeom prst="roundRect">
+            <a:avLst>
+              <a:gd name="adj" fmla="val 2051"/>
+            </a:avLst>
+          </a:prstGeom>
+          <a:solidFill>
+            <a:srgbClr val="F6ECE1"/>
+          </a:solidFill>
+          <a:ln w="12700">
+            <a:solidFill>
+              <a:srgbClr val="D7D7D7"/>
+            </a:solidFill>
+            <a:prstDash val="solid"/>
+          </a:ln>
+        </p:spPr>
+      </p:sp>
+      <p:sp>
+        <p:nvSpPr>
+          <p:cNvPr id="13" name="Shape 11"/>
+          <p:cNvSpPr/>
+          <p:nvPr/>
+        </p:nvSpPr>
+        <p:spPr>
+          <a:xfrm>
+            <a:off x="6656832" y="2606040"/>
+            <a:ext cx="1417320" cy="658368"/>
+          </a:xfrm>
+          <a:prstGeom prst="roundRect">
+            <a:avLst>
+              <a:gd name="adj" fmla="val 6944"/>
+            </a:avLst>
+          </a:prstGeom>
+          <a:solidFill>
+            <a:srgbClr val="FFFFFF"/>
+          </a:solidFill>
+          <a:ln w="12700">
+            <a:solidFill>
+              <a:srgbClr val="D7D7D7"/>
+            </a:solidFill>
+            <a:prstDash val="solid"/>
+          </a:ln>
+        </p:spPr>
+      </p:sp>
+      <p:sp>
+        <p:nvSpPr>
+          <p:cNvPr id="14" name="Text 12"/>
+          <p:cNvSpPr/>
+          <p:nvPr/>
+        </p:nvSpPr>
+        <p:spPr>
+          <a:xfrm>
+            <a:off x="6748272" y="2788920"/>
+            <a:ext cx="1234440" cy="164592"/>
+          </a:xfrm>
+          <a:prstGeom prst="rect">
+            <a:avLst/>
+          </a:prstGeom>
+          <a:noFill/>
+          <a:ln/>
+        </p:spPr>
+        <p:txBody>
+          <a:bodyPr wrap="square" rtlCol="0" anchor="ctr"/>
+          <a:lstStyle/>
+          <a:p>
+            <a:pPr algn="ctr" indent="0" marL="0">
+              <a:buNone/>
+            </a:pPr>
+            <a:r>
+              <a:rPr lang="en-US" sz="1600" b="1" dirty="0">
+                <a:solidFill>
+                  <a:srgbClr val="0F0F0F"/>
+                </a:solidFill>
+                <a:latin typeface="Barlow Condensed" pitchFamily="34" charset="0"/>
+                <a:ea typeface="Barlow Condensed" pitchFamily="34" charset="-122"/>
+                <a:cs typeface="Barlow Condensed" pitchFamily="34" charset="-120"/>
+              </a:rPr>
+              <a:t>Failing test</a:t>
+            </a:r>
+            <a:endParaRPr lang="en-US" sz="1600" dirty="0"/>
+          </a:p>
+        </p:txBody>
+      </p:sp>
+      <p:sp>
+        <p:nvSpPr>
+          <p:cNvPr id="15" name="Shape 13"/>
+          <p:cNvSpPr/>
+          <p:nvPr/>
+        </p:nvSpPr>
+        <p:spPr>
+          <a:xfrm>
+            <a:off x="8229600" y="2606040"/>
+            <a:ext cx="1417320" cy="658368"/>
+          </a:xfrm>
+          <a:prstGeom prst="roundRect">
+            <a:avLst>
+              <a:gd name="adj" fmla="val 6944"/>
+            </a:avLst>
+          </a:prstGeom>
+          <a:solidFill>
+            <a:srgbClr val="FDEAF2"/>
+          </a:solidFill>
+          <a:ln w="12700">
+            <a:solidFill>
+              <a:srgbClr val="E8006A"/>
+            </a:solidFill>
+            <a:prstDash val="solid"/>
+          </a:ln>
+        </p:spPr>
+      </p:sp>
+      <p:sp>
+        <p:nvSpPr>
+          <p:cNvPr id="16" name="Text 14"/>
+          <p:cNvSpPr/>
+          <p:nvPr/>
+        </p:nvSpPr>
+        <p:spPr>
+          <a:xfrm>
+            <a:off x="8321040" y="2788920"/>
+            <a:ext cx="1234440" cy="164592"/>
+          </a:xfrm>
+          <a:prstGeom prst="rect">
+            <a:avLst/>
+          </a:prstGeom>
+          <a:noFill/>
+          <a:ln/>
+        </p:spPr>
+        <p:txBody>
+          <a:bodyPr wrap="square" rtlCol="0" anchor="ctr"/>
+          <a:lstStyle/>
+          <a:p>
+            <a:pPr algn="ctr" indent="0" marL="0">
+              <a:buNone/>
+            </a:pPr>
+            <a:r>
+              <a:rPr lang="en-US" sz="1600" b="1" dirty="0">
+                <a:solidFill>
+                  <a:srgbClr val="0F0F0F"/>
+                </a:solidFill>
+                <a:latin typeface="Barlow Condensed" pitchFamily="34" charset="0"/>
+                <a:ea typeface="Barlow Condensed" pitchFamily="34" charset="-122"/>
+                <a:cs typeface="Barlow Condensed" pitchFamily="34" charset="-120"/>
+              </a:rPr>
+              <a:t>Trace artifact</a:t>
+            </a:r>
+            <a:endParaRPr lang="en-US" sz="1600" dirty="0"/>
+          </a:p>
+        </p:txBody>
+      </p:sp>
+      <p:sp>
+        <p:nvSpPr>
+          <p:cNvPr id="17" name="Shape 15"/>
+          <p:cNvSpPr/>
+          <p:nvPr/>
+        </p:nvSpPr>
+        <p:spPr>
+          <a:xfrm>
+            <a:off x="9802368" y="2606040"/>
+            <a:ext cx="1417320" cy="658368"/>
+          </a:xfrm>
+          <a:prstGeom prst="roundRect">
+            <a:avLst>
+              <a:gd name="adj" fmla="val 6944"/>
+            </a:avLst>
+          </a:prstGeom>
+          <a:solidFill>
+            <a:srgbClr val="FFFFFF"/>
+          </a:solidFill>
+          <a:ln w="12700">
+            <a:solidFill>
+              <a:srgbClr val="D7D7D7"/>
+            </a:solidFill>
+            <a:prstDash val="solid"/>
+          </a:ln>
+        </p:spPr>
+      </p:sp>
+      <p:sp>
+        <p:nvSpPr>
+          <p:cNvPr id="18" name="Text 16"/>
+          <p:cNvSpPr/>
+          <p:nvPr/>
+        </p:nvSpPr>
+        <p:spPr>
+          <a:xfrm>
+            <a:off x="9893808" y="2788920"/>
+            <a:ext cx="1234440" cy="164592"/>
+          </a:xfrm>
+          <a:prstGeom prst="rect">
+            <a:avLst/>
+          </a:prstGeom>
+          <a:noFill/>
+          <a:ln/>
+        </p:spPr>
+        <p:txBody>
+          <a:bodyPr wrap="square" rtlCol="0" anchor="ctr"/>
+          <a:lstStyle/>
+          <a:p>
+            <a:pPr algn="ctr" indent="0" marL="0">
+              <a:buNone/>
+            </a:pPr>
+            <a:r>
+              <a:rPr lang="en-US" sz="1600" b="1" dirty="0">
+                <a:solidFill>
+                  <a:srgbClr val="0F0F0F"/>
+                </a:solidFill>
+                <a:latin typeface="Barlow Condensed" pitchFamily="34" charset="0"/>
+                <a:ea typeface="Barlow Condensed" pitchFamily="34" charset="-122"/>
+                <a:cs typeface="Barlow Condensed" pitchFamily="34" charset="-120"/>
+              </a:rPr>
+              <a:t>Open locally</a:t>
+            </a:r>
+            <a:endParaRPr lang="en-US" sz="1600" dirty="0"/>
+          </a:p>
+        </p:txBody>
+      </p:sp>
+      <p:sp>
+        <p:nvSpPr>
+          <p:cNvPr id="19" name="Shape 17"/>
+          <p:cNvSpPr/>
+          <p:nvPr/>
+        </p:nvSpPr>
+        <p:spPr>
+          <a:xfrm>
+            <a:off x="8074152" y="2761488"/>
+            <a:ext cx="201168" cy="292608"/>
+          </a:xfrm>
+          <a:prstGeom prst="chevron">
+            <a:avLst/>
+          </a:prstGeom>
+          <a:solidFill>
+            <a:srgbClr val="E8006A"/>
+          </a:solidFill>
+          <a:ln w="12700">
+            <a:solidFill>
+              <a:srgbClr val="E8006A"/>
+            </a:solidFill>
+            <a:prstDash val="solid"/>
+          </a:ln>
+        </p:spPr>
+      </p:sp>
+      <p:sp>
+        <p:nvSpPr>
+          <p:cNvPr id="20" name="Shape 18"/>
+          <p:cNvSpPr/>
+          <p:nvPr/>
+        </p:nvSpPr>
+        <p:spPr>
+          <a:xfrm>
+            <a:off x="9646920" y="2761488"/>
+            <a:ext cx="201168" cy="292608"/>
+          </a:xfrm>
+          <a:prstGeom prst="chevron">
+            <a:avLst/>
+          </a:prstGeom>
+          <a:solidFill>
+            <a:srgbClr val="E8006A"/>
+          </a:solidFill>
+          <a:ln w="12700">
+            <a:solidFill>
+              <a:srgbClr val="E8006A"/>
+            </a:solidFill>
+            <a:prstDash val="solid"/>
+          </a:ln>
+        </p:spPr>
+      </p:sp>
+      <p:sp>
+        <p:nvSpPr>
+          <p:cNvPr id="21" name="Shape 19"/>
+          <p:cNvSpPr/>
+          <p:nvPr/>
+        </p:nvSpPr>
+        <p:spPr>
+          <a:xfrm>
+            <a:off x="6629400" y="3794760"/>
+            <a:ext cx="4526280" cy="1417320"/>
+          </a:xfrm>
+          <a:prstGeom prst="roundRect">
+            <a:avLst>
+              <a:gd name="adj" fmla="val 5161"/>
+            </a:avLst>
+          </a:prstGeom>
+          <a:solidFill>
+            <a:srgbClr val="121212"/>
+          </a:solidFill>
+          <a:ln w="12700">
+            <a:solidFill>
+              <a:srgbClr val="1F1F1F"/>
+            </a:solidFill>
+            <a:prstDash val="solid"/>
+          </a:ln>
+        </p:spPr>
+      </p:sp>
+      <p:sp>
+        <p:nvSpPr>
+          <p:cNvPr id="22" name="Shape 20"/>
+          <p:cNvSpPr/>
+          <p:nvPr/>
+        </p:nvSpPr>
+        <p:spPr>
+          <a:xfrm>
+            <a:off x="6629400" y="3794760"/>
+            <a:ext cx="4526280" cy="420624"/>
+          </a:xfrm>
+          <a:prstGeom prst="rect">
+            <a:avLst/>
+          </a:prstGeom>
+          <a:solidFill>
+            <a:srgbClr val="1B1B1B"/>
+          </a:solidFill>
+          <a:ln w="12700">
+            <a:solidFill>
+              <a:srgbClr val="1B1B1B"/>
+            </a:solidFill>
+            <a:prstDash val="solid"/>
+          </a:ln>
+        </p:spPr>
+      </p:sp>
+      <p:sp>
+        <p:nvSpPr>
+          <p:cNvPr id="23" name="Text 21"/>
+          <p:cNvSpPr/>
+          <p:nvPr/>
+        </p:nvSpPr>
+        <p:spPr>
+          <a:xfrm>
+            <a:off x="6830568" y="3904488"/>
+            <a:ext cx="4123944" cy="146304"/>
+          </a:xfrm>
+          <a:prstGeom prst="rect">
+            <a:avLst/>
+          </a:prstGeom>
+          <a:noFill/>
+          <a:ln/>
+        </p:spPr>
+        <p:txBody>
+          <a:bodyPr wrap="square" rtlCol="0" anchor="ctr"/>
+          <a:lstStyle/>
+          <a:p>
+            <a:pPr indent="0" marL="0">
+              <a:buNone/>
+            </a:pPr>
+            <a:r>
+              <a:rPr lang="en-US" sz="1000" dirty="0">
+                <a:solidFill>
+                  <a:srgbClr val="D9D9D9"/>
+                </a:solidFill>
+                <a:latin typeface="Barlow" pitchFamily="34" charset="0"/>
+                <a:ea typeface="Barlow" pitchFamily="34" charset="-122"/>
+                <a:cs typeface="Barlow" pitchFamily="34" charset="-120"/>
+              </a:rPr>
+              <a:t>debugging commands</a:t>
+            </a:r>
+            <a:endParaRPr lang="en-US" sz="1000" dirty="0"/>
+          </a:p>
+        </p:txBody>
+      </p:sp>
+      <p:sp>
+        <p:nvSpPr>
+          <p:cNvPr id="24" name="Text 22"/>
+          <p:cNvSpPr/>
+          <p:nvPr/>
+        </p:nvSpPr>
+        <p:spPr>
+          <a:xfrm>
+            <a:off x="6867144" y="4379976"/>
+            <a:ext cx="4050792" cy="201168"/>
+          </a:xfrm>
+          <a:prstGeom prst="rect">
+            <a:avLst/>
+          </a:prstGeom>
+          <a:noFill/>
+          <a:ln/>
+        </p:spPr>
+        <p:txBody>
+          <a:bodyPr wrap="square" lIns="0" tIns="0" rIns="0" bIns="0" rtlCol="0" anchor="ctr">
+            <a:normAutofit/>
+          </a:bodyPr>
+          <a:lstStyle/>
+          <a:p>
+            <a:pPr indent="0" marL="0">
+              <a:buNone/>
+            </a:pPr>
+            <a:r>
+              <a:rPr lang="en-US" sz="1200" dirty="0">
+                <a:solidFill>
+                  <a:srgbClr val="8BD6C0"/>
+                </a:solidFill>
+                <a:latin typeface="Menlo" pitchFamily="34" charset="0"/>
+                <a:ea typeface="Menlo" pitchFamily="34" charset="-122"/>
+                <a:cs typeface="Menlo" pitchFamily="34" charset="-120"/>
+              </a:rPr>
+              <a:t>pnpm</a:t>
+            </a:r>
+            <a:pPr indent="0" marL="0">
+              <a:buNone/>
+            </a:pPr>
+            <a:r>
+              <a:rPr lang="en-US" sz="1200" dirty="0">
+                <a:solidFill>
+                  <a:srgbClr val="EFEFEF"/>
+                </a:solidFill>
+                <a:latin typeface="Menlo" pitchFamily="34" charset="0"/>
+                <a:ea typeface="Menlo" pitchFamily="34" charset="-122"/>
+                <a:cs typeface="Menlo" pitchFamily="34" charset="-120"/>
+              </a:rPr>
+              <a:t> </a:t>
+            </a:r>
+            <a:pPr indent="0" marL="0">
+              <a:buNone/>
+            </a:pPr>
+            <a:r>
+              <a:rPr lang="en-US" sz="1200" dirty="0">
+                <a:solidFill>
+                  <a:srgbClr val="EFEFEF"/>
+                </a:solidFill>
+                <a:latin typeface="Menlo" pitchFamily="34" charset="0"/>
+                <a:ea typeface="Menlo" pitchFamily="34" charset="-122"/>
+                <a:cs typeface="Menlo" pitchFamily="34" charset="-120"/>
+              </a:rPr>
+              <a:t>exec</a:t>
+            </a:r>
+            <a:pPr indent="0" marL="0">
+              <a:buNone/>
+            </a:pPr>
+            <a:r>
+              <a:rPr lang="en-US" sz="1200" dirty="0">
+                <a:solidFill>
+                  <a:srgbClr val="EFEFEF"/>
+                </a:solidFill>
+                <a:latin typeface="Menlo" pitchFamily="34" charset="0"/>
+                <a:ea typeface="Menlo" pitchFamily="34" charset="-122"/>
+                <a:cs typeface="Menlo" pitchFamily="34" charset="-120"/>
+              </a:rPr>
+              <a:t> </a:t>
+            </a:r>
+            <a:pPr indent="0" marL="0">
+              <a:buNone/>
+            </a:pPr>
+            <a:r>
+              <a:rPr lang="en-US" sz="1200" dirty="0">
+                <a:solidFill>
+                  <a:srgbClr val="EFEFEF"/>
+                </a:solidFill>
+                <a:latin typeface="Menlo" pitchFamily="34" charset="0"/>
+                <a:ea typeface="Menlo" pitchFamily="34" charset="-122"/>
+                <a:cs typeface="Menlo" pitchFamily="34" charset="-120"/>
+              </a:rPr>
+              <a:t>playwright</a:t>
+            </a:r>
+            <a:pPr indent="0" marL="0">
+              <a:buNone/>
+            </a:pPr>
+            <a:r>
+              <a:rPr lang="en-US" sz="1200" dirty="0">
+                <a:solidFill>
+                  <a:srgbClr val="EFEFEF"/>
+                </a:solidFill>
+                <a:latin typeface="Menlo" pitchFamily="34" charset="0"/>
+                <a:ea typeface="Menlo" pitchFamily="34" charset="-122"/>
+                <a:cs typeface="Menlo" pitchFamily="34" charset="-120"/>
+              </a:rPr>
+              <a:t> </a:t>
+            </a:r>
+            <a:pPr indent="0" marL="0">
+              <a:buNone/>
+            </a:pPr>
+            <a:r>
+              <a:rPr lang="en-US" sz="1200" dirty="0">
+                <a:solidFill>
+                  <a:srgbClr val="EFEFEF"/>
+                </a:solidFill>
+                <a:latin typeface="Menlo" pitchFamily="34" charset="0"/>
+                <a:ea typeface="Menlo" pitchFamily="34" charset="-122"/>
+                <a:cs typeface="Menlo" pitchFamily="34" charset="-120"/>
+              </a:rPr>
+              <a:t>test</a:t>
+            </a:r>
+            <a:pPr indent="0" marL="0">
+              <a:buNone/>
+            </a:pPr>
+            <a:r>
+              <a:rPr lang="en-US" sz="1200" dirty="0">
+                <a:solidFill>
+                  <a:srgbClr val="EFEFEF"/>
+                </a:solidFill>
+                <a:latin typeface="Menlo" pitchFamily="34" charset="0"/>
+                <a:ea typeface="Menlo" pitchFamily="34" charset="-122"/>
+                <a:cs typeface="Menlo" pitchFamily="34" charset="-120"/>
+              </a:rPr>
+              <a:t> </a:t>
+            </a:r>
+            <a:pPr indent="0" marL="0">
+              <a:buNone/>
+            </a:pPr>
+            <a:r>
+              <a:rPr lang="en-US" sz="1200" dirty="0">
+                <a:solidFill>
+                  <a:srgbClr val="F58AC1"/>
+                </a:solidFill>
+                <a:latin typeface="Menlo" pitchFamily="34" charset="0"/>
+                <a:ea typeface="Menlo" pitchFamily="34" charset="-122"/>
+                <a:cs typeface="Menlo" pitchFamily="34" charset="-120"/>
+              </a:rPr>
+              <a:t>--trace=on-first-retry</a:t>
+            </a:r>
+            <a:endParaRPr lang="en-US" sz="1200" dirty="0"/>
+          </a:p>
+        </p:txBody>
+      </p:sp>
+      <p:sp>
+        <p:nvSpPr>
+          <p:cNvPr id="25" name="Text 23"/>
+          <p:cNvSpPr/>
+          <p:nvPr/>
+        </p:nvSpPr>
+        <p:spPr>
+          <a:xfrm>
+            <a:off x="6867144" y="4654296"/>
+            <a:ext cx="4050792" cy="201168"/>
+          </a:xfrm>
+          <a:prstGeom prst="rect">
+            <a:avLst/>
+          </a:prstGeom>
+          <a:noFill/>
+          <a:ln/>
+        </p:spPr>
+        <p:txBody>
+          <a:bodyPr wrap="square" lIns="0" tIns="0" rIns="0" bIns="0" rtlCol="0" anchor="ctr">
+            <a:normAutofit/>
+          </a:bodyPr>
+          <a:lstStyle/>
+          <a:p>
+            <a:pPr indent="0" marL="0">
+              <a:buNone/>
+            </a:pPr>
+            <a:r>
+              <a:rPr lang="en-US" sz="1200" dirty="0">
+                <a:solidFill>
+                  <a:srgbClr val="8BD6C0"/>
+                </a:solidFill>
+                <a:latin typeface="Menlo" pitchFamily="34" charset="0"/>
+                <a:ea typeface="Menlo" pitchFamily="34" charset="-122"/>
+                <a:cs typeface="Menlo" pitchFamily="34" charset="-120"/>
+              </a:rPr>
+              <a:t>pnpm</a:t>
+            </a:r>
+            <a:pPr indent="0" marL="0">
+              <a:buNone/>
+            </a:pPr>
+            <a:r>
+              <a:rPr lang="en-US" sz="1200" dirty="0">
+                <a:solidFill>
+                  <a:srgbClr val="EFEFEF"/>
+                </a:solidFill>
+                <a:latin typeface="Menlo" pitchFamily="34" charset="0"/>
+                <a:ea typeface="Menlo" pitchFamily="34" charset="-122"/>
+                <a:cs typeface="Menlo" pitchFamily="34" charset="-120"/>
+              </a:rPr>
+              <a:t> </a:t>
+            </a:r>
+            <a:pPr indent="0" marL="0">
+              <a:buNone/>
+            </a:pPr>
+            <a:r>
+              <a:rPr lang="en-US" sz="1200" dirty="0">
+                <a:solidFill>
+                  <a:srgbClr val="EFEFEF"/>
+                </a:solidFill>
+                <a:latin typeface="Menlo" pitchFamily="34" charset="0"/>
+                <a:ea typeface="Menlo" pitchFamily="34" charset="-122"/>
+                <a:cs typeface="Menlo" pitchFamily="34" charset="-120"/>
+              </a:rPr>
+              <a:t>exec</a:t>
+            </a:r>
+            <a:pPr indent="0" marL="0">
+              <a:buNone/>
+            </a:pPr>
+            <a:r>
+              <a:rPr lang="en-US" sz="1200" dirty="0">
+                <a:solidFill>
+                  <a:srgbClr val="EFEFEF"/>
+                </a:solidFill>
+                <a:latin typeface="Menlo" pitchFamily="34" charset="0"/>
+                <a:ea typeface="Menlo" pitchFamily="34" charset="-122"/>
+                <a:cs typeface="Menlo" pitchFamily="34" charset="-120"/>
+              </a:rPr>
+              <a:t> </a:t>
+            </a:r>
+            <a:pPr indent="0" marL="0">
+              <a:buNone/>
+            </a:pPr>
+            <a:r>
+              <a:rPr lang="en-US" sz="1200" dirty="0">
+                <a:solidFill>
+                  <a:srgbClr val="EFEFEF"/>
+                </a:solidFill>
+                <a:latin typeface="Menlo" pitchFamily="34" charset="0"/>
+                <a:ea typeface="Menlo" pitchFamily="34" charset="-122"/>
+                <a:cs typeface="Menlo" pitchFamily="34" charset="-120"/>
+              </a:rPr>
+              <a:t>playwright</a:t>
+            </a:r>
+            <a:pPr indent="0" marL="0">
+              <a:buNone/>
+            </a:pPr>
+            <a:r>
+              <a:rPr lang="en-US" sz="1200" dirty="0">
+                <a:solidFill>
+                  <a:srgbClr val="EFEFEF"/>
+                </a:solidFill>
+                <a:latin typeface="Menlo" pitchFamily="34" charset="0"/>
+                <a:ea typeface="Menlo" pitchFamily="34" charset="-122"/>
+                <a:cs typeface="Menlo" pitchFamily="34" charset="-120"/>
+              </a:rPr>
+              <a:t> </a:t>
+            </a:r>
+            <a:pPr indent="0" marL="0">
+              <a:buNone/>
+            </a:pPr>
+            <a:r>
+              <a:rPr lang="en-US" sz="1200" dirty="0">
+                <a:solidFill>
+                  <a:srgbClr val="EFEFEF"/>
+                </a:solidFill>
+                <a:latin typeface="Menlo" pitchFamily="34" charset="0"/>
+                <a:ea typeface="Menlo" pitchFamily="34" charset="-122"/>
+                <a:cs typeface="Menlo" pitchFamily="34" charset="-120"/>
+              </a:rPr>
+              <a:t>show-trace</a:t>
+            </a:r>
+            <a:pPr indent="0" marL="0">
+              <a:buNone/>
+            </a:pPr>
+            <a:r>
+              <a:rPr lang="en-US" sz="1200" dirty="0">
+                <a:solidFill>
+                  <a:srgbClr val="EFEFEF"/>
+                </a:solidFill>
+                <a:latin typeface="Menlo" pitchFamily="34" charset="0"/>
+                <a:ea typeface="Menlo" pitchFamily="34" charset="-122"/>
+                <a:cs typeface="Menlo" pitchFamily="34" charset="-120"/>
+              </a:rPr>
+              <a:t> </a:t>
+            </a:r>
+            <a:pPr indent="0" marL="0">
+              <a:buNone/>
+            </a:pPr>
+            <a:r>
+              <a:rPr lang="en-US" sz="1200" dirty="0">
+                <a:solidFill>
+                  <a:srgbClr val="F0C15A"/>
+                </a:solidFill>
+                <a:latin typeface="Menlo" pitchFamily="34" charset="0"/>
+                <a:ea typeface="Menlo" pitchFamily="34" charset="-122"/>
+                <a:cs typeface="Menlo" pitchFamily="34" charset="-120"/>
+              </a:rPr>
+              <a:t>trace.zip</a:t>
+            </a:r>
+            <a:endParaRPr lang="en-US" sz="1200" dirty="0"/>
+          </a:p>
+        </p:txBody>
+      </p:sp>
+      <p:sp>
+        <p:nvSpPr>
+          <p:cNvPr id="26" name="Shape 24"/>
+          <p:cNvSpPr/>
+          <p:nvPr/>
+        </p:nvSpPr>
+        <p:spPr>
+          <a:xfrm>
+            <a:off x="457200" y="6446520"/>
+            <a:ext cx="11277295" cy="0"/>
+          </a:xfrm>
+          <a:prstGeom prst="line">
+            <a:avLst/>
+          </a:prstGeom>
+          <a:noFill/>
+          <a:ln w="12700">
+            <a:solidFill>
+              <a:srgbClr val="D7D7D7"/>
+            </a:solidFill>
+            <a:prstDash val="solid"/>
+          </a:ln>
+        </p:spPr>
+      </p:sp>
+      <p:sp>
+        <p:nvSpPr>
+          <p:cNvPr id="27" name="Text 25"/>
+          <p:cNvSpPr/>
+          <p:nvPr/>
+        </p:nvSpPr>
+        <p:spPr>
+          <a:xfrm>
+            <a:off x="457200" y="6473952"/>
+            <a:ext cx="5486400" cy="182880"/>
+          </a:xfrm>
+          <a:prstGeom prst="rect">
+            <a:avLst/>
+          </a:prstGeom>
+          <a:noFill/>
+          <a:ln/>
+        </p:spPr>
+        <p:txBody>
+          <a:bodyPr wrap="square" rtlCol="0" anchor="ctr"/>
+          <a:lstStyle/>
+          <a:p>
+            <a:pPr indent="0" marL="0">
+              <a:buNone/>
+            </a:pPr>
+            <a:r>
+              <a:rPr lang="en-US" sz="1000" dirty="0">
+                <a:solidFill>
+                  <a:srgbClr val="6B6B6B"/>
+                </a:solidFill>
+                <a:latin typeface="Barlow" pitchFamily="34" charset="0"/>
+                <a:ea typeface="Barlow" pitchFamily="34" charset="-122"/>
+                <a:cs typeface="Barlow" pitchFamily="34" charset="-120"/>
+              </a:rPr>
+              <a:t>sourcier.uk / CI failures should be inspectable</a:t>
+            </a:r>
+            <a:endParaRPr lang="en-US" sz="1000" dirty="0"/>
+          </a:p>
+        </p:txBody>
+      </p:sp>
+      <p:sp>
+        <p:nvSpPr>
+          <p:cNvPr id="25" name="Slide Number Placeholder 0"/>
+          <p:cNvSpPr>
+            <a:spLocks noGrp="1"/>
+          </p:cNvSpPr>
+          <p:nvPr>
+            <p:ph type="sldNum" sz="quarter" idx="4294967295"/>
+          </p:nvPr>
+        </p:nvSpPr>
+        <p:spPr>
+          <a:xfrm>
+            <a:off x="10744200" y="6473952"/>
+            <a:ext cx="1005840" cy="182880"/>
+          </a:xfrm>
+          <a:prstGeom prst="rect">
+            <a:avLst/>
+          </a:prstGeom>
+          <a:extLst>
+            <a:ext uri="{C572A759-6A51-4108-AA02-DFA0A04FC94B}">
+              <ma14:wrappingTextBoxFlag xmlns:ma14="http://schemas.microsoft.com/office/mac/drawingml/2011/main" val="0"/>
+            </a:ext>
+          </a:extLst>
+        </p:spPr>
+        <p:txBody>
+          <a:bodyPr lIns="0" tIns="0" rIns="0" bIns="0"/>
+          <a:lstStyle>
+            <a:lvl1pPr>
+              <a:defRPr sz="1000">
+                <a:solidFill>
+                  <a:srgbClr val="6B6B6B"/>
+                </a:solidFill>
+                <a:latin typeface="Barlow"/>
+                <a:ea typeface="Barlow"/>
+                <a:cs typeface="Barlow"/>
+              </a:defRPr>
+            </a:lvl1pPr>
+          </a:lstStyle>
+          <a:p>
+            <a:pPr algn="r"/>
+            <a:fld id="{F7021451-1387-4CA6-816F-3879F97B5CBC}" type="slidenum">
+              <a:rPr b="0" lang="en-US"/>
+              <a:t>13</a:t>
+            </a:fld>
+            <a:endParaRPr lang="en-US"/>
+          </a:p>
+        </p:txBody>
+      </p:sp>
+    </p:spTree>
+  </p:cSld>
+  <p:clrMapOvr>
+    <a:masterClrMapping/>
+  </p:clrMapOvr>
+</p:sld>
+</file>
+
+<file path=ppt/slides/slide14.xml><?xml version="1.0" encoding="utf-8"?>
+<p:sld xmlns:a="http://schemas.openxmlformats.org/drawingml/2006/main" xmlns:r="http://schemas.openxmlformats.org/officeDocument/2006/relationships" xmlns:p="http://schemas.openxmlformats.org/presentationml/2006/main">
+  <p:cSld name="Slide 14">
+    <p:bg>
+      <p:bgPr>
+        <a:solidFill>
+          <a:srgbClr val="F6ECE1"/>
+        </a:solidFill>
+      </p:bgPr>
+    </p:bg>
+    <p:spTree>
+      <p:nvGrpSpPr>
+        <p:cNvPr id="1" name=""/>
+        <p:cNvGrpSpPr/>
+        <p:nvPr/>
+      </p:nvGrpSpPr>
+      <p:grpSpPr>
+        <a:xfrm>
+          <a:off x="0" y="0"/>
+          <a:ext cx="0" cy="0"/>
+          <a:chOff x="0" y="0"/>
+          <a:chExt cx="0" cy="0"/>
+        </a:xfrm>
+      </p:grpSpPr>
+      <p:sp>
+        <p:nvSpPr>
+          <p:cNvPr id="2" name="Shape 0"/>
+          <p:cNvSpPr/>
+          <p:nvPr/>
+        </p:nvSpPr>
+        <p:spPr>
+          <a:xfrm>
+            <a:off x="-1920240" y="-1097280"/>
+            <a:ext cx="5394960" cy="4480560"/>
+          </a:xfrm>
+          <a:prstGeom prst="roundRect">
+            <a:avLst>
+              <a:gd name="adj" fmla="val 6122"/>
+            </a:avLst>
+          </a:prstGeom>
+          <a:solidFill>
+            <a:srgbClr val="E8006A">
+              <a:alpha val="8000"/>
+            </a:srgbClr>
+          </a:solidFill>
+          <a:ln w="12700">
+            <a:solidFill>
+              <a:srgbClr val="E8006A">
+                <a:alpha val="0"/>
+              </a:srgbClr>
+            </a:solidFill>
+            <a:prstDash val="solid"/>
+          </a:ln>
+        </p:spPr>
+      </p:sp>
+      <p:sp>
+        <p:nvSpPr>
+          <p:cNvPr id="3" name="Shape 1"/>
+          <p:cNvSpPr/>
+          <p:nvPr/>
+        </p:nvSpPr>
+        <p:spPr>
+          <a:xfrm>
+            <a:off x="8412480" y="-1371600"/>
+            <a:ext cx="5669280" cy="5120640"/>
+          </a:xfrm>
+          <a:prstGeom prst="roundRect">
+            <a:avLst>
+              <a:gd name="adj" fmla="val 5357"/>
+            </a:avLst>
+          </a:prstGeom>
+          <a:solidFill>
+            <a:srgbClr val="2A7D5B">
+              <a:alpha val="10000"/>
+            </a:srgbClr>
+          </a:solidFill>
+          <a:ln w="12700">
+            <a:solidFill>
+              <a:srgbClr val="2A7D5B">
+                <a:alpha val="0"/>
+              </a:srgbClr>
+            </a:solidFill>
+            <a:prstDash val="solid"/>
+          </a:ln>
+        </p:spPr>
+      </p:sp>
+      <p:sp>
+        <p:nvSpPr>
+          <p:cNvPr id="4" name="Shape 2"/>
+          <p:cNvSpPr/>
+          <p:nvPr/>
+        </p:nvSpPr>
+        <p:spPr>
+          <a:xfrm>
+            <a:off x="6492240" y="5029200"/>
+            <a:ext cx="7406640" cy="3108960"/>
+          </a:xfrm>
+          <a:prstGeom prst="roundRect">
+            <a:avLst>
+              <a:gd name="adj" fmla="val 8824"/>
+            </a:avLst>
+          </a:prstGeom>
+          <a:solidFill>
+            <a:srgbClr val="E5D8C9">
+              <a:alpha val="76000"/>
+            </a:srgbClr>
+          </a:solidFill>
+          <a:ln w="12700">
+            <a:solidFill>
+              <a:srgbClr val="E5D8C9">
+                <a:alpha val="0"/>
+              </a:srgbClr>
+            </a:solidFill>
+            <a:prstDash val="solid"/>
+          </a:ln>
+        </p:spPr>
+      </p:sp>
+      <p:sp>
+        <p:nvSpPr>
+          <p:cNvPr id="5" name="Shape 3"/>
+          <p:cNvSpPr/>
+          <p:nvPr/>
+        </p:nvSpPr>
+        <p:spPr>
+          <a:xfrm>
+            <a:off x="0" y="0"/>
+            <a:ext cx="12191695" cy="658368"/>
+          </a:xfrm>
+          <a:prstGeom prst="rect">
+            <a:avLst/>
+          </a:prstGeom>
+          <a:solidFill>
+            <a:srgbClr val="101410"/>
+          </a:solidFill>
+          <a:ln w="12700">
+            <a:solidFill>
+              <a:srgbClr val="101410"/>
+            </a:solidFill>
+            <a:prstDash val="solid"/>
+          </a:ln>
+        </p:spPr>
+      </p:sp>
+      <p:sp>
+        <p:nvSpPr>
+          <p:cNvPr id="6" name="Shape 4"/>
+          <p:cNvSpPr/>
+          <p:nvPr/>
+        </p:nvSpPr>
+        <p:spPr>
+          <a:xfrm>
+            <a:off x="0" y="658368"/>
+            <a:ext cx="12191695" cy="0"/>
+          </a:xfrm>
+          <a:prstGeom prst="line">
+            <a:avLst/>
+          </a:prstGeom>
+          <a:noFill/>
+          <a:ln w="12700">
+            <a:solidFill>
+              <a:srgbClr val="E8006A"/>
+            </a:solidFill>
+            <a:prstDash val="solid"/>
+          </a:ln>
+        </p:spPr>
+      </p:sp>
+      <p:sp>
+        <p:nvSpPr>
+          <p:cNvPr id="7" name="Shape 5"/>
+          <p:cNvSpPr/>
+          <p:nvPr/>
+        </p:nvSpPr>
+        <p:spPr>
+          <a:xfrm>
+            <a:off x="0" y="621792"/>
+            <a:ext cx="12191695" cy="0"/>
+          </a:xfrm>
+          <a:prstGeom prst="line">
+            <a:avLst/>
+          </a:prstGeom>
+          <a:noFill/>
+          <a:ln w="12700">
+            <a:solidFill>
+              <a:srgbClr val="2A7D5B">
+                <a:alpha val="76000"/>
+              </a:srgbClr>
+            </a:solidFill>
+            <a:prstDash val="solid"/>
+          </a:ln>
+        </p:spPr>
+      </p:sp>
+      <p:sp>
+        <p:nvSpPr>
+          <p:cNvPr id="8" name="Text 6"/>
+          <p:cNvSpPr/>
+          <p:nvPr/>
+        </p:nvSpPr>
+        <p:spPr>
+          <a:xfrm>
+            <a:off x="457200" y="155448"/>
+            <a:ext cx="2560320" cy="274320"/>
+          </a:xfrm>
+          <a:prstGeom prst="rect">
+            <a:avLst/>
+          </a:prstGeom>
+          <a:noFill/>
+          <a:ln/>
+        </p:spPr>
+        <p:txBody>
+          <a:bodyPr wrap="square" rtlCol="0" anchor="ctr"/>
+          <a:lstStyle/>
+          <a:p>
+            <a:pPr indent="0" marL="0">
+              <a:buNone/>
+            </a:pPr>
+            <a:r>
+              <a:rPr lang="en-US" sz="1800" b="1" dirty="0">
+                <a:solidFill>
+                  <a:srgbClr val="FFFFFF"/>
+                </a:solidFill>
+                <a:latin typeface="Barlow Condensed" pitchFamily="34" charset="0"/>
+                <a:ea typeface="Barlow Condensed" pitchFamily="34" charset="-122"/>
+                <a:cs typeface="Barlow Condensed" pitchFamily="34" charset="-120"/>
+              </a:rPr>
+              <a:t>SOURCIER</a:t>
+            </a:r>
+            <a:endParaRPr lang="en-US" sz="1800" dirty="0"/>
+          </a:p>
+        </p:txBody>
+      </p:sp>
+      <p:sp>
+        <p:nvSpPr>
+          <p:cNvPr id="9" name="Text 7"/>
+          <p:cNvSpPr/>
+          <p:nvPr/>
+        </p:nvSpPr>
+        <p:spPr>
+          <a:xfrm>
+            <a:off x="457200" y="914400"/>
+            <a:ext cx="8138160" cy="640080"/>
+          </a:xfrm>
+          <a:prstGeom prst="rect">
+            <a:avLst/>
+          </a:prstGeom>
+          <a:noFill/>
+          <a:ln/>
+        </p:spPr>
+        <p:txBody>
+          <a:bodyPr wrap="square" rtlCol="0" anchor="ctr">
+            <a:normAutofit/>
+          </a:bodyPr>
+          <a:lstStyle/>
+          <a:p>
+            <a:pPr indent="0" marL="0">
+              <a:buNone/>
+            </a:pPr>
+            <a:r>
+              <a:rPr lang="en-US" sz="3200" b="1" dirty="0">
+                <a:solidFill>
+                  <a:srgbClr val="0F0F0F"/>
+                </a:solidFill>
+                <a:latin typeface="Barlow Condensed" pitchFamily="34" charset="0"/>
+                <a:ea typeface="Barlow Condensed" pitchFamily="34" charset="-122"/>
+                <a:cs typeface="Barlow Condensed" pitchFamily="34" charset="-120"/>
+              </a:rPr>
+              <a:t>BEYOND TESTING</a:t>
+            </a:r>
+            <a:endParaRPr lang="en-US" sz="3200" dirty="0"/>
+          </a:p>
+        </p:txBody>
+      </p:sp>
+      <p:sp>
+        <p:nvSpPr>
+          <p:cNvPr id="10" name="Text 8"/>
+          <p:cNvSpPr/>
+          <p:nvPr/>
+        </p:nvSpPr>
+        <p:spPr>
+          <a:xfrm>
+            <a:off x="457200" y="1572768"/>
+            <a:ext cx="9509760" cy="347472"/>
+          </a:xfrm>
+          <a:prstGeom prst="rect">
+            <a:avLst/>
+          </a:prstGeom>
+          <a:noFill/>
+          <a:ln/>
+        </p:spPr>
+        <p:txBody>
+          <a:bodyPr wrap="square" rtlCol="0" anchor="t"/>
+          <a:lstStyle/>
+          <a:p>
+            <a:pPr indent="0" marL="0">
+              <a:buNone/>
+            </a:pPr>
+            <a:r>
+              <a:rPr lang="en-US" sz="1700" dirty="0">
+                <a:solidFill>
+                  <a:srgbClr val="6B6B6B"/>
+                </a:solidFill>
+                <a:latin typeface="Barlow" pitchFamily="34" charset="0"/>
+                <a:ea typeface="Barlow" pitchFamily="34" charset="-122"/>
+                <a:cs typeface="Barlow" pitchFamily="34" charset="-120"/>
+              </a:rPr>
+              <a:t>Playwright is a browser automation tool, not just a test runner.</a:t>
+            </a:r>
+            <a:endParaRPr lang="en-US" sz="1700" dirty="0"/>
+          </a:p>
+        </p:txBody>
+      </p:sp>
+      <p:sp>
+        <p:nvSpPr>
+          <p:cNvPr id="11" name="Shape 9"/>
+          <p:cNvSpPr/>
+          <p:nvPr/>
+        </p:nvSpPr>
+        <p:spPr>
+          <a:xfrm>
+            <a:off x="502920" y="1920240"/>
+            <a:ext cx="5440680" cy="2194560"/>
+          </a:xfrm>
+          <a:prstGeom prst="roundRect">
+            <a:avLst>
+              <a:gd name="adj" fmla="val 3333"/>
+            </a:avLst>
+          </a:prstGeom>
+          <a:solidFill>
+            <a:srgbClr val="FFFAF4"/>
+          </a:solidFill>
+          <a:ln w="12700">
+            <a:solidFill>
+              <a:srgbClr val="D8C5AE"/>
+            </a:solidFill>
+            <a:prstDash val="solid"/>
+          </a:ln>
+        </p:spPr>
+      </p:sp>
+      <p:sp>
+        <p:nvSpPr>
+          <p:cNvPr id="12" name="Text 10"/>
+          <p:cNvSpPr/>
+          <p:nvPr/>
+        </p:nvSpPr>
+        <p:spPr>
+          <a:xfrm>
+            <a:off x="731520" y="2084832"/>
+            <a:ext cx="4983480" cy="237744"/>
+          </a:xfrm>
+          <a:prstGeom prst="rect">
+            <a:avLst/>
+          </a:prstGeom>
+          <a:noFill/>
+          <a:ln/>
+        </p:spPr>
+        <p:txBody>
+          <a:bodyPr wrap="square" rtlCol="0" anchor="ctr"/>
+          <a:lstStyle/>
+          <a:p>
+            <a:pPr indent="0" marL="0">
+              <a:buNone/>
+            </a:pPr>
+            <a:r>
+              <a:rPr lang="en-US" sz="2000" b="1" dirty="0">
+                <a:solidFill>
+                  <a:srgbClr val="0F0F0F"/>
+                </a:solidFill>
+                <a:latin typeface="Barlow Condensed" pitchFamily="34" charset="0"/>
+                <a:ea typeface="Barlow Condensed" pitchFamily="34" charset="-122"/>
+                <a:cs typeface="Barlow Condensed" pitchFamily="34" charset="-120"/>
+              </a:rPr>
+              <a:t>Screenshots</a:t>
+            </a:r>
+            <a:endParaRPr lang="en-US" sz="2000" dirty="0"/>
+          </a:p>
+        </p:txBody>
+      </p:sp>
+      <p:sp>
+        <p:nvSpPr>
+          <p:cNvPr id="13" name="Text 11"/>
+          <p:cNvSpPr/>
+          <p:nvPr/>
+        </p:nvSpPr>
+        <p:spPr>
+          <a:xfrm>
+            <a:off x="731520" y="2395728"/>
+            <a:ext cx="4983480" cy="402336"/>
+          </a:xfrm>
+          <a:prstGeom prst="rect">
+            <a:avLst/>
+          </a:prstGeom>
+          <a:noFill/>
+          <a:ln/>
+        </p:spPr>
+        <p:txBody>
+          <a:bodyPr wrap="square" rtlCol="0" anchor="ctr">
+            <a:normAutofit/>
+          </a:bodyPr>
+          <a:lstStyle/>
+          <a:p>
+            <a:pPr indent="0" marL="0">
+              <a:buNone/>
+            </a:pPr>
+            <a:r>
+              <a:rPr lang="en-US" sz="1200" dirty="0">
+                <a:solidFill>
+                  <a:srgbClr val="6B6B6B"/>
+                </a:solidFill>
+                <a:latin typeface="Barlow" pitchFamily="34" charset="0"/>
+                <a:ea typeface="Barlow" pitchFamily="34" charset="-122"/>
+                <a:cs typeface="Barlow" pitchFamily="34" charset="-120"/>
+              </a:rPr>
+              <a:t>Screenshots for visual docs, design reviews, and release notes.</a:t>
+            </a:r>
+            <a:endParaRPr lang="en-US" sz="1200" dirty="0"/>
+          </a:p>
+        </p:txBody>
+      </p:sp>
+      <p:sp>
+        <p:nvSpPr>
+          <p:cNvPr id="14" name="Shape 12"/>
+          <p:cNvSpPr/>
+          <p:nvPr/>
+        </p:nvSpPr>
+        <p:spPr>
+          <a:xfrm>
+            <a:off x="731520" y="2880360"/>
+            <a:ext cx="4983480" cy="493776"/>
+          </a:xfrm>
+          <a:prstGeom prst="roundRect">
+            <a:avLst>
+              <a:gd name="adj" fmla="val 14815"/>
+            </a:avLst>
+          </a:prstGeom>
+          <a:solidFill>
+            <a:srgbClr val="121212"/>
+          </a:solidFill>
+          <a:ln w="12700">
+            <a:solidFill>
+              <a:srgbClr val="1F1F1F"/>
+            </a:solidFill>
+            <a:prstDash val="solid"/>
+          </a:ln>
+        </p:spPr>
+      </p:sp>
+      <p:sp>
+        <p:nvSpPr>
+          <p:cNvPr id="15" name="Text 13"/>
+          <p:cNvSpPr/>
+          <p:nvPr/>
+        </p:nvSpPr>
+        <p:spPr>
+          <a:xfrm>
+            <a:off x="960120" y="3044952"/>
+            <a:ext cx="4526280" cy="164592"/>
+          </a:xfrm>
+          <a:prstGeom prst="rect">
+            <a:avLst/>
+          </a:prstGeom>
+          <a:noFill/>
+          <a:ln/>
+        </p:spPr>
+        <p:txBody>
+          <a:bodyPr wrap="square" lIns="0" tIns="0" rIns="0" bIns="0" rtlCol="0" anchor="ctr">
+            <a:normAutofit/>
+          </a:bodyPr>
+          <a:lstStyle/>
+          <a:p>
+            <a:pPr indent="0" marL="0">
+              <a:buNone/>
+            </a:pPr>
+            <a:r>
+              <a:rPr lang="en-US" sz="1000" dirty="0">
+                <a:solidFill>
+                  <a:srgbClr val="F58AC1"/>
+                </a:solidFill>
+                <a:latin typeface="Menlo" pitchFamily="34" charset="0"/>
+                <a:ea typeface="Menlo" pitchFamily="34" charset="-122"/>
+                <a:cs typeface="Menlo" pitchFamily="34" charset="-120"/>
+              </a:rPr>
+              <a:t>await</a:t>
+            </a:r>
+            <a:pPr indent="0" marL="0">
+              <a:buNone/>
+            </a:pPr>
+            <a:r>
+              <a:rPr lang="en-US" sz="1000" dirty="0">
+                <a:solidFill>
+                  <a:srgbClr val="EFEFEF"/>
+                </a:solidFill>
+                <a:latin typeface="Menlo" pitchFamily="34" charset="0"/>
+                <a:ea typeface="Menlo" pitchFamily="34" charset="-122"/>
+                <a:cs typeface="Menlo" pitchFamily="34" charset="-120"/>
+              </a:rPr>
+              <a:t> page</a:t>
+            </a:r>
+            <a:pPr indent="0" marL="0">
+              <a:buNone/>
+            </a:pPr>
+            <a:r>
+              <a:rPr lang="en-US" sz="1000" dirty="0">
+                <a:solidFill>
+                  <a:srgbClr val="8BD6C0"/>
+                </a:solidFill>
+                <a:latin typeface="Menlo" pitchFamily="34" charset="0"/>
+                <a:ea typeface="Menlo" pitchFamily="34" charset="-122"/>
+                <a:cs typeface="Menlo" pitchFamily="34" charset="-120"/>
+              </a:rPr>
+              <a:t>.screenshot</a:t>
+            </a:r>
+            <a:pPr indent="0" marL="0">
+              <a:buNone/>
+            </a:pPr>
+            <a:r>
+              <a:rPr lang="en-US" sz="1000" dirty="0">
+                <a:solidFill>
+                  <a:srgbClr val="EFEFEF"/>
+                </a:solidFill>
+                <a:latin typeface="Menlo" pitchFamily="34" charset="0"/>
+                <a:ea typeface="Menlo" pitchFamily="34" charset="-122"/>
+                <a:cs typeface="Menlo" pitchFamily="34" charset="-120"/>
+              </a:rPr>
+              <a:t>({ path: </a:t>
+            </a:r>
+            <a:pPr indent="0" marL="0">
+              <a:buNone/>
+            </a:pPr>
+            <a:r>
+              <a:rPr lang="en-US" sz="1000" dirty="0">
+                <a:solidFill>
+                  <a:srgbClr val="F0C15A"/>
+                </a:solidFill>
+                <a:latin typeface="Menlo" pitchFamily="34" charset="0"/>
+                <a:ea typeface="Menlo" pitchFamily="34" charset="-122"/>
+                <a:cs typeface="Menlo" pitchFamily="34" charset="-120"/>
+              </a:rPr>
+              <a:t>"cover.png"</a:t>
+            </a:r>
+            <a:pPr indent="0" marL="0">
+              <a:buNone/>
+            </a:pPr>
+            <a:r>
+              <a:rPr lang="en-US" sz="1000" dirty="0">
+                <a:solidFill>
+                  <a:srgbClr val="EFEFEF"/>
+                </a:solidFill>
+                <a:latin typeface="Menlo" pitchFamily="34" charset="0"/>
+                <a:ea typeface="Menlo" pitchFamily="34" charset="-122"/>
+                <a:cs typeface="Menlo" pitchFamily="34" charset="-120"/>
+              </a:rPr>
+              <a:t>, fullPage: </a:t>
+            </a:r>
+            <a:pPr indent="0" marL="0">
+              <a:buNone/>
+            </a:pPr>
+            <a:r>
+              <a:rPr lang="en-US" sz="1000" dirty="0">
+                <a:solidFill>
+                  <a:srgbClr val="F4D27A"/>
+                </a:solidFill>
+                <a:latin typeface="Menlo" pitchFamily="34" charset="0"/>
+                <a:ea typeface="Menlo" pitchFamily="34" charset="-122"/>
+                <a:cs typeface="Menlo" pitchFamily="34" charset="-120"/>
+              </a:rPr>
+              <a:t>true</a:t>
+            </a:r>
+            <a:pPr indent="0" marL="0">
+              <a:buNone/>
+            </a:pPr>
+            <a:r>
+              <a:rPr lang="en-US" sz="1000" dirty="0">
+                <a:solidFill>
+                  <a:srgbClr val="EFEFEF"/>
+                </a:solidFill>
+                <a:latin typeface="Menlo" pitchFamily="34" charset="0"/>
+                <a:ea typeface="Menlo" pitchFamily="34" charset="-122"/>
+                <a:cs typeface="Menlo" pitchFamily="34" charset="-120"/>
+              </a:rPr>
+              <a:t> });</a:t>
+            </a:r>
+            <a:endParaRPr lang="en-US" sz="1000" dirty="0"/>
+          </a:p>
+        </p:txBody>
+      </p:sp>
+      <p:sp>
+        <p:nvSpPr>
+          <p:cNvPr id="16" name="Shape 14"/>
+          <p:cNvSpPr/>
+          <p:nvPr/>
+        </p:nvSpPr>
+        <p:spPr>
+          <a:xfrm>
+            <a:off x="6309360" y="1920240"/>
+            <a:ext cx="5440680" cy="2194560"/>
+          </a:xfrm>
+          <a:prstGeom prst="roundRect">
+            <a:avLst>
+              <a:gd name="adj" fmla="val 3333"/>
+            </a:avLst>
+          </a:prstGeom>
+          <a:solidFill>
+            <a:srgbClr val="FFFAF4"/>
+          </a:solidFill>
+          <a:ln w="12700">
+            <a:solidFill>
+              <a:srgbClr val="D8C5AE"/>
+            </a:solidFill>
+            <a:prstDash val="solid"/>
+          </a:ln>
+        </p:spPr>
+      </p:sp>
+      <p:sp>
+        <p:nvSpPr>
+          <p:cNvPr id="17" name="Text 15"/>
+          <p:cNvSpPr/>
+          <p:nvPr/>
+        </p:nvSpPr>
+        <p:spPr>
+          <a:xfrm>
+            <a:off x="6537960" y="2084832"/>
+            <a:ext cx="4983480" cy="237744"/>
+          </a:xfrm>
+          <a:prstGeom prst="rect">
+            <a:avLst/>
+          </a:prstGeom>
+          <a:noFill/>
+          <a:ln/>
+        </p:spPr>
+        <p:txBody>
+          <a:bodyPr wrap="square" rtlCol="0" anchor="ctr"/>
+          <a:lstStyle/>
+          <a:p>
+            <a:pPr indent="0" marL="0">
+              <a:buNone/>
+            </a:pPr>
+            <a:r>
+              <a:rPr lang="en-US" sz="2000" b="1" dirty="0">
+                <a:solidFill>
+                  <a:srgbClr val="0F0F0F"/>
+                </a:solidFill>
+                <a:latin typeface="Barlow Condensed" pitchFamily="34" charset="0"/>
+                <a:ea typeface="Barlow Condensed" pitchFamily="34" charset="-122"/>
+                <a:cs typeface="Barlow Condensed" pitchFamily="34" charset="-120"/>
+              </a:rPr>
+              <a:t>API Mocking</a:t>
+            </a:r>
+            <a:endParaRPr lang="en-US" sz="2000" dirty="0"/>
+          </a:p>
+        </p:txBody>
+      </p:sp>
+      <p:sp>
+        <p:nvSpPr>
+          <p:cNvPr id="18" name="Text 16"/>
+          <p:cNvSpPr/>
+          <p:nvPr/>
+        </p:nvSpPr>
+        <p:spPr>
+          <a:xfrm>
+            <a:off x="6537960" y="2395728"/>
+            <a:ext cx="4983480" cy="402336"/>
+          </a:xfrm>
+          <a:prstGeom prst="rect">
+            <a:avLst/>
+          </a:prstGeom>
+          <a:noFill/>
+          <a:ln/>
+        </p:spPr>
+        <p:txBody>
+          <a:bodyPr wrap="square" rtlCol="0" anchor="ctr">
+            <a:normAutofit/>
+          </a:bodyPr>
+          <a:lstStyle/>
+          <a:p>
+            <a:pPr indent="0" marL="0">
+              <a:buNone/>
+            </a:pPr>
+            <a:r>
+              <a:rPr lang="en-US" sz="1200" dirty="0">
+                <a:solidFill>
+                  <a:srgbClr val="6B6B6B"/>
+                </a:solidFill>
+                <a:latin typeface="Barlow" pitchFamily="34" charset="0"/>
+                <a:ea typeface="Barlow" pitchFamily="34" charset="-122"/>
+                <a:cs typeface="Barlow" pitchFamily="34" charset="-120"/>
+              </a:rPr>
+              <a:t>Intercept any request and return a fixture — test edge cases without a real backend.</a:t>
+            </a:r>
+            <a:endParaRPr lang="en-US" sz="1200" dirty="0"/>
+          </a:p>
+        </p:txBody>
+      </p:sp>
+      <p:sp>
+        <p:nvSpPr>
+          <p:cNvPr id="19" name="Shape 17"/>
+          <p:cNvSpPr/>
+          <p:nvPr/>
+        </p:nvSpPr>
+        <p:spPr>
+          <a:xfrm>
+            <a:off x="6537960" y="2880360"/>
+            <a:ext cx="4983480" cy="859536"/>
+          </a:xfrm>
+          <a:prstGeom prst="roundRect">
+            <a:avLst>
+              <a:gd name="adj" fmla="val 8511"/>
+            </a:avLst>
+          </a:prstGeom>
+          <a:solidFill>
+            <a:srgbClr val="121212"/>
+          </a:solidFill>
+          <a:ln w="12700">
+            <a:solidFill>
+              <a:srgbClr val="1F1F1F"/>
+            </a:solidFill>
+            <a:prstDash val="solid"/>
+          </a:ln>
+        </p:spPr>
+      </p:sp>
+      <p:sp>
+        <p:nvSpPr>
+          <p:cNvPr id="20" name="Text 18"/>
+          <p:cNvSpPr/>
+          <p:nvPr/>
+        </p:nvSpPr>
+        <p:spPr>
+          <a:xfrm>
+            <a:off x="6766560" y="3044952"/>
+            <a:ext cx="4526280" cy="164592"/>
+          </a:xfrm>
+          <a:prstGeom prst="rect">
+            <a:avLst/>
+          </a:prstGeom>
+          <a:noFill/>
+          <a:ln/>
+        </p:spPr>
+        <p:txBody>
+          <a:bodyPr wrap="square" lIns="0" tIns="0" rIns="0" bIns="0" rtlCol="0" anchor="ctr">
+            <a:normAutofit/>
+          </a:bodyPr>
+          <a:lstStyle/>
+          <a:p>
+            <a:pPr indent="0" marL="0">
+              <a:buNone/>
+            </a:pPr>
+            <a:r>
+              <a:rPr lang="en-US" sz="1000" dirty="0">
+                <a:solidFill>
+                  <a:srgbClr val="F58AC1"/>
+                </a:solidFill>
+                <a:latin typeface="Menlo" pitchFamily="34" charset="0"/>
+                <a:ea typeface="Menlo" pitchFamily="34" charset="-122"/>
+                <a:cs typeface="Menlo" pitchFamily="34" charset="-120"/>
+              </a:rPr>
+              <a:t>await</a:t>
+            </a:r>
+            <a:pPr indent="0" marL="0">
+              <a:buNone/>
+            </a:pPr>
+            <a:r>
+              <a:rPr lang="en-US" sz="1000" dirty="0">
+                <a:solidFill>
+                  <a:srgbClr val="EFEFEF"/>
+                </a:solidFill>
+                <a:latin typeface="Menlo" pitchFamily="34" charset="0"/>
+                <a:ea typeface="Menlo" pitchFamily="34" charset="-122"/>
+                <a:cs typeface="Menlo" pitchFamily="34" charset="-120"/>
+              </a:rPr>
+              <a:t> page</a:t>
+            </a:r>
+            <a:pPr indent="0" marL="0">
+              <a:buNone/>
+            </a:pPr>
+            <a:r>
+              <a:rPr lang="en-US" sz="1000" dirty="0">
+                <a:solidFill>
+                  <a:srgbClr val="8BD6C0"/>
+                </a:solidFill>
+                <a:latin typeface="Menlo" pitchFamily="34" charset="0"/>
+                <a:ea typeface="Menlo" pitchFamily="34" charset="-122"/>
+                <a:cs typeface="Menlo" pitchFamily="34" charset="-120"/>
+              </a:rPr>
+              <a:t>.route</a:t>
+            </a:r>
+            <a:pPr indent="0" marL="0">
+              <a:buNone/>
+            </a:pPr>
+            <a:r>
+              <a:rPr lang="en-US" sz="1000" dirty="0">
+                <a:solidFill>
+                  <a:srgbClr val="EFEFEF"/>
+                </a:solidFill>
+                <a:latin typeface="Menlo" pitchFamily="34" charset="0"/>
+                <a:ea typeface="Menlo" pitchFamily="34" charset="-122"/>
+                <a:cs typeface="Menlo" pitchFamily="34" charset="-120"/>
+              </a:rPr>
+              <a:t>(</a:t>
+            </a:r>
+            <a:pPr indent="0" marL="0">
+              <a:buNone/>
+            </a:pPr>
+            <a:r>
+              <a:rPr lang="en-US" sz="1000" dirty="0">
+                <a:solidFill>
+                  <a:srgbClr val="F0C15A"/>
+                </a:solidFill>
+                <a:latin typeface="Menlo" pitchFamily="34" charset="0"/>
+                <a:ea typeface="Menlo" pitchFamily="34" charset="-122"/>
+                <a:cs typeface="Menlo" pitchFamily="34" charset="-120"/>
+              </a:rPr>
+              <a:t>"**/api/orders"</a:t>
+            </a:r>
+            <a:pPr indent="0" marL="0">
+              <a:buNone/>
+            </a:pPr>
+            <a:r>
+              <a:rPr lang="en-US" sz="1000" dirty="0">
+                <a:solidFill>
+                  <a:srgbClr val="EFEFEF"/>
+                </a:solidFill>
+                <a:latin typeface="Menlo" pitchFamily="34" charset="0"/>
+                <a:ea typeface="Menlo" pitchFamily="34" charset="-122"/>
+                <a:cs typeface="Menlo" pitchFamily="34" charset="-120"/>
+              </a:rPr>
+              <a:t>, (route) =&gt;</a:t>
+            </a:r>
+            <a:endParaRPr lang="en-US" sz="1000" dirty="0"/>
+          </a:p>
+        </p:txBody>
+      </p:sp>
+      <p:sp>
+        <p:nvSpPr>
+          <p:cNvPr id="21" name="Text 19"/>
+          <p:cNvSpPr/>
+          <p:nvPr/>
+        </p:nvSpPr>
+        <p:spPr>
+          <a:xfrm>
+            <a:off x="6766560" y="3227832"/>
+            <a:ext cx="4526280" cy="164592"/>
+          </a:xfrm>
+          <a:prstGeom prst="rect">
+            <a:avLst/>
+          </a:prstGeom>
+          <a:noFill/>
+          <a:ln/>
+        </p:spPr>
+        <p:txBody>
+          <a:bodyPr wrap="square" lIns="0" tIns="0" rIns="0" bIns="0" rtlCol="0" anchor="ctr">
+            <a:normAutofit/>
+          </a:bodyPr>
+          <a:lstStyle/>
+          <a:p>
+            <a:pPr indent="0" marL="0">
+              <a:buNone/>
+            </a:pPr>
+            <a:r>
+              <a:rPr lang="en-US" sz="1000" dirty="0">
+                <a:solidFill>
+                  <a:srgbClr val="EFEFEF"/>
+                </a:solidFill>
+                <a:latin typeface="Menlo" pitchFamily="34" charset="0"/>
+                <a:ea typeface="Menlo" pitchFamily="34" charset="-122"/>
+                <a:cs typeface="Menlo" pitchFamily="34" charset="-120"/>
+              </a:rPr>
+              <a:t>  route</a:t>
+            </a:r>
+            <a:pPr indent="0" marL="0">
+              <a:buNone/>
+            </a:pPr>
+            <a:r>
+              <a:rPr lang="en-US" sz="1000" dirty="0">
+                <a:solidFill>
+                  <a:srgbClr val="8BD6C0"/>
+                </a:solidFill>
+                <a:latin typeface="Menlo" pitchFamily="34" charset="0"/>
+                <a:ea typeface="Menlo" pitchFamily="34" charset="-122"/>
+                <a:cs typeface="Menlo" pitchFamily="34" charset="-120"/>
+              </a:rPr>
+              <a:t>.fulfill</a:t>
+            </a:r>
+            <a:pPr indent="0" marL="0">
+              <a:buNone/>
+            </a:pPr>
+            <a:r>
+              <a:rPr lang="en-US" sz="1000" dirty="0">
+                <a:solidFill>
+                  <a:srgbClr val="EFEFEF"/>
+                </a:solidFill>
+                <a:latin typeface="Menlo" pitchFamily="34" charset="0"/>
+                <a:ea typeface="Menlo" pitchFamily="34" charset="-122"/>
+                <a:cs typeface="Menlo" pitchFamily="34" charset="-120"/>
+              </a:rPr>
+              <a:t>({ json: { status: </a:t>
+            </a:r>
+            <a:pPr indent="0" marL="0">
+              <a:buNone/>
+            </a:pPr>
+            <a:r>
+              <a:rPr lang="en-US" sz="1000" dirty="0">
+                <a:solidFill>
+                  <a:srgbClr val="F0C15A"/>
+                </a:solidFill>
+                <a:latin typeface="Menlo" pitchFamily="34" charset="0"/>
+                <a:ea typeface="Menlo" pitchFamily="34" charset="-122"/>
+                <a:cs typeface="Menlo" pitchFamily="34" charset="-120"/>
+              </a:rPr>
+              <a:t>"confirmed"</a:t>
+            </a:r>
+            <a:pPr indent="0" marL="0">
+              <a:buNone/>
+            </a:pPr>
+            <a:r>
+              <a:rPr lang="en-US" sz="1000" dirty="0">
+                <a:solidFill>
+                  <a:srgbClr val="EFEFEF"/>
+                </a:solidFill>
+                <a:latin typeface="Menlo" pitchFamily="34" charset="0"/>
+                <a:ea typeface="Menlo" pitchFamily="34" charset="-122"/>
+                <a:cs typeface="Menlo" pitchFamily="34" charset="-120"/>
+              </a:rPr>
+              <a:t> } })</a:t>
+            </a:r>
+            <a:endParaRPr lang="en-US" sz="1000" dirty="0"/>
+          </a:p>
+        </p:txBody>
+      </p:sp>
+      <p:sp>
+        <p:nvSpPr>
+          <p:cNvPr id="22" name="Text 20"/>
+          <p:cNvSpPr/>
+          <p:nvPr/>
+        </p:nvSpPr>
+        <p:spPr>
+          <a:xfrm>
+            <a:off x="6766560" y="3410712"/>
+            <a:ext cx="4526280" cy="164592"/>
+          </a:xfrm>
+          <a:prstGeom prst="rect">
+            <a:avLst/>
+          </a:prstGeom>
+          <a:noFill/>
+          <a:ln/>
+        </p:spPr>
+        <p:txBody>
+          <a:bodyPr wrap="square" lIns="0" tIns="0" rIns="0" bIns="0" rtlCol="0" anchor="ctr">
+            <a:normAutofit/>
+          </a:bodyPr>
+          <a:lstStyle/>
+          <a:p>
+            <a:pPr indent="0" marL="0">
+              <a:buNone/>
+            </a:pPr>
+            <a:r>
+              <a:rPr lang="en-US" sz="1000" dirty="0">
+                <a:solidFill>
+                  <a:srgbClr val="EFEFEF"/>
+                </a:solidFill>
+                <a:latin typeface="Menlo" pitchFamily="34" charset="0"/>
+                <a:ea typeface="Menlo" pitchFamily="34" charset="-122"/>
+                <a:cs typeface="Menlo" pitchFamily="34" charset="-120"/>
+              </a:rPr>
+              <a:t>);</a:t>
+            </a:r>
+            <a:endParaRPr lang="en-US" sz="1000" dirty="0"/>
+          </a:p>
+        </p:txBody>
+      </p:sp>
+      <p:sp>
+        <p:nvSpPr>
+          <p:cNvPr id="23" name="Shape 21"/>
+          <p:cNvSpPr/>
+          <p:nvPr/>
+        </p:nvSpPr>
+        <p:spPr>
+          <a:xfrm>
+            <a:off x="502920" y="4251960"/>
+            <a:ext cx="5440680" cy="2194560"/>
+          </a:xfrm>
+          <a:prstGeom prst="roundRect">
+            <a:avLst>
+              <a:gd name="adj" fmla="val 3333"/>
+            </a:avLst>
+          </a:prstGeom>
+          <a:solidFill>
+            <a:srgbClr val="FFFAF4"/>
+          </a:solidFill>
+          <a:ln w="12700">
+            <a:solidFill>
+              <a:srgbClr val="D8C5AE"/>
+            </a:solidFill>
+            <a:prstDash val="solid"/>
+          </a:ln>
+        </p:spPr>
+      </p:sp>
+      <p:sp>
+        <p:nvSpPr>
+          <p:cNvPr id="24" name="Text 22"/>
+          <p:cNvSpPr/>
+          <p:nvPr/>
+        </p:nvSpPr>
+        <p:spPr>
+          <a:xfrm>
+            <a:off x="731520" y="4416552"/>
+            <a:ext cx="4983480" cy="237744"/>
+          </a:xfrm>
+          <a:prstGeom prst="rect">
+            <a:avLst/>
+          </a:prstGeom>
+          <a:noFill/>
+          <a:ln/>
+        </p:spPr>
+        <p:txBody>
+          <a:bodyPr wrap="square" rtlCol="0" anchor="ctr"/>
+          <a:lstStyle/>
+          <a:p>
+            <a:pPr indent="0" marL="0">
+              <a:buNone/>
+            </a:pPr>
+            <a:r>
+              <a:rPr lang="en-US" sz="2000" b="1" dirty="0">
+                <a:solidFill>
+                  <a:srgbClr val="0F0F0F"/>
+                </a:solidFill>
+                <a:latin typeface="Barlow Condensed" pitchFamily="34" charset="0"/>
+                <a:ea typeface="Barlow Condensed" pitchFamily="34" charset="-122"/>
+                <a:cs typeface="Barlow Condensed" pitchFamily="34" charset="-120"/>
+              </a:rPr>
+              <a:t>PDF Generation</a:t>
+            </a:r>
+            <a:endParaRPr lang="en-US" sz="2000" dirty="0"/>
+          </a:p>
+        </p:txBody>
+      </p:sp>
+      <p:sp>
+        <p:nvSpPr>
+          <p:cNvPr id="25" name="Text 23"/>
+          <p:cNvSpPr/>
+          <p:nvPr/>
+        </p:nvSpPr>
+        <p:spPr>
+          <a:xfrm>
+            <a:off x="731520" y="4727448"/>
+            <a:ext cx="4983480" cy="402336"/>
+          </a:xfrm>
+          <a:prstGeom prst="rect">
+            <a:avLst/>
+          </a:prstGeom>
+          <a:noFill/>
+          <a:ln/>
+        </p:spPr>
+        <p:txBody>
+          <a:bodyPr wrap="square" rtlCol="0" anchor="ctr">
+            <a:normAutofit/>
+          </a:bodyPr>
+          <a:lstStyle/>
+          <a:p>
+            <a:pPr indent="0" marL="0">
+              <a:buNone/>
+            </a:pPr>
+            <a:r>
+              <a:rPr lang="en-US" sz="1200" dirty="0">
+                <a:solidFill>
+                  <a:srgbClr val="6B6B6B"/>
+                </a:solidFill>
+                <a:latin typeface="Barlow" pitchFamily="34" charset="0"/>
+                <a:ea typeface="Barlow" pitchFamily="34" charset="-122"/>
+                <a:cs typeface="Barlow" pitchFamily="34" charset="-120"/>
+              </a:rPr>
+              <a:t>Render any page to PDF with print CSS — invoices, reports, print layouts.</a:t>
+            </a:r>
+            <a:endParaRPr lang="en-US" sz="1200" dirty="0"/>
+          </a:p>
+        </p:txBody>
+      </p:sp>
+      <p:sp>
+        <p:nvSpPr>
+          <p:cNvPr id="26" name="Shape 24"/>
+          <p:cNvSpPr/>
+          <p:nvPr/>
+        </p:nvSpPr>
+        <p:spPr>
+          <a:xfrm>
+            <a:off x="731520" y="5212080"/>
+            <a:ext cx="4983480" cy="493776"/>
+          </a:xfrm>
+          <a:prstGeom prst="roundRect">
+            <a:avLst>
+              <a:gd name="adj" fmla="val 14815"/>
+            </a:avLst>
+          </a:prstGeom>
+          <a:solidFill>
+            <a:srgbClr val="121212"/>
+          </a:solidFill>
+          <a:ln w="12700">
+            <a:solidFill>
+              <a:srgbClr val="1F1F1F"/>
+            </a:solidFill>
+            <a:prstDash val="solid"/>
+          </a:ln>
+        </p:spPr>
+      </p:sp>
+      <p:sp>
+        <p:nvSpPr>
+          <p:cNvPr id="27" name="Text 25"/>
+          <p:cNvSpPr/>
+          <p:nvPr/>
+        </p:nvSpPr>
+        <p:spPr>
+          <a:xfrm>
+            <a:off x="960120" y="5376672"/>
+            <a:ext cx="4526280" cy="164592"/>
+          </a:xfrm>
+          <a:prstGeom prst="rect">
+            <a:avLst/>
+          </a:prstGeom>
+          <a:noFill/>
+          <a:ln/>
+        </p:spPr>
+        <p:txBody>
+          <a:bodyPr wrap="square" lIns="0" tIns="0" rIns="0" bIns="0" rtlCol="0" anchor="ctr">
+            <a:normAutofit/>
+          </a:bodyPr>
+          <a:lstStyle/>
+          <a:p>
+            <a:pPr indent="0" marL="0">
+              <a:buNone/>
+            </a:pPr>
+            <a:r>
+              <a:rPr lang="en-US" sz="1000" dirty="0">
+                <a:solidFill>
+                  <a:srgbClr val="F58AC1"/>
+                </a:solidFill>
+                <a:latin typeface="Menlo" pitchFamily="34" charset="0"/>
+                <a:ea typeface="Menlo" pitchFamily="34" charset="-122"/>
+                <a:cs typeface="Menlo" pitchFamily="34" charset="-120"/>
+              </a:rPr>
+              <a:t>await</a:t>
+            </a:r>
+            <a:pPr indent="0" marL="0">
+              <a:buNone/>
+            </a:pPr>
+            <a:r>
+              <a:rPr lang="en-US" sz="1000" dirty="0">
+                <a:solidFill>
+                  <a:srgbClr val="EFEFEF"/>
+                </a:solidFill>
+                <a:latin typeface="Menlo" pitchFamily="34" charset="0"/>
+                <a:ea typeface="Menlo" pitchFamily="34" charset="-122"/>
+                <a:cs typeface="Menlo" pitchFamily="34" charset="-120"/>
+              </a:rPr>
+              <a:t> page</a:t>
+            </a:r>
+            <a:pPr indent="0" marL="0">
+              <a:buNone/>
+            </a:pPr>
+            <a:r>
+              <a:rPr lang="en-US" sz="1000" dirty="0">
+                <a:solidFill>
+                  <a:srgbClr val="8BD6C0"/>
+                </a:solidFill>
+                <a:latin typeface="Menlo" pitchFamily="34" charset="0"/>
+                <a:ea typeface="Menlo" pitchFamily="34" charset="-122"/>
+                <a:cs typeface="Menlo" pitchFamily="34" charset="-120"/>
+              </a:rPr>
+              <a:t>.pdf</a:t>
+            </a:r>
+            <a:pPr indent="0" marL="0">
+              <a:buNone/>
+            </a:pPr>
+            <a:r>
+              <a:rPr lang="en-US" sz="1000" dirty="0">
+                <a:solidFill>
+                  <a:srgbClr val="EFEFEF"/>
+                </a:solidFill>
+                <a:latin typeface="Menlo" pitchFamily="34" charset="0"/>
+                <a:ea typeface="Menlo" pitchFamily="34" charset="-122"/>
+                <a:cs typeface="Menlo" pitchFamily="34" charset="-120"/>
+              </a:rPr>
+              <a:t>({ path: </a:t>
+            </a:r>
+            <a:pPr indent="0" marL="0">
+              <a:buNone/>
+            </a:pPr>
+            <a:r>
+              <a:rPr lang="en-US" sz="1000" dirty="0">
+                <a:solidFill>
+                  <a:srgbClr val="F0C15A"/>
+                </a:solidFill>
+                <a:latin typeface="Menlo" pitchFamily="34" charset="0"/>
+                <a:ea typeface="Menlo" pitchFamily="34" charset="-122"/>
+                <a:cs typeface="Menlo" pitchFamily="34" charset="-120"/>
+              </a:rPr>
+              <a:t>"invoice.pdf"</a:t>
+            </a:r>
+            <a:pPr indent="0" marL="0">
+              <a:buNone/>
+            </a:pPr>
+            <a:r>
+              <a:rPr lang="en-US" sz="1000" dirty="0">
+                <a:solidFill>
+                  <a:srgbClr val="EFEFEF"/>
+                </a:solidFill>
+                <a:latin typeface="Menlo" pitchFamily="34" charset="0"/>
+                <a:ea typeface="Menlo" pitchFamily="34" charset="-122"/>
+                <a:cs typeface="Menlo" pitchFamily="34" charset="-120"/>
+              </a:rPr>
+              <a:t>, format: </a:t>
+            </a:r>
+            <a:pPr indent="0" marL="0">
+              <a:buNone/>
+            </a:pPr>
+            <a:r>
+              <a:rPr lang="en-US" sz="1000" dirty="0">
+                <a:solidFill>
+                  <a:srgbClr val="F0C15A"/>
+                </a:solidFill>
+                <a:latin typeface="Menlo" pitchFamily="34" charset="0"/>
+                <a:ea typeface="Menlo" pitchFamily="34" charset="-122"/>
+                <a:cs typeface="Menlo" pitchFamily="34" charset="-120"/>
+              </a:rPr>
+              <a:t>"A4"</a:t>
+            </a:r>
+            <a:pPr indent="0" marL="0">
+              <a:buNone/>
+            </a:pPr>
+            <a:r>
+              <a:rPr lang="en-US" sz="1000" dirty="0">
+                <a:solidFill>
+                  <a:srgbClr val="EFEFEF"/>
+                </a:solidFill>
+                <a:latin typeface="Menlo" pitchFamily="34" charset="0"/>
+                <a:ea typeface="Menlo" pitchFamily="34" charset="-122"/>
+                <a:cs typeface="Menlo" pitchFamily="34" charset="-120"/>
+              </a:rPr>
+              <a:t> });</a:t>
+            </a:r>
+            <a:endParaRPr lang="en-US" sz="1000" dirty="0"/>
+          </a:p>
+        </p:txBody>
+      </p:sp>
+      <p:sp>
+        <p:nvSpPr>
+          <p:cNvPr id="28" name="Shape 26"/>
+          <p:cNvSpPr/>
+          <p:nvPr/>
+        </p:nvSpPr>
+        <p:spPr>
+          <a:xfrm>
+            <a:off x="6309360" y="4251960"/>
+            <a:ext cx="5440680" cy="2194560"/>
+          </a:xfrm>
+          <a:prstGeom prst="roundRect">
+            <a:avLst>
+              <a:gd name="adj" fmla="val 3333"/>
+            </a:avLst>
+          </a:prstGeom>
+          <a:solidFill>
+            <a:srgbClr val="FFFAF4"/>
+          </a:solidFill>
+          <a:ln w="12700">
+            <a:solidFill>
+              <a:srgbClr val="D8C5AE"/>
+            </a:solidFill>
+            <a:prstDash val="solid"/>
+          </a:ln>
+        </p:spPr>
+      </p:sp>
+      <p:sp>
+        <p:nvSpPr>
+          <p:cNvPr id="29" name="Text 27"/>
+          <p:cNvSpPr/>
+          <p:nvPr/>
+        </p:nvSpPr>
+        <p:spPr>
+          <a:xfrm>
+            <a:off x="6537960" y="4416552"/>
+            <a:ext cx="4983480" cy="237744"/>
+          </a:xfrm>
+          <a:prstGeom prst="rect">
+            <a:avLst/>
+          </a:prstGeom>
+          <a:noFill/>
+          <a:ln/>
+        </p:spPr>
+        <p:txBody>
+          <a:bodyPr wrap="square" rtlCol="0" anchor="ctr"/>
+          <a:lstStyle/>
+          <a:p>
+            <a:pPr indent="0" marL="0">
+              <a:buNone/>
+            </a:pPr>
+            <a:r>
+              <a:rPr lang="en-US" sz="2000" b="1" dirty="0">
+                <a:solidFill>
+                  <a:srgbClr val="0F0F0F"/>
+                </a:solidFill>
+                <a:latin typeface="Barlow Condensed" pitchFamily="34" charset="0"/>
+                <a:ea typeface="Barlow Condensed" pitchFamily="34" charset="-122"/>
+                <a:cs typeface="Barlow Condensed" pitchFamily="34" charset="-120"/>
+              </a:rPr>
+              <a:t>File Downloads</a:t>
+            </a:r>
+            <a:endParaRPr lang="en-US" sz="2000" dirty="0"/>
+          </a:p>
+        </p:txBody>
+      </p:sp>
+      <p:sp>
+        <p:nvSpPr>
+          <p:cNvPr id="30" name="Text 28"/>
+          <p:cNvSpPr/>
+          <p:nvPr/>
+        </p:nvSpPr>
+        <p:spPr>
+          <a:xfrm>
+            <a:off x="6537960" y="4727448"/>
+            <a:ext cx="4983480" cy="402336"/>
+          </a:xfrm>
+          <a:prstGeom prst="rect">
+            <a:avLst/>
+          </a:prstGeom>
+          <a:noFill/>
+          <a:ln/>
+        </p:spPr>
+        <p:txBody>
+          <a:bodyPr wrap="square" rtlCol="0" anchor="ctr">
+            <a:normAutofit/>
+          </a:bodyPr>
+          <a:lstStyle/>
+          <a:p>
+            <a:pPr indent="0" marL="0">
+              <a:buNone/>
+            </a:pPr>
+            <a:r>
+              <a:rPr lang="en-US" sz="1200" dirty="0">
+                <a:solidFill>
+                  <a:srgbClr val="6B6B6B"/>
+                </a:solidFill>
+                <a:latin typeface="Barlow" pitchFamily="34" charset="0"/>
+                <a:ea typeface="Barlow" pitchFamily="34" charset="-122"/>
+                <a:cs typeface="Barlow" pitchFamily="34" charset="-120"/>
+              </a:rPr>
+              <a:t>Intercept and save downloads to verify export flows.</a:t>
+            </a:r>
+            <a:endParaRPr lang="en-US" sz="1200" dirty="0"/>
+          </a:p>
+        </p:txBody>
+      </p:sp>
+      <p:sp>
+        <p:nvSpPr>
+          <p:cNvPr id="31" name="Shape 29"/>
+          <p:cNvSpPr/>
+          <p:nvPr/>
+        </p:nvSpPr>
+        <p:spPr>
+          <a:xfrm>
+            <a:off x="6537960" y="5212080"/>
+            <a:ext cx="4983480" cy="1042416"/>
+          </a:xfrm>
+          <a:prstGeom prst="roundRect">
+            <a:avLst>
+              <a:gd name="adj" fmla="val 7018"/>
+            </a:avLst>
+          </a:prstGeom>
+          <a:solidFill>
+            <a:srgbClr val="121212"/>
+          </a:solidFill>
+          <a:ln w="12700">
+            <a:solidFill>
+              <a:srgbClr val="1F1F1F"/>
+            </a:solidFill>
+            <a:prstDash val="solid"/>
+          </a:ln>
+        </p:spPr>
+      </p:sp>
+      <p:sp>
+        <p:nvSpPr>
+          <p:cNvPr id="32" name="Text 30"/>
+          <p:cNvSpPr/>
+          <p:nvPr/>
+        </p:nvSpPr>
+        <p:spPr>
+          <a:xfrm>
+            <a:off x="6766560" y="5376672"/>
+            <a:ext cx="4526280" cy="164592"/>
+          </a:xfrm>
+          <a:prstGeom prst="rect">
+            <a:avLst/>
+          </a:prstGeom>
+          <a:noFill/>
+          <a:ln/>
+        </p:spPr>
+        <p:txBody>
+          <a:bodyPr wrap="square" lIns="0" tIns="0" rIns="0" bIns="0" rtlCol="0" anchor="ctr">
+            <a:normAutofit/>
+          </a:bodyPr>
+          <a:lstStyle/>
+          <a:p>
+            <a:pPr indent="0" marL="0">
+              <a:buNone/>
+            </a:pPr>
+            <a:r>
+              <a:rPr lang="en-US" sz="1000" dirty="0">
+                <a:solidFill>
+                  <a:srgbClr val="F58AC1"/>
+                </a:solidFill>
+                <a:latin typeface="Menlo" pitchFamily="34" charset="0"/>
+                <a:ea typeface="Menlo" pitchFamily="34" charset="-122"/>
+                <a:cs typeface="Menlo" pitchFamily="34" charset="-120"/>
+              </a:rPr>
+              <a:t>const</a:t>
+            </a:r>
+            <a:pPr indent="0" marL="0">
+              <a:buNone/>
+            </a:pPr>
+            <a:r>
+              <a:rPr lang="en-US" sz="1000" dirty="0">
+                <a:solidFill>
+                  <a:srgbClr val="EFEFEF"/>
+                </a:solidFill>
+                <a:latin typeface="Menlo" pitchFamily="34" charset="0"/>
+                <a:ea typeface="Menlo" pitchFamily="34" charset="-122"/>
+                <a:cs typeface="Menlo" pitchFamily="34" charset="-120"/>
+              </a:rPr>
+              <a:t> [dl] = </a:t>
+            </a:r>
+            <a:pPr indent="0" marL="0">
+              <a:buNone/>
+            </a:pPr>
+            <a:r>
+              <a:rPr lang="en-US" sz="1000" dirty="0">
+                <a:solidFill>
+                  <a:srgbClr val="F58AC1"/>
+                </a:solidFill>
+                <a:latin typeface="Menlo" pitchFamily="34" charset="0"/>
+                <a:ea typeface="Menlo" pitchFamily="34" charset="-122"/>
+                <a:cs typeface="Menlo" pitchFamily="34" charset="-120"/>
+              </a:rPr>
+              <a:t>await</a:t>
+            </a:r>
+            <a:pPr indent="0" marL="0">
+              <a:buNone/>
+            </a:pPr>
+            <a:r>
+              <a:rPr lang="en-US" sz="1000" dirty="0">
+                <a:solidFill>
+                  <a:srgbClr val="EFEFEF"/>
+                </a:solidFill>
+                <a:latin typeface="Menlo" pitchFamily="34" charset="0"/>
+                <a:ea typeface="Menlo" pitchFamily="34" charset="-122"/>
+                <a:cs typeface="Menlo" pitchFamily="34" charset="-120"/>
+              </a:rPr>
+              <a:t> Promise</a:t>
+            </a:r>
+            <a:pPr indent="0" marL="0">
+              <a:buNone/>
+            </a:pPr>
+            <a:r>
+              <a:rPr lang="en-US" sz="1000" dirty="0">
+                <a:solidFill>
+                  <a:srgbClr val="8BD6C0"/>
+                </a:solidFill>
+                <a:latin typeface="Menlo" pitchFamily="34" charset="0"/>
+                <a:ea typeface="Menlo" pitchFamily="34" charset="-122"/>
+                <a:cs typeface="Menlo" pitchFamily="34" charset="-120"/>
+              </a:rPr>
+              <a:t>.all</a:t>
+            </a:r>
+            <a:pPr indent="0" marL="0">
+              <a:buNone/>
+            </a:pPr>
+            <a:r>
+              <a:rPr lang="en-US" sz="1000" dirty="0">
+                <a:solidFill>
+                  <a:srgbClr val="EFEFEF"/>
+                </a:solidFill>
+                <a:latin typeface="Menlo" pitchFamily="34" charset="0"/>
+                <a:ea typeface="Menlo" pitchFamily="34" charset="-122"/>
+                <a:cs typeface="Menlo" pitchFamily="34" charset="-120"/>
+              </a:rPr>
+              <a:t>([</a:t>
+            </a:r>
+            <a:endParaRPr lang="en-US" sz="1000" dirty="0"/>
+          </a:p>
+        </p:txBody>
+      </p:sp>
+      <p:sp>
+        <p:nvSpPr>
+          <p:cNvPr id="33" name="Text 31"/>
+          <p:cNvSpPr/>
+          <p:nvPr/>
+        </p:nvSpPr>
+        <p:spPr>
+          <a:xfrm>
+            <a:off x="6766560" y="5559552"/>
+            <a:ext cx="4526280" cy="164592"/>
+          </a:xfrm>
+          <a:prstGeom prst="rect">
+            <a:avLst/>
+          </a:prstGeom>
+          <a:noFill/>
+          <a:ln/>
+        </p:spPr>
+        <p:txBody>
+          <a:bodyPr wrap="square" lIns="0" tIns="0" rIns="0" bIns="0" rtlCol="0" anchor="ctr">
+            <a:normAutofit/>
+          </a:bodyPr>
+          <a:lstStyle/>
+          <a:p>
+            <a:pPr indent="0" marL="0">
+              <a:buNone/>
+            </a:pPr>
+            <a:r>
+              <a:rPr lang="en-US" sz="1000" dirty="0">
+                <a:solidFill>
+                  <a:srgbClr val="EFEFEF"/>
+                </a:solidFill>
+                <a:latin typeface="Menlo" pitchFamily="34" charset="0"/>
+                <a:ea typeface="Menlo" pitchFamily="34" charset="-122"/>
+                <a:cs typeface="Menlo" pitchFamily="34" charset="-120"/>
+              </a:rPr>
+              <a:t>  page</a:t>
+            </a:r>
+            <a:pPr indent="0" marL="0">
+              <a:buNone/>
+            </a:pPr>
+            <a:r>
+              <a:rPr lang="en-US" sz="1000" dirty="0">
+                <a:solidFill>
+                  <a:srgbClr val="8BD6C0"/>
+                </a:solidFill>
+                <a:latin typeface="Menlo" pitchFamily="34" charset="0"/>
+                <a:ea typeface="Menlo" pitchFamily="34" charset="-122"/>
+                <a:cs typeface="Menlo" pitchFamily="34" charset="-120"/>
+              </a:rPr>
+              <a:t>.waitForEvent</a:t>
+            </a:r>
+            <a:pPr indent="0" marL="0">
+              <a:buNone/>
+            </a:pPr>
+            <a:r>
+              <a:rPr lang="en-US" sz="1000" dirty="0">
+                <a:solidFill>
+                  <a:srgbClr val="EFEFEF"/>
+                </a:solidFill>
+                <a:latin typeface="Menlo" pitchFamily="34" charset="0"/>
+                <a:ea typeface="Menlo" pitchFamily="34" charset="-122"/>
+                <a:cs typeface="Menlo" pitchFamily="34" charset="-120"/>
+              </a:rPr>
+              <a:t>(</a:t>
+            </a:r>
+            <a:pPr indent="0" marL="0">
+              <a:buNone/>
+            </a:pPr>
+            <a:r>
+              <a:rPr lang="en-US" sz="1000" dirty="0">
+                <a:solidFill>
+                  <a:srgbClr val="F0C15A"/>
+                </a:solidFill>
+                <a:latin typeface="Menlo" pitchFamily="34" charset="0"/>
+                <a:ea typeface="Menlo" pitchFamily="34" charset="-122"/>
+                <a:cs typeface="Menlo" pitchFamily="34" charset="-120"/>
+              </a:rPr>
+              <a:t>"download"</a:t>
+            </a:r>
+            <a:pPr indent="0" marL="0">
+              <a:buNone/>
+            </a:pPr>
+            <a:r>
+              <a:rPr lang="en-US" sz="1000" dirty="0">
+                <a:solidFill>
+                  <a:srgbClr val="EFEFEF"/>
+                </a:solidFill>
+                <a:latin typeface="Menlo" pitchFamily="34" charset="0"/>
+                <a:ea typeface="Menlo" pitchFamily="34" charset="-122"/>
+                <a:cs typeface="Menlo" pitchFamily="34" charset="-120"/>
+              </a:rPr>
+              <a:t>), exportBtn</a:t>
+            </a:r>
+            <a:pPr indent="0" marL="0">
+              <a:buNone/>
+            </a:pPr>
+            <a:r>
+              <a:rPr lang="en-US" sz="1000" dirty="0">
+                <a:solidFill>
+                  <a:srgbClr val="8BD6C0"/>
+                </a:solidFill>
+                <a:latin typeface="Menlo" pitchFamily="34" charset="0"/>
+                <a:ea typeface="Menlo" pitchFamily="34" charset="-122"/>
+                <a:cs typeface="Menlo" pitchFamily="34" charset="-120"/>
+              </a:rPr>
+              <a:t>.click</a:t>
+            </a:r>
+            <a:pPr indent="0" marL="0">
+              <a:buNone/>
+            </a:pPr>
+            <a:r>
+              <a:rPr lang="en-US" sz="1000" dirty="0">
+                <a:solidFill>
+                  <a:srgbClr val="EFEFEF"/>
+                </a:solidFill>
+                <a:latin typeface="Menlo" pitchFamily="34" charset="0"/>
+                <a:ea typeface="Menlo" pitchFamily="34" charset="-122"/>
+                <a:cs typeface="Menlo" pitchFamily="34" charset="-120"/>
+              </a:rPr>
+              <a:t>()</a:t>
+            </a:r>
+            <a:endParaRPr lang="en-US" sz="1000" dirty="0"/>
+          </a:p>
+        </p:txBody>
+      </p:sp>
+      <p:sp>
+        <p:nvSpPr>
+          <p:cNvPr id="34" name="Text 32"/>
+          <p:cNvSpPr/>
+          <p:nvPr/>
+        </p:nvSpPr>
+        <p:spPr>
+          <a:xfrm>
+            <a:off x="6766560" y="5742432"/>
+            <a:ext cx="4526280" cy="164592"/>
+          </a:xfrm>
+          <a:prstGeom prst="rect">
+            <a:avLst/>
+          </a:prstGeom>
+          <a:noFill/>
+          <a:ln/>
+        </p:spPr>
+        <p:txBody>
+          <a:bodyPr wrap="square" lIns="0" tIns="0" rIns="0" bIns="0" rtlCol="0" anchor="ctr">
+            <a:normAutofit/>
+          </a:bodyPr>
+          <a:lstStyle/>
+          <a:p>
+            <a:pPr indent="0" marL="0">
+              <a:buNone/>
+            </a:pPr>
+            <a:r>
+              <a:rPr lang="en-US" sz="1000" dirty="0">
+                <a:solidFill>
+                  <a:srgbClr val="EFEFEF"/>
+                </a:solidFill>
+                <a:latin typeface="Menlo" pitchFamily="34" charset="0"/>
+                <a:ea typeface="Menlo" pitchFamily="34" charset="-122"/>
+                <a:cs typeface="Menlo" pitchFamily="34" charset="-120"/>
+              </a:rPr>
+              <a:t>]);</a:t>
+            </a:r>
+            <a:endParaRPr lang="en-US" sz="1000" dirty="0"/>
+          </a:p>
+        </p:txBody>
+      </p:sp>
+      <p:sp>
+        <p:nvSpPr>
+          <p:cNvPr id="35" name="Text 33"/>
+          <p:cNvSpPr/>
+          <p:nvPr/>
+        </p:nvSpPr>
+        <p:spPr>
+          <a:xfrm>
+            <a:off x="6766560" y="5925312"/>
+            <a:ext cx="4526280" cy="164592"/>
+          </a:xfrm>
+          <a:prstGeom prst="rect">
+            <a:avLst/>
+          </a:prstGeom>
+          <a:noFill/>
+          <a:ln/>
+        </p:spPr>
+        <p:txBody>
+          <a:bodyPr wrap="square" lIns="0" tIns="0" rIns="0" bIns="0" rtlCol="0" anchor="ctr">
+            <a:normAutofit/>
+          </a:bodyPr>
+          <a:lstStyle/>
+          <a:p>
+            <a:pPr indent="0" marL="0">
+              <a:buNone/>
+            </a:pPr>
+            <a:r>
+              <a:rPr lang="en-US" sz="1000" dirty="0">
+                <a:solidFill>
+                  <a:srgbClr val="F58AC1"/>
+                </a:solidFill>
+                <a:latin typeface="Menlo" pitchFamily="34" charset="0"/>
+                <a:ea typeface="Menlo" pitchFamily="34" charset="-122"/>
+                <a:cs typeface="Menlo" pitchFamily="34" charset="-120"/>
+              </a:rPr>
+              <a:t>await</a:t>
+            </a:r>
+            <a:pPr indent="0" marL="0">
+              <a:buNone/>
+            </a:pPr>
+            <a:r>
+              <a:rPr lang="en-US" sz="1000" dirty="0">
+                <a:solidFill>
+                  <a:srgbClr val="EFEFEF"/>
+                </a:solidFill>
+                <a:latin typeface="Menlo" pitchFamily="34" charset="0"/>
+                <a:ea typeface="Menlo" pitchFamily="34" charset="-122"/>
+                <a:cs typeface="Menlo" pitchFamily="34" charset="-120"/>
+              </a:rPr>
+              <a:t> dl</a:t>
+            </a:r>
+            <a:pPr indent="0" marL="0">
+              <a:buNone/>
+            </a:pPr>
+            <a:r>
+              <a:rPr lang="en-US" sz="1000" dirty="0">
+                <a:solidFill>
+                  <a:srgbClr val="8BD6C0"/>
+                </a:solidFill>
+                <a:latin typeface="Menlo" pitchFamily="34" charset="0"/>
+                <a:ea typeface="Menlo" pitchFamily="34" charset="-122"/>
+                <a:cs typeface="Menlo" pitchFamily="34" charset="-120"/>
+              </a:rPr>
+              <a:t>.saveAs</a:t>
+            </a:r>
+            <a:pPr indent="0" marL="0">
+              <a:buNone/>
+            </a:pPr>
+            <a:r>
+              <a:rPr lang="en-US" sz="1000" dirty="0">
+                <a:solidFill>
+                  <a:srgbClr val="EFEFEF"/>
+                </a:solidFill>
+                <a:latin typeface="Menlo" pitchFamily="34" charset="0"/>
+                <a:ea typeface="Menlo" pitchFamily="34" charset="-122"/>
+                <a:cs typeface="Menlo" pitchFamily="34" charset="-120"/>
+              </a:rPr>
+              <a:t>(</a:t>
+            </a:r>
+            <a:pPr indent="0" marL="0">
+              <a:buNone/>
+            </a:pPr>
+            <a:r>
+              <a:rPr lang="en-US" sz="1000" dirty="0">
+                <a:solidFill>
+                  <a:srgbClr val="F0C15A"/>
+                </a:solidFill>
+                <a:latin typeface="Menlo" pitchFamily="34" charset="0"/>
+                <a:ea typeface="Menlo" pitchFamily="34" charset="-122"/>
+                <a:cs typeface="Menlo" pitchFamily="34" charset="-120"/>
+              </a:rPr>
+              <a:t>"export.csv"</a:t>
+            </a:r>
+            <a:pPr indent="0" marL="0">
+              <a:buNone/>
+            </a:pPr>
+            <a:r>
+              <a:rPr lang="en-US" sz="1000" dirty="0">
+                <a:solidFill>
+                  <a:srgbClr val="EFEFEF"/>
+                </a:solidFill>
+                <a:latin typeface="Menlo" pitchFamily="34" charset="0"/>
+                <a:ea typeface="Menlo" pitchFamily="34" charset="-122"/>
+                <a:cs typeface="Menlo" pitchFamily="34" charset="-120"/>
+              </a:rPr>
+              <a:t>);</a:t>
+            </a:r>
+            <a:endParaRPr lang="en-US" sz="1000" dirty="0"/>
+          </a:p>
+        </p:txBody>
+      </p:sp>
+      <p:sp>
+        <p:nvSpPr>
+          <p:cNvPr id="36" name="Shape 34"/>
+          <p:cNvSpPr/>
+          <p:nvPr/>
+        </p:nvSpPr>
+        <p:spPr>
+          <a:xfrm>
+            <a:off x="457200" y="6446520"/>
+            <a:ext cx="11277295" cy="0"/>
+          </a:xfrm>
+          <a:prstGeom prst="line">
+            <a:avLst/>
+          </a:prstGeom>
+          <a:noFill/>
+          <a:ln w="12700">
+            <a:solidFill>
+              <a:srgbClr val="D7D7D7"/>
+            </a:solidFill>
+            <a:prstDash val="solid"/>
+          </a:ln>
+        </p:spPr>
+      </p:sp>
+      <p:sp>
+        <p:nvSpPr>
+          <p:cNvPr id="37" name="Text 35"/>
+          <p:cNvSpPr/>
+          <p:nvPr/>
+        </p:nvSpPr>
+        <p:spPr>
+          <a:xfrm>
+            <a:off x="457200" y="6473952"/>
+            <a:ext cx="5486400" cy="182880"/>
+          </a:xfrm>
+          <a:prstGeom prst="rect">
+            <a:avLst/>
+          </a:prstGeom>
+          <a:noFill/>
+          <a:ln/>
+        </p:spPr>
+        <p:txBody>
+          <a:bodyPr wrap="square" rtlCol="0" anchor="ctr"/>
+          <a:lstStyle/>
+          <a:p>
+            <a:pPr indent="0" marL="0">
+              <a:buNone/>
+            </a:pPr>
+            <a:r>
+              <a:rPr lang="en-US" sz="1000" dirty="0">
+                <a:solidFill>
+                  <a:srgbClr val="6B6B6B"/>
+                </a:solidFill>
+                <a:latin typeface="Barlow" pitchFamily="34" charset="0"/>
+                <a:ea typeface="Barlow" pitchFamily="34" charset="-122"/>
+                <a:cs typeface="Barlow" pitchFamily="34" charset="-120"/>
+              </a:rPr>
+              <a:t>sourcier.uk / Any task that needs a real browser</a:t>
+            </a:r>
+            <a:endParaRPr lang="en-US" sz="1000" dirty="0"/>
+          </a:p>
+        </p:txBody>
+      </p:sp>
+      <p:sp>
+        <p:nvSpPr>
+          <p:cNvPr id="25" name="Slide Number Placeholder 0"/>
+          <p:cNvSpPr>
+            <a:spLocks noGrp="1"/>
+          </p:cNvSpPr>
+          <p:nvPr>
+            <p:ph type="sldNum" sz="quarter" idx="4294967295"/>
+          </p:nvPr>
+        </p:nvSpPr>
+        <p:spPr>
+          <a:xfrm>
+            <a:off x="10744200" y="6473952"/>
+            <a:ext cx="1005840" cy="182880"/>
+          </a:xfrm>
+          <a:prstGeom prst="rect">
+            <a:avLst/>
+          </a:prstGeom>
+          <a:extLst>
+            <a:ext uri="{C572A759-6A51-4108-AA02-DFA0A04FC94B}">
+              <ma14:wrappingTextBoxFlag xmlns:ma14="http://schemas.microsoft.com/office/mac/drawingml/2011/main" val="0"/>
+            </a:ext>
+          </a:extLst>
+        </p:spPr>
+        <p:txBody>
+          <a:bodyPr lIns="0" tIns="0" rIns="0" bIns="0"/>
+          <a:lstStyle>
+            <a:lvl1pPr>
+              <a:defRPr sz="1000">
+                <a:solidFill>
+                  <a:srgbClr val="6B6B6B"/>
+                </a:solidFill>
+                <a:latin typeface="Barlow"/>
+                <a:ea typeface="Barlow"/>
+                <a:cs typeface="Barlow"/>
+              </a:defRPr>
+            </a:lvl1pPr>
+          </a:lstStyle>
+          <a:p>
+            <a:pPr algn="r"/>
+            <a:fld id="{F7021451-1387-4CA6-816F-3879F97B5CBC}" type="slidenum">
+              <a:rPr b="0" lang="en-US"/>
+              <a:t>14</a:t>
+            </a:fld>
+            <a:endParaRPr lang="en-US"/>
+          </a:p>
+        </p:txBody>
+      </p:sp>
+    </p:spTree>
+  </p:cSld>
+  <p:clrMapOvr>
+    <a:masterClrMapping/>
+  </p:clrMapOvr>
+</p:sld>
+</file>
+
+<file path=ppt/slides/slide15.xml><?xml version="1.0" encoding="utf-8"?>
+<p:sld xmlns:a="http://schemas.openxmlformats.org/drawingml/2006/main" xmlns:r="http://schemas.openxmlformats.org/officeDocument/2006/relationships" xmlns:p="http://schemas.openxmlformats.org/presentationml/2006/main">
+  <p:cSld name="Slide 15">
     <p:bg>
       <p:bgPr>
         <a:solidFill>
@@ -8040,7 +11606,7 @@
             <a:pPr algn="r"/>
             <a:fld id="{F7021451-1387-4CA6-816F-3879F97B5CBC}" type="slidenum">
               <a:rPr b="0" lang="en-US"/>
-              <a:t>13</a:t>
+              <a:t>15</a:t>
             </a:fld>
             <a:endParaRPr lang="en-US"/>
           </a:p>
@@ -10822,11 +14388,11 @@
         <p:spPr>
           <a:xfrm>
             <a:off x="822960" y="2871216"/>
-            <a:ext cx="4590288" cy="1719072"/>
+            <a:ext cx="4590288" cy="1847088"/>
           </a:xfrm>
           <a:prstGeom prst="roundRect">
             <a:avLst>
-              <a:gd name="adj" fmla="val 4255"/>
+              <a:gd name="adj" fmla="val 3960"/>
             </a:avLst>
           </a:prstGeom>
           <a:solidFill>
@@ -11213,19 +14779,17 @@
         </p:nvSpPr>
         <p:spPr>
           <a:xfrm>
-            <a:off x="1051560" y="5093208"/>
-            <a:ext cx="4160520" cy="201168"/>
-          </a:xfrm>
-          <a:prstGeom prst="rect">
-            <a:avLst/>
-          </a:prstGeom>
-          <a:noFill/>
-          <a:ln/>
-        </p:spPr>
-        <p:txBody>
-          <a:bodyPr wrap="square" rtlCol="0" anchor="ctr">
-            <a:normAutofit/>
-          </a:bodyPr>
+            <a:off x="1051560" y="5029200"/>
+            <a:ext cx="4160520" cy="457200"/>
+          </a:xfrm>
+          <a:prstGeom prst="rect">
+            <a:avLst/>
+          </a:prstGeom>
+          <a:noFill/>
+          <a:ln/>
+        </p:spPr>
+        <p:txBody>
+          <a:bodyPr wrap="square" rtlCol="0" anchor="ctr"/>
           <a:lstStyle/>
           <a:p>
             <a:pPr algn="ctr" indent="0" marL="0">
@@ -11294,7 +14858,7 @@
         <p:spPr>
           <a:xfrm>
             <a:off x="6565392" y="2907792"/>
-            <a:ext cx="4572000" cy="2697480"/>
+            <a:ext cx="4572000" cy="1965960"/>
           </a:xfrm>
           <a:prstGeom prst="rect">
             <a:avLst/>
@@ -11402,12 +14966,12 @@
         </p:nvSpPr>
         <p:spPr>
           <a:xfrm>
-            <a:off x="6565392" y="4828032"/>
-            <a:ext cx="4590288" cy="822960"/>
+            <a:off x="6565392" y="5138928"/>
+            <a:ext cx="4590288" cy="594360"/>
           </a:xfrm>
           <a:prstGeom prst="roundRect">
             <a:avLst>
-              <a:gd name="adj" fmla="val 8889"/>
+              <a:gd name="adj" fmla="val 12308"/>
             </a:avLst>
           </a:prstGeom>
           <a:solidFill>
@@ -11429,19 +14993,17 @@
         </p:nvSpPr>
         <p:spPr>
           <a:xfrm>
-            <a:off x="6784848" y="5093208"/>
-            <a:ext cx="4151376" cy="182880"/>
-          </a:xfrm>
-          <a:prstGeom prst="rect">
-            <a:avLst/>
-          </a:prstGeom>
-          <a:noFill/>
-          <a:ln/>
-        </p:spPr>
-        <p:txBody>
-          <a:bodyPr wrap="square" rtlCol="0" anchor="ctr">
-            <a:normAutofit/>
-          </a:bodyPr>
+            <a:off x="6784848" y="5230368"/>
+            <a:ext cx="4151376" cy="384048"/>
+          </a:xfrm>
+          <a:prstGeom prst="rect">
+            <a:avLst/>
+          </a:prstGeom>
+          <a:noFill/>
+          <a:ln/>
+        </p:spPr>
+        <p:txBody>
+          <a:bodyPr wrap="square" rtlCol="0" anchor="ctr"/>
           <a:lstStyle/>
           <a:p>
             <a:pPr algn="ctr" indent="0" marL="0">
@@ -13220,7 +16782,7 @@
                 <a:ea typeface="Menlo" pitchFamily="34" charset="-122"/>
                 <a:cs typeface="Menlo" pitchFamily="34" charset="-120"/>
               </a:rPr>
-              <a:t>//localhost:8888/.</a:t>
+              <a:t>//localhost:9000/.</a:t>
             </a:r>
             <a:endParaRPr lang="en-US" sz="960" dirty="0"/>
           </a:p>
@@ -13453,19 +17015,17 @@
         </p:nvSpPr>
         <p:spPr>
           <a:xfrm>
-            <a:off x="1051560" y="5102352"/>
-            <a:ext cx="4160520" cy="256032"/>
-          </a:xfrm>
-          <a:prstGeom prst="rect">
-            <a:avLst/>
-          </a:prstGeom>
-          <a:noFill/>
-          <a:ln/>
-        </p:spPr>
-        <p:txBody>
-          <a:bodyPr wrap="square" rtlCol="0" anchor="ctr">
-            <a:normAutofit/>
-          </a:bodyPr>
+            <a:off x="1051560" y="5020056"/>
+            <a:ext cx="4160520" cy="457200"/>
+          </a:xfrm>
+          <a:prstGeom prst="rect">
+            <a:avLst/>
+          </a:prstGeom>
+          <a:noFill/>
+          <a:ln/>
+        </p:spPr>
+        <p:txBody>
+          <a:bodyPr wrap="square" rtlCol="0" anchor="ctr"/>
           <a:lstStyle/>
           <a:p>
             <a:pPr algn="ctr" indent="0" marL="0">
@@ -13480,7 +17040,7 @@
                 <a:ea typeface="Barlow" pitchFamily="34" charset="-122"/>
                 <a:cs typeface="Barlow" pitchFamily="34" charset="-120"/>
               </a:rPr>
-              <a:t>Runs against http://localhost:8888/ with Playwright MCP controlling a real browser session.</a:t>
+              <a:t>Runs against http://localhost:9000/ with Playwright MCP controlling a real browser session.</a:t>
             </a:r>
             <a:endParaRPr lang="en-US" sz="1300" dirty="0"/>
           </a:p>
@@ -14068,12 +17628,12 @@
         </p:nvSpPr>
         <p:spPr>
           <a:xfrm>
-            <a:off x="6565392" y="5413248"/>
-            <a:ext cx="4590288" cy="749808"/>
+            <a:off x="6565392" y="5394960"/>
+            <a:ext cx="4590288" cy="658368"/>
           </a:xfrm>
           <a:prstGeom prst="roundRect">
             <a:avLst>
-              <a:gd name="adj" fmla="val 9756"/>
+              <a:gd name="adj" fmla="val 11111"/>
             </a:avLst>
           </a:prstGeom>
           <a:solidFill>
@@ -14095,26 +17655,24 @@
         </p:nvSpPr>
         <p:spPr>
           <a:xfrm>
-            <a:off x="6784848" y="5641848"/>
-            <a:ext cx="4151376" cy="201168"/>
-          </a:xfrm>
-          <a:prstGeom prst="rect">
-            <a:avLst/>
-          </a:prstGeom>
-          <a:noFill/>
-          <a:ln/>
-        </p:spPr>
-        <p:txBody>
-          <a:bodyPr wrap="square" rtlCol="0" anchor="ctr">
-            <a:normAutofit/>
-          </a:bodyPr>
+            <a:off x="6784848" y="5522976"/>
+            <a:ext cx="4151376" cy="384048"/>
+          </a:xfrm>
+          <a:prstGeom prst="rect">
+            <a:avLst/>
+          </a:prstGeom>
+          <a:noFill/>
+          <a:ln/>
+        </p:spPr>
+        <p:txBody>
+          <a:bodyPr wrap="square" rtlCol="0" anchor="ctr"/>
           <a:lstStyle/>
           <a:p>
             <a:pPr algn="ctr" indent="0" marL="0">
               <a:buNone/>
             </a:pPr>
             <a:r>
-              <a:rPr lang="en-US" sz="1250" dirty="0">
+              <a:rPr lang="en-US" sz="1300" dirty="0">
                 <a:solidFill>
                   <a:srgbClr val="0F0F0F"/>
                 </a:solidFill>
@@ -14122,9 +17680,9 @@
                 <a:ea typeface="Barlow" pitchFamily="34" charset="-122"/>
                 <a:cs typeface="Barlow" pitchFamily="34" charset="-120"/>
               </a:rPr>
-              <a:t>Key message: AI helps with discovery. Playwright still handles the real automation and verification.</a:t>
-            </a:r>
-            <a:endParaRPr lang="en-US" sz="1250" dirty="0"/>
+              <a:t>AI handles discovery. Playwright handles the automation and verification.</a:t>
+            </a:r>
+            <a:endParaRPr lang="en-US" sz="1300" dirty="0"/>
           </a:p>
         </p:txBody>
       </p:sp>
@@ -14658,7 +18216,7 @@
                 <a:ea typeface="Barlow" pitchFamily="34" charset="-122"/>
                 <a:cs typeface="Barlow" pitchFamily="34" charset="-120"/>
               </a:rPr>
-              <a:t>• Codegen gives you a fast starting point for real flows.</a:t>
+              <a:t>• Codegen captures raw actions fast. --ui steps through tests live with a DOM inspector.</a:t>
             </a:r>
             <a:endParaRPr lang="en-US" sz="1800" dirty="0"/>
           </a:p>
@@ -14690,11 +18248,11 @@
         <p:spPr>
           <a:xfrm>
             <a:off x="6629400" y="2148840"/>
-            <a:ext cx="4663440" cy="1874520"/>
+            <a:ext cx="4663440" cy="1993392"/>
           </a:xfrm>
           <a:prstGeom prst="roundRect">
             <a:avLst>
-              <a:gd name="adj" fmla="val 3902"/>
+              <a:gd name="adj" fmla="val 3670"/>
             </a:avLst>
           </a:prstGeom>
           <a:solidFill>
@@ -14932,6 +18490,34 @@
                 <a:ea typeface="Menlo" pitchFamily="34" charset="-122"/>
                 <a:cs typeface="Menlo" pitchFamily="34" charset="-120"/>
               </a:rPr>
+              <a:t>exec</a:t>
+            </a:r>
+            <a:pPr indent="0" marL="0">
+              <a:buNone/>
+            </a:pPr>
+            <a:r>
+              <a:rPr lang="en-US" sz="1200" dirty="0">
+                <a:solidFill>
+                  <a:srgbClr val="EFEFEF"/>
+                </a:solidFill>
+                <a:latin typeface="Menlo" pitchFamily="34" charset="0"/>
+                <a:ea typeface="Menlo" pitchFamily="34" charset="-122"/>
+                <a:cs typeface="Menlo" pitchFamily="34" charset="-120"/>
+              </a:rPr>
+              <a:t> </a:t>
+            </a:r>
+            <a:pPr indent="0" marL="0">
+              <a:buNone/>
+            </a:pPr>
+            <a:r>
+              <a:rPr lang="en-US" sz="1200" dirty="0">
+                <a:solidFill>
+                  <a:srgbClr val="EFEFEF"/>
+                </a:solidFill>
+                <a:latin typeface="Menlo" pitchFamily="34" charset="0"/>
+                <a:ea typeface="Menlo" pitchFamily="34" charset="-122"/>
+                <a:cs typeface="Menlo" pitchFamily="34" charset="-120"/>
+              </a:rPr>
               <a:t>playwright</a:t>
             </a:r>
             <a:pPr indent="0" marL="0">
@@ -15057,6 +18643,34 @@
                 <a:ea typeface="Menlo" pitchFamily="34" charset="-122"/>
                 <a:cs typeface="Menlo" pitchFamily="34" charset="-120"/>
               </a:rPr>
+              <a:t>exec</a:t>
+            </a:r>
+            <a:pPr indent="0" marL="0">
+              <a:buNone/>
+            </a:pPr>
+            <a:r>
+              <a:rPr lang="en-US" sz="1200" dirty="0">
+                <a:solidFill>
+                  <a:srgbClr val="EFEFEF"/>
+                </a:solidFill>
+                <a:latin typeface="Menlo" pitchFamily="34" charset="0"/>
+                <a:ea typeface="Menlo" pitchFamily="34" charset="-122"/>
+                <a:cs typeface="Menlo" pitchFamily="34" charset="-120"/>
+              </a:rPr>
+              <a:t> </a:t>
+            </a:r>
+            <a:pPr indent="0" marL="0">
+              <a:buNone/>
+            </a:pPr>
+            <a:r>
+              <a:rPr lang="en-US" sz="1200" dirty="0">
+                <a:solidFill>
+                  <a:srgbClr val="EFEFEF"/>
+                </a:solidFill>
+                <a:latin typeface="Menlo" pitchFamily="34" charset="0"/>
+                <a:ea typeface="Menlo" pitchFamily="34" charset="-122"/>
+                <a:cs typeface="Menlo" pitchFamily="34" charset="-120"/>
+              </a:rPr>
               <a:t>playwright</a:t>
             </a:r>
             <a:pPr indent="0" marL="0">
@@ -15154,6 +18768,34 @@
                 <a:ea typeface="Menlo" pitchFamily="34" charset="-122"/>
                 <a:cs typeface="Menlo" pitchFamily="34" charset="-120"/>
               </a:rPr>
+              <a:t>exec</a:t>
+            </a:r>
+            <a:pPr indent="0" marL="0">
+              <a:buNone/>
+            </a:pPr>
+            <a:r>
+              <a:rPr lang="en-US" sz="1200" dirty="0">
+                <a:solidFill>
+                  <a:srgbClr val="EFEFEF"/>
+                </a:solidFill>
+                <a:latin typeface="Menlo" pitchFamily="34" charset="0"/>
+                <a:ea typeface="Menlo" pitchFamily="34" charset="-122"/>
+                <a:cs typeface="Menlo" pitchFamily="34" charset="-120"/>
+              </a:rPr>
+              <a:t> </a:t>
+            </a:r>
+            <a:pPr indent="0" marL="0">
+              <a:buNone/>
+            </a:pPr>
+            <a:r>
+              <a:rPr lang="en-US" sz="1200" dirty="0">
+                <a:solidFill>
+                  <a:srgbClr val="EFEFEF"/>
+                </a:solidFill>
+                <a:latin typeface="Menlo" pitchFamily="34" charset="0"/>
+                <a:ea typeface="Menlo" pitchFamily="34" charset="-122"/>
+                <a:cs typeface="Menlo" pitchFamily="34" charset="-120"/>
+              </a:rPr>
               <a:t>playwright</a:t>
             </a:r>
             <a:pPr indent="0" marL="0">
@@ -15182,6 +18824,159 @@
                 <a:ea typeface="Menlo" pitchFamily="34" charset="-122"/>
                 <a:cs typeface="Menlo" pitchFamily="34" charset="-120"/>
               </a:rPr>
+              <a:t>test</a:t>
+            </a:r>
+            <a:pPr indent="0" marL="0">
+              <a:buNone/>
+            </a:pPr>
+            <a:r>
+              <a:rPr lang="en-US" sz="1200" dirty="0">
+                <a:solidFill>
+                  <a:srgbClr val="EFEFEF"/>
+                </a:solidFill>
+                <a:latin typeface="Menlo" pitchFamily="34" charset="0"/>
+                <a:ea typeface="Menlo" pitchFamily="34" charset="-122"/>
+                <a:cs typeface="Menlo" pitchFamily="34" charset="-120"/>
+              </a:rPr>
+              <a:t> </a:t>
+            </a:r>
+            <a:pPr indent="0" marL="0">
+              <a:buNone/>
+            </a:pPr>
+            <a:r>
+              <a:rPr lang="en-US" sz="1200" dirty="0">
+                <a:solidFill>
+                  <a:srgbClr val="F58AC1"/>
+                </a:solidFill>
+                <a:latin typeface="Menlo" pitchFamily="34" charset="0"/>
+                <a:ea typeface="Menlo" pitchFamily="34" charset="-122"/>
+                <a:cs typeface="Menlo" pitchFamily="34" charset="-120"/>
+              </a:rPr>
+              <a:t>--ui</a:t>
+            </a:r>
+            <a:endParaRPr lang="en-US" sz="1200" dirty="0"/>
+          </a:p>
+        </p:txBody>
+      </p:sp>
+      <p:sp>
+        <p:nvSpPr>
+          <p:cNvPr id="19" name="Text 17"/>
+          <p:cNvSpPr/>
+          <p:nvPr/>
+        </p:nvSpPr>
+        <p:spPr>
+          <a:xfrm>
+            <a:off x="6867144" y="3831336"/>
+            <a:ext cx="4187952" cy="201168"/>
+          </a:xfrm>
+          <a:prstGeom prst="rect">
+            <a:avLst/>
+          </a:prstGeom>
+          <a:noFill/>
+          <a:ln/>
+        </p:spPr>
+        <p:txBody>
+          <a:bodyPr wrap="square" lIns="0" tIns="0" rIns="0" bIns="0" rtlCol="0" anchor="ctr">
+            <a:normAutofit/>
+          </a:bodyPr>
+          <a:lstStyle/>
+          <a:p>
+            <a:pPr indent="0" marL="0">
+              <a:buNone/>
+            </a:pPr>
+            <a:r>
+              <a:rPr lang="en-US" sz="1200" dirty="0">
+                <a:solidFill>
+                  <a:srgbClr val="8BD6C0"/>
+                </a:solidFill>
+                <a:latin typeface="Menlo" pitchFamily="34" charset="0"/>
+                <a:ea typeface="Menlo" pitchFamily="34" charset="-122"/>
+                <a:cs typeface="Menlo" pitchFamily="34" charset="-120"/>
+              </a:rPr>
+              <a:t>pnpm</a:t>
+            </a:r>
+            <a:pPr indent="0" marL="0">
+              <a:buNone/>
+            </a:pPr>
+            <a:r>
+              <a:rPr lang="en-US" sz="1200" dirty="0">
+                <a:solidFill>
+                  <a:srgbClr val="EFEFEF"/>
+                </a:solidFill>
+                <a:latin typeface="Menlo" pitchFamily="34" charset="0"/>
+                <a:ea typeface="Menlo" pitchFamily="34" charset="-122"/>
+                <a:cs typeface="Menlo" pitchFamily="34" charset="-120"/>
+              </a:rPr>
+              <a:t> </a:t>
+            </a:r>
+            <a:pPr indent="0" marL="0">
+              <a:buNone/>
+            </a:pPr>
+            <a:r>
+              <a:rPr lang="en-US" sz="1200" dirty="0">
+                <a:solidFill>
+                  <a:srgbClr val="EFEFEF"/>
+                </a:solidFill>
+                <a:latin typeface="Menlo" pitchFamily="34" charset="0"/>
+                <a:ea typeface="Menlo" pitchFamily="34" charset="-122"/>
+                <a:cs typeface="Menlo" pitchFamily="34" charset="-120"/>
+              </a:rPr>
+              <a:t>exec</a:t>
+            </a:r>
+            <a:pPr indent="0" marL="0">
+              <a:buNone/>
+            </a:pPr>
+            <a:r>
+              <a:rPr lang="en-US" sz="1200" dirty="0">
+                <a:solidFill>
+                  <a:srgbClr val="EFEFEF"/>
+                </a:solidFill>
+                <a:latin typeface="Menlo" pitchFamily="34" charset="0"/>
+                <a:ea typeface="Menlo" pitchFamily="34" charset="-122"/>
+                <a:cs typeface="Menlo" pitchFamily="34" charset="-120"/>
+              </a:rPr>
+              <a:t> </a:t>
+            </a:r>
+            <a:pPr indent="0" marL="0">
+              <a:buNone/>
+            </a:pPr>
+            <a:r>
+              <a:rPr lang="en-US" sz="1200" dirty="0">
+                <a:solidFill>
+                  <a:srgbClr val="EFEFEF"/>
+                </a:solidFill>
+                <a:latin typeface="Menlo" pitchFamily="34" charset="0"/>
+                <a:ea typeface="Menlo" pitchFamily="34" charset="-122"/>
+                <a:cs typeface="Menlo" pitchFamily="34" charset="-120"/>
+              </a:rPr>
+              <a:t>playwright</a:t>
+            </a:r>
+            <a:pPr indent="0" marL="0">
+              <a:buNone/>
+            </a:pPr>
+            <a:r>
+              <a:rPr lang="en-US" sz="1200" dirty="0">
+                <a:solidFill>
+                  <a:srgbClr val="EFEFEF"/>
+                </a:solidFill>
+                <a:latin typeface="Menlo" pitchFamily="34" charset="0"/>
+                <a:ea typeface="Menlo" pitchFamily="34" charset="-122"/>
+                <a:cs typeface="Menlo" pitchFamily="34" charset="-120"/>
+              </a:rPr>
+              <a:t> </a:t>
+            </a:r>
+            <a:pPr indent="0" marL="0">
+              <a:buNone/>
+            </a:pPr>
+            <a:r>
+              <a:rPr lang="en-US" sz="1200" dirty="0">
+                <a:solidFill>
+                  <a:srgbClr val="EFEFEF"/>
+                </a:solidFill>
+                <a:latin typeface="Menlo" pitchFamily="34" charset="0"/>
+                <a:ea typeface="Menlo" pitchFamily="34" charset="-122"/>
+                <a:cs typeface="Menlo" pitchFamily="34" charset="-120"/>
+              </a:rPr>
               <a:t>show-trace</a:t>
             </a:r>
             <a:pPr indent="0" marL="0">
@@ -15218,7 +19013,7 @@
       </p:sp>
       <p:sp>
         <p:nvSpPr>
-          <p:cNvPr id="19" name="Shape 17"/>
+          <p:cNvPr id="20" name="Shape 18"/>
           <p:cNvSpPr/>
           <p:nvPr/>
         </p:nvSpPr>
@@ -15245,7 +19040,7 @@
       </p:sp>
       <p:sp>
         <p:nvSpPr>
-          <p:cNvPr id="20" name="Text 18"/>
+          <p:cNvPr id="21" name="Text 19"/>
           <p:cNvSpPr/>
           <p:nvPr/>
         </p:nvSpPr>
@@ -15284,7 +19079,7 @@
       </p:sp>
       <p:sp>
         <p:nvSpPr>
-          <p:cNvPr id="21" name="Text 19"/>
+          <p:cNvPr id="22" name="Text 20"/>
           <p:cNvSpPr/>
           <p:nvPr/>
         </p:nvSpPr>
@@ -15325,7 +19120,7 @@
       </p:sp>
       <p:sp>
         <p:nvSpPr>
-          <p:cNvPr id="22" name="Shape 20"/>
+          <p:cNvPr id="23" name="Shape 21"/>
           <p:cNvSpPr/>
           <p:nvPr/>
         </p:nvSpPr>
@@ -15348,7 +19143,7 @@
       </p:sp>
       <p:sp>
         <p:nvSpPr>
-          <p:cNvPr id="23" name="Text 21"/>
+          <p:cNvPr id="24" name="Text 22"/>
           <p:cNvSpPr/>
           <p:nvPr/>
         </p:nvSpPr>
@@ -16075,11 +19870,11 @@
         <p:spPr>
           <a:xfrm>
             <a:off x="6446520" y="4709160"/>
-            <a:ext cx="4709160" cy="1005840"/>
+            <a:ext cx="4709160" cy="1188720"/>
           </a:xfrm>
           <a:prstGeom prst="roundRect">
             <a:avLst>
-              <a:gd name="adj" fmla="val 7273"/>
+              <a:gd name="adj" fmla="val 6154"/>
             </a:avLst>
           </a:prstGeom>
           <a:solidFill>
@@ -16184,7 +19979,7 @@
               <a:buNone/>
             </a:pPr>
             <a:r>
-              <a:rPr lang="en-US" sz="1050" dirty="0">
+              <a:rPr lang="en-US" sz="950" dirty="0">
                 <a:solidFill>
                   <a:srgbClr val="8BD6C0"/>
                 </a:solidFill>
@@ -16198,7 +19993,7 @@
               <a:buNone/>
             </a:pPr>
             <a:r>
-              <a:rPr lang="en-US" sz="1050" dirty="0">
+              <a:rPr lang="en-US" sz="950" dirty="0">
                 <a:solidFill>
                   <a:srgbClr val="EFEFEF"/>
                 </a:solidFill>
@@ -16212,7 +20007,7 @@
               <a:buNone/>
             </a:pPr>
             <a:r>
-              <a:rPr lang="en-US" sz="1050" dirty="0">
+              <a:rPr lang="en-US" sz="950" dirty="0">
                 <a:solidFill>
                   <a:srgbClr val="EFEFEF"/>
                 </a:solidFill>
@@ -16226,7 +20021,7 @@
               <a:buNone/>
             </a:pPr>
             <a:r>
-              <a:rPr lang="en-US" sz="1050" dirty="0">
+              <a:rPr lang="en-US" sz="950" dirty="0">
                 <a:solidFill>
                   <a:srgbClr val="EFEFEF"/>
                 </a:solidFill>
@@ -16240,7 +20035,7 @@
               <a:buNone/>
             </a:pPr>
             <a:r>
-              <a:rPr lang="en-US" sz="1050" dirty="0">
+              <a:rPr lang="en-US" sz="950" dirty="0">
                 <a:solidFill>
                   <a:srgbClr val="EFEFEF"/>
                 </a:solidFill>
@@ -16250,7 +20045,7 @@
               </a:rPr>
               <a:t>playwright@latest</a:t>
             </a:r>
-            <a:endParaRPr lang="en-US" sz="1050" dirty="0"/>
+            <a:endParaRPr lang="en-US" sz="950" dirty="0"/>
           </a:p>
         </p:txBody>
       </p:sp>
@@ -16281,7 +20076,7 @@
               <a:buNone/>
             </a:pPr>
             <a:r>
-              <a:rPr lang="en-US" sz="1050" dirty="0">
+              <a:rPr lang="en-US" sz="950" dirty="0">
                 <a:solidFill>
                   <a:srgbClr val="8BD6C0"/>
                 </a:solidFill>
@@ -16295,7 +20090,7 @@
               <a:buNone/>
             </a:pPr>
             <a:r>
-              <a:rPr lang="en-US" sz="1050" dirty="0">
+              <a:rPr lang="en-US" sz="950" dirty="0">
                 <a:solidFill>
                   <a:srgbClr val="EFEFEF"/>
                 </a:solidFill>
@@ -16309,7 +20104,7 @@
               <a:buNone/>
             </a:pPr>
             <a:r>
-              <a:rPr lang="en-US" sz="1050" dirty="0">
+              <a:rPr lang="en-US" sz="950" dirty="0">
                 <a:solidFill>
                   <a:srgbClr val="EFEFEF"/>
                 </a:solidFill>
@@ -16317,13 +20112,41 @@
                 <a:ea typeface="Menlo" pitchFamily="34" charset="-122"/>
                 <a:cs typeface="Menlo" pitchFamily="34" charset="-120"/>
               </a:rPr>
+              <a:t>exec</a:t>
+            </a:r>
+            <a:pPr indent="0" marL="0">
+              <a:buNone/>
+            </a:pPr>
+            <a:r>
+              <a:rPr lang="en-US" sz="950" dirty="0">
+                <a:solidFill>
+                  <a:srgbClr val="EFEFEF"/>
+                </a:solidFill>
+                <a:latin typeface="Menlo" pitchFamily="34" charset="0"/>
+                <a:ea typeface="Menlo" pitchFamily="34" charset="-122"/>
+                <a:cs typeface="Menlo" pitchFamily="34" charset="-120"/>
+              </a:rPr>
+              <a:t> </a:t>
+            </a:r>
+            <a:pPr indent="0" marL="0">
+              <a:buNone/>
+            </a:pPr>
+            <a:r>
+              <a:rPr lang="en-US" sz="950" dirty="0">
+                <a:solidFill>
+                  <a:srgbClr val="EFEFEF"/>
+                </a:solidFill>
+                <a:latin typeface="Menlo" pitchFamily="34" charset="0"/>
+                <a:ea typeface="Menlo" pitchFamily="34" charset="-122"/>
+                <a:cs typeface="Menlo" pitchFamily="34" charset="-120"/>
+              </a:rPr>
               <a:t>playwright</a:t>
             </a:r>
             <a:pPr indent="0" marL="0">
               <a:buNone/>
             </a:pPr>
             <a:r>
-              <a:rPr lang="en-US" sz="1050" dirty="0">
+              <a:rPr lang="en-US" sz="950" dirty="0">
                 <a:solidFill>
                   <a:srgbClr val="EFEFEF"/>
                 </a:solidFill>
@@ -16337,7 +20160,7 @@
               <a:buNone/>
             </a:pPr>
             <a:r>
-              <a:rPr lang="en-US" sz="1050" dirty="0">
+              <a:rPr lang="en-US" sz="950" dirty="0">
                 <a:solidFill>
                   <a:srgbClr val="EFEFEF"/>
                 </a:solidFill>
@@ -16351,7 +20174,7 @@
               <a:buNone/>
             </a:pPr>
             <a:r>
-              <a:rPr lang="en-US" sz="1050" dirty="0">
+              <a:rPr lang="en-US" sz="950" dirty="0">
                 <a:solidFill>
                   <a:srgbClr val="EFEFEF"/>
                 </a:solidFill>
@@ -16365,7 +20188,7 @@
               <a:buNone/>
             </a:pPr>
             <a:r>
-              <a:rPr lang="en-US" sz="1050" dirty="0">
+              <a:rPr lang="en-US" sz="950" dirty="0">
                 <a:solidFill>
                   <a:srgbClr val="F0C15A"/>
                 </a:solidFill>
@@ -16375,7 +20198,7 @@
               </a:rPr>
               <a:t>https://your-app.example</a:t>
             </a:r>
-            <a:endParaRPr lang="en-US" sz="1050" dirty="0"/>
+            <a:endParaRPr lang="en-US" sz="950" dirty="0"/>
           </a:p>
         </p:txBody>
       </p:sp>
